--- a/slides/Group10_Brief_C.pptx
+++ b/slides/Group10_Brief_C.pptx
@@ -4,19 +4,22 @@
   <p:sldMasterIdLst>
     <p:sldMasterId id="2147483648" r:id="rId1"/>
   </p:sldMasterIdLst>
+  <p:notesMasterIdLst>
+    <p:notesMasterId r:id="rId12"/>
+  </p:notesMasterIdLst>
   <p:sldIdLst>
-    <p:sldId id="256" r:id="rId7"/>
-    <p:sldId id="257" r:id="rId9"/>
-    <p:sldId id="258" r:id="rId10"/>
-    <p:sldId id="259" r:id="rId11"/>
-    <p:sldId id="260" r:id="rId12"/>
-    <p:sldId id="261" r:id="rId13"/>
-    <p:sldId id="262" r:id="rId14"/>
-    <p:sldId id="263" r:id="rId15"/>
-    <p:sldId id="264" r:id="rId16"/>
-    <p:sldId id="265" r:id="rId17"/>
+    <p:sldId id="256" r:id="rId2"/>
+    <p:sldId id="257" r:id="rId3"/>
+    <p:sldId id="258" r:id="rId4"/>
+    <p:sldId id="259" r:id="rId5"/>
+    <p:sldId id="260" r:id="rId6"/>
+    <p:sldId id="261" r:id="rId7"/>
+    <p:sldId id="262" r:id="rId8"/>
+    <p:sldId id="263" r:id="rId9"/>
+    <p:sldId id="264" r:id="rId10"/>
+    <p:sldId id="265" r:id="rId11"/>
   </p:sldIdLst>
-  <p:sldSz cx="12191695" cy="6858000" type="screen4x3"/>
+  <p:sldSz cx="12192000" cy="6858000"/>
   <p:notesSz cx="6858000" cy="9144000"/>
   <p:defaultTextStyle>
     <a:defPPr>
@@ -113,11 +116,27 @@
       </a:defRPr>
     </a:lvl9pPr>
   </p:defaultTextStyle>
+  <p:extLst>
+    <p:ext uri="{EFAFB233-063F-42B5-8137-9DF3F51BA10A}">
+      <p15:sldGuideLst xmlns:p15="http://schemas.microsoft.com/office/powerpoint/2012/main">
+        <p15:guide id="1" orient="horz" pos="2160">
+          <p15:clr>
+            <a:srgbClr val="A4A3A4"/>
+          </p15:clr>
+        </p15:guide>
+        <p15:guide id="2" pos="2880">
+          <p15:clr>
+            <a:srgbClr val="A4A3A4"/>
+          </p15:clr>
+        </p15:guide>
+      </p15:sldGuideLst>
+    </p:ext>
+  </p:extLst>
 </p:presentation>
 </file>
 
 <file path=ppt/notesMasters/notesMaster1.xml><?xml version="1.0" encoding="utf-8"?>
-<p:notesMaster xmlns:a="http://schemas.openxmlformats.org/drawingml/2006/main" xmlns:p="http://schemas.openxmlformats.org/presentationml/2006/main" xmlns:r="http://schemas.openxmlformats.org/officeDocument/2006/relationships">
+<p:notesMaster xmlns:a="http://schemas.openxmlformats.org/drawingml/2006/main" xmlns:r="http://schemas.openxmlformats.org/officeDocument/2006/relationships" xmlns:p="http://schemas.openxmlformats.org/presentationml/2006/main">
   <p:cSld>
     <p:bg>
       <p:bgRef idx="1001">
@@ -138,241 +157,16 @@
           <a:chExt cx="0" cy="0"/>
         </a:xfrm>
       </p:grpSpPr>
-      <p:sp>
-        <p:nvSpPr>
-          <p:cNvPr id="2" name="Header Placeholder 1"/>
-          <p:cNvSpPr>
-            <a:spLocks noGrp="1"/>
-          </p:cNvSpPr>
-          <p:nvPr>
-            <p:ph type="hdr" sz="quarter"/>
-          </p:nvPr>
-        </p:nvSpPr>
-        <p:spPr>
-          <a:xfrm>
-            <a:off x="0" y="0"/>
-            <a:ext cx="2971800" cy="457200"/>
-          </a:xfrm>
-          <a:prstGeom prst="rect">
-            <a:avLst/>
-          </a:prstGeom>
-        </p:spPr>
-        <p:txBody>
-          <a:bodyPr vert="horz" lIns="91440" tIns="45720" rIns="91440" bIns="45720" rtlCol="0"/>
-          <a:lstStyle>
-            <a:lvl1pPr algn="l">
-              <a:defRPr sz="1200"/>
-            </a:lvl1pPr>
-          </a:lstStyle>
-          <a:p>
-            <a:endParaRPr lang="en-US"/>
-          </a:p>
-        </p:txBody>
-      </p:sp>
-      <p:sp>
-        <p:nvSpPr>
-          <p:cNvPr id="3" name="Date Placeholder 2"/>
-          <p:cNvSpPr>
-            <a:spLocks noGrp="1"/>
-          </p:cNvSpPr>
-          <p:nvPr>
-            <p:ph type="dt" idx="1"/>
-          </p:nvPr>
-        </p:nvSpPr>
-        <p:spPr>
-          <a:xfrm>
-            <a:off x="3884613" y="0"/>
-            <a:ext cx="2971800" cy="457200"/>
-          </a:xfrm>
-          <a:prstGeom prst="rect">
-            <a:avLst/>
-          </a:prstGeom>
-        </p:spPr>
-        <p:txBody>
-          <a:bodyPr vert="horz" lIns="91440" tIns="45720" rIns="91440" bIns="45720" rtlCol="0"/>
-          <a:lstStyle>
-            <a:lvl1pPr algn="r">
-              <a:defRPr sz="1200"/>
-            </a:lvl1pPr>
-          </a:lstStyle>
-          <a:p>
-            <a:fld id="{0F89C1C7-3DCD-1040-A9CF-14679D8B5DDD}" type="datetimeFigureOut">
-              <a:rPr lang="en-US" smtClean="0"/>
-              <a:t>10/17/16</a:t>
-            </a:fld>
-            <a:endParaRPr lang="en-US"/>
-          </a:p>
-        </p:txBody>
-      </p:sp>
-      <p:sp>
-        <p:nvSpPr>
-          <p:cNvPr id="4" name="Slide Image Placeholder 3"/>
-          <p:cNvSpPr>
-            <a:spLocks noGrp="1" noRot="1" noChangeAspect="1"/>
-          </p:cNvSpPr>
-          <p:nvPr>
-            <p:ph type="sldImg" idx="2"/>
-          </p:nvPr>
-        </p:nvSpPr>
-        <p:spPr>
-          <a:xfrm>
-            <a:off x="1143000" y="685800"/>
-            <a:ext cx="4572000" cy="3429000"/>
-          </a:xfrm>
-          <a:prstGeom prst="rect">
-            <a:avLst/>
-          </a:prstGeom>
-          <a:noFill/>
-          <a:ln w="12700">
-            <a:solidFill>
-              <a:prstClr val="black"/>
-            </a:solidFill>
-          </a:ln>
-        </p:spPr>
-        <p:txBody>
-          <a:bodyPr vert="horz" lIns="91440" tIns="45720" rIns="91440" bIns="45720" rtlCol="0" anchor="ctr"/>
-          <a:lstStyle/>
-          <a:p>
-            <a:endParaRPr lang="en-US"/>
-          </a:p>
-        </p:txBody>
-      </p:sp>
-      <p:sp>
-        <p:nvSpPr>
-          <p:cNvPr id="5" name="Notes Placeholder 4"/>
-          <p:cNvSpPr>
-            <a:spLocks noGrp="1"/>
-          </p:cNvSpPr>
-          <p:nvPr>
-            <p:ph type="body" sz="quarter" idx="3"/>
-          </p:nvPr>
-        </p:nvSpPr>
-        <p:spPr>
-          <a:xfrm>
-            <a:off x="685800" y="4343400"/>
-            <a:ext cx="5486400" cy="4114800"/>
-          </a:xfrm>
-          <a:prstGeom prst="rect">
-            <a:avLst/>
-          </a:prstGeom>
-        </p:spPr>
-        <p:txBody>
-          <a:bodyPr vert="horz" lIns="91440" tIns="45720" rIns="91440" bIns="45720" rtlCol="0"/>
-          <a:lstStyle/>
-          <a:p>
-            <a:pPr lvl="0"/>
-            <a:r>
-              <a:rPr lang="en-US" smtClean="0"/>
-              <a:t>Click to edit Master text styles</a:t>
-            </a:r>
-          </a:p>
-          <a:p>
-            <a:pPr lvl="1"/>
-            <a:r>
-              <a:rPr lang="en-US" smtClean="0"/>
-              <a:t>Second level</a:t>
-            </a:r>
-          </a:p>
-          <a:p>
-            <a:pPr lvl="2"/>
-            <a:r>
-              <a:rPr lang="en-US" smtClean="0"/>
-              <a:t>Third level</a:t>
-            </a:r>
-          </a:p>
-          <a:p>
-            <a:pPr lvl="3"/>
-            <a:r>
-              <a:rPr lang="en-US" smtClean="0"/>
-              <a:t>Fourth level</a:t>
-            </a:r>
-          </a:p>
-          <a:p>
-            <a:pPr lvl="4"/>
-            <a:r>
-              <a:rPr lang="en-US" smtClean="0"/>
-              <a:t>Fifth level</a:t>
-            </a:r>
-            <a:endParaRPr lang="en-US"/>
-          </a:p>
-        </p:txBody>
-      </p:sp>
-      <p:sp>
-        <p:nvSpPr>
-          <p:cNvPr id="6" name="Footer Placeholder 5"/>
-          <p:cNvSpPr>
-            <a:spLocks noGrp="1"/>
-          </p:cNvSpPr>
-          <p:nvPr>
-            <p:ph type="ftr" sz="quarter" idx="4"/>
-          </p:nvPr>
-        </p:nvSpPr>
-        <p:spPr>
-          <a:xfrm>
-            <a:off x="0" y="8685213"/>
-            <a:ext cx="2971800" cy="457200"/>
-          </a:xfrm>
-          <a:prstGeom prst="rect">
-            <a:avLst/>
-          </a:prstGeom>
-        </p:spPr>
-        <p:txBody>
-          <a:bodyPr vert="horz" lIns="91440" tIns="45720" rIns="91440" bIns="45720" rtlCol="0" anchor="b"/>
-          <a:lstStyle>
-            <a:lvl1pPr algn="l">
-              <a:defRPr sz="1200"/>
-            </a:lvl1pPr>
-          </a:lstStyle>
-          <a:p>
-            <a:endParaRPr lang="en-US"/>
-          </a:p>
-        </p:txBody>
-      </p:sp>
-      <p:sp>
-        <p:nvSpPr>
-          <p:cNvPr id="7" name="Slide Number Placeholder 6"/>
-          <p:cNvSpPr>
-            <a:spLocks noGrp="1"/>
-          </p:cNvSpPr>
-          <p:nvPr>
-            <p:ph type="sldNum" sz="quarter" idx="5"/>
-          </p:nvPr>
-        </p:nvSpPr>
-        <p:spPr>
-          <a:xfrm>
-            <a:off x="3884613" y="8685213"/>
-            <a:ext cx="2971800" cy="457200"/>
-          </a:xfrm>
-          <a:prstGeom prst="rect">
-            <a:avLst/>
-          </a:prstGeom>
-        </p:spPr>
-        <p:txBody>
-          <a:bodyPr vert="horz" lIns="91440" tIns="45720" rIns="91440" bIns="45720" rtlCol="0" anchor="b"/>
-          <a:lstStyle>
-            <a:lvl1pPr algn="r">
-              <a:defRPr sz="1200"/>
-            </a:lvl1pPr>
-          </a:lstStyle>
-          <a:p>
-            <a:fld id="{BB5E49A5-4136-284D-997B-48E1D791AD67}" type="slidenum">
-              <a:rPr lang="en-US" smtClean="0"/>
-              <a:t>‹#›</a:t>
-            </a:fld>
-            <a:endParaRPr lang="en-US"/>
-          </a:p>
-        </p:txBody>
-      </p:sp>
     </p:spTree>
     <p:extLst>
       <p:ext uri="{BB962C8B-B14F-4D97-AF65-F5344CB8AC3E}">
-        <p14:creationId xmlns:p14="http://schemas.microsoft.com/office/powerpoint/2010/main" val="2623252185"/>
+        <p14:creationId xmlns:p14="http://schemas.microsoft.com/office/powerpoint/2010/main" val="1454357491"/>
       </p:ext>
     </p:extLst>
   </p:cSld>
   <p:clrMap bg1="lt1" tx1="dk1" bg2="lt2" tx2="dk2" accent1="accent1" accent2="accent2" accent3="accent3" accent4="accent4" accent5="accent5" accent6="accent6" hlink="hlink" folHlink="folHlink"/>
   <p:notesStyle>
-    <a:lvl1pPr marL="0" algn="l" defTabSz="457200" rtl="0" eaLnBrk="1" latinLnBrk="0" hangingPunct="1">
+    <a:lvl1pPr marL="0" algn="l" defTabSz="914400" rtl="0" eaLnBrk="1" latinLnBrk="0" hangingPunct="1">
       <a:defRPr sz="1200" kern="1200">
         <a:solidFill>
           <a:schemeClr val="tx1"/>
@@ -382,7 +176,7 @@
         <a:cs typeface="+mn-cs"/>
       </a:defRPr>
     </a:lvl1pPr>
-    <a:lvl2pPr marL="457200" algn="l" defTabSz="457200" rtl="0" eaLnBrk="1" latinLnBrk="0" hangingPunct="1">
+    <a:lvl2pPr marL="457200" algn="l" defTabSz="914400" rtl="0" eaLnBrk="1" latinLnBrk="0" hangingPunct="1">
       <a:defRPr sz="1200" kern="1200">
         <a:solidFill>
           <a:schemeClr val="tx1"/>
@@ -392,7 +186,7 @@
         <a:cs typeface="+mn-cs"/>
       </a:defRPr>
     </a:lvl2pPr>
-    <a:lvl3pPr marL="914400" algn="l" defTabSz="457200" rtl="0" eaLnBrk="1" latinLnBrk="0" hangingPunct="1">
+    <a:lvl3pPr marL="914400" algn="l" defTabSz="914400" rtl="0" eaLnBrk="1" latinLnBrk="0" hangingPunct="1">
       <a:defRPr sz="1200" kern="1200">
         <a:solidFill>
           <a:schemeClr val="tx1"/>
@@ -402,7 +196,7 @@
         <a:cs typeface="+mn-cs"/>
       </a:defRPr>
     </a:lvl3pPr>
-    <a:lvl4pPr marL="1371600" algn="l" defTabSz="457200" rtl="0" eaLnBrk="1" latinLnBrk="0" hangingPunct="1">
+    <a:lvl4pPr marL="1371600" algn="l" defTabSz="914400" rtl="0" eaLnBrk="1" latinLnBrk="0" hangingPunct="1">
       <a:defRPr sz="1200" kern="1200">
         <a:solidFill>
           <a:schemeClr val="tx1"/>
@@ -412,7 +206,7 @@
         <a:cs typeface="+mn-cs"/>
       </a:defRPr>
     </a:lvl4pPr>
-    <a:lvl5pPr marL="1828800" algn="l" defTabSz="457200" rtl="0" eaLnBrk="1" latinLnBrk="0" hangingPunct="1">
+    <a:lvl5pPr marL="1828800" algn="l" defTabSz="914400" rtl="0" eaLnBrk="1" latinLnBrk="0" hangingPunct="1">
       <a:defRPr sz="1200" kern="1200">
         <a:solidFill>
           <a:schemeClr val="tx1"/>
@@ -422,7 +216,7 @@
         <a:cs typeface="+mn-cs"/>
       </a:defRPr>
     </a:lvl5pPr>
-    <a:lvl6pPr marL="2286000" algn="l" defTabSz="457200" rtl="0" eaLnBrk="1" latinLnBrk="0" hangingPunct="1">
+    <a:lvl6pPr marL="2286000" algn="l" defTabSz="914400" rtl="0" eaLnBrk="1" latinLnBrk="0" hangingPunct="1">
       <a:defRPr sz="1200" kern="1200">
         <a:solidFill>
           <a:schemeClr val="tx1"/>
@@ -432,7 +226,7 @@
         <a:cs typeface="+mn-cs"/>
       </a:defRPr>
     </a:lvl6pPr>
-    <a:lvl7pPr marL="2743200" algn="l" defTabSz="457200" rtl="0" eaLnBrk="1" latinLnBrk="0" hangingPunct="1">
+    <a:lvl7pPr marL="2743200" algn="l" defTabSz="914400" rtl="0" eaLnBrk="1" latinLnBrk="0" hangingPunct="1">
       <a:defRPr sz="1200" kern="1200">
         <a:solidFill>
           <a:schemeClr val="tx1"/>
@@ -442,7 +236,7 @@
         <a:cs typeface="+mn-cs"/>
       </a:defRPr>
     </a:lvl7pPr>
-    <a:lvl8pPr marL="3200400" algn="l" defTabSz="457200" rtl="0" eaLnBrk="1" latinLnBrk="0" hangingPunct="1">
+    <a:lvl8pPr marL="3200400" algn="l" defTabSz="914400" rtl="0" eaLnBrk="1" latinLnBrk="0" hangingPunct="1">
       <a:defRPr sz="1200" kern="1200">
         <a:solidFill>
           <a:schemeClr val="tx1"/>
@@ -452,7 +246,7 @@
         <a:cs typeface="+mn-cs"/>
       </a:defRPr>
     </a:lvl8pPr>
-    <a:lvl9pPr marL="3657600" algn="l" defTabSz="457200" rtl="0" eaLnBrk="1" latinLnBrk="0" hangingPunct="1">
+    <a:lvl9pPr marL="3657600" algn="l" defTabSz="914400" rtl="0" eaLnBrk="1" latinLnBrk="0" hangingPunct="1">
       <a:defRPr sz="1200" kern="1200">
         <a:solidFill>
           <a:schemeClr val="tx1"/>
@@ -467,7 +261,7 @@
 </file>
 
 <file path=ppt/notesSlides/notesSlide1.xml><?xml version="1.0" encoding="utf-8"?>
-<p:notes xmlns:a="http://schemas.openxmlformats.org/drawingml/2006/main" xmlns:p="http://schemas.openxmlformats.org/presentationml/2006/main" xmlns:r="http://schemas.openxmlformats.org/officeDocument/2006/relationships">
+<p:notes xmlns:a="http://schemas.openxmlformats.org/drawingml/2006/main" xmlns:r="http://schemas.openxmlformats.org/officeDocument/2006/relationships" xmlns:p="http://schemas.openxmlformats.org/presentationml/2006/main">
   <p:cSld>
     <p:spTree>
       <p:nvGrpSpPr>
@@ -487,7 +281,7 @@
         <p:nvSpPr>
           <p:cNvPr id="2" name="Slide Image Placeholder 1"/>
           <p:cNvSpPr>
-            <a:spLocks noGrp="1"/>
+            <a:spLocks noGrp="1" noRot="1" noChangeAspect="1"/>
           </p:cNvSpPr>
           <p:nvPr>
             <p:ph type="sldImg" idx="2"/>
@@ -502,7 +296,7 @@
             <a:spLocks noGrp="1"/>
           </p:cNvSpPr>
           <p:nvPr>
-            <p:ph type="body" idx="3" sz="quarter"/>
+            <p:ph type="body" sz="quarter" idx="3"/>
           </p:nvPr>
         </p:nvSpPr>
         <p:spPr/>
@@ -511,7 +305,7 @@
           <a:lstStyle/>
           <a:p>
             <a:r>
-              <a:t>Say the question and the claim, nothing else. Twenty seconds. The cover is read, not presented.</a:t>
+              <a:t>Source: Rishabh branch, docs/brief-c-analysis.md. H1 2026 invoices and captures, observed through 15 July. This is provisional and does not prove permanent loss.</a:t>
             </a:r>
           </a:p>
         </p:txBody>
@@ -523,7 +317,7 @@
             <a:spLocks noGrp="1"/>
           </p:cNvSpPr>
           <p:nvPr>
-            <p:ph type="sldNum" idx="5" sz="quarter"/>
+            <p:ph type="sldNum" sz="quarter" idx="5"/>
           </p:nvPr>
         </p:nvSpPr>
         <p:spPr/>
@@ -537,7 +331,7 @@
 </file>
 
 <file path=ppt/notesSlides/notesSlide10.xml><?xml version="1.0" encoding="utf-8"?>
-<p:notes xmlns:a="http://schemas.openxmlformats.org/drawingml/2006/main" xmlns:p="http://schemas.openxmlformats.org/presentationml/2006/main" xmlns:r="http://schemas.openxmlformats.org/officeDocument/2006/relationships">
+<p:notes xmlns:a="http://schemas.openxmlformats.org/drawingml/2006/main" xmlns:r="http://schemas.openxmlformats.org/officeDocument/2006/relationships" xmlns:p="http://schemas.openxmlformats.org/presentationml/2006/main">
   <p:cSld>
     <p:spTree>
       <p:nvGrpSpPr>
@@ -557,7 +351,7 @@
         <p:nvSpPr>
           <p:cNvPr id="2" name="Slide Image Placeholder 1"/>
           <p:cNvSpPr>
-            <a:spLocks noGrp="1"/>
+            <a:spLocks noGrp="1" noRot="1" noChangeAspect="1"/>
           </p:cNvSpPr>
           <p:nvPr>
             <p:ph type="sldImg" idx="2"/>
@@ -572,7 +366,7 @@
             <a:spLocks noGrp="1"/>
           </p:cNvSpPr>
           <p:nvPr>
-            <p:ph type="body" idx="3" sz="quarter"/>
+            <p:ph type="body" sz="quarter" idx="3"/>
           </p:nvPr>
         </p:nvSpPr>
         <p:spPr/>
@@ -581,7 +375,7 @@
           <a:lstStyle/>
           <a:p>
             <a:r>
-              <a:t>Backup slide: shown only if the panel asks. Do not present it.</a:t>
+              <a:t>Do not invent a cold run, runtime, or commit. Rishabh challenges-log says full-pack cold run remains needed. Vysag feature branch describes troubleshooting and provisional full-window financial investigation.</a:t>
             </a:r>
           </a:p>
         </p:txBody>
@@ -593,7 +387,7 @@
             <a:spLocks noGrp="1"/>
           </p:cNvSpPr>
           <p:nvPr>
-            <p:ph type="sldNum" idx="5" sz="quarter"/>
+            <p:ph type="sldNum" sz="quarter" idx="5"/>
           </p:nvPr>
         </p:nvSpPr>
         <p:spPr/>
@@ -607,7 +401,7 @@
 </file>
 
 <file path=ppt/notesSlides/notesSlide2.xml><?xml version="1.0" encoding="utf-8"?>
-<p:notes xmlns:a="http://schemas.openxmlformats.org/drawingml/2006/main" xmlns:p="http://schemas.openxmlformats.org/presentationml/2006/main" xmlns:r="http://schemas.openxmlformats.org/officeDocument/2006/relationships">
+<p:notes xmlns:a="http://schemas.openxmlformats.org/drawingml/2006/main" xmlns:r="http://schemas.openxmlformats.org/officeDocument/2006/relationships" xmlns:p="http://schemas.openxmlformats.org/presentationml/2006/main">
   <p:cSld>
     <p:spTree>
       <p:nvGrpSpPr>
@@ -627,7 +421,7 @@
         <p:nvSpPr>
           <p:cNvPr id="2" name="Slide Image Placeholder 1"/>
           <p:cNvSpPr>
-            <a:spLocks noGrp="1"/>
+            <a:spLocks noGrp="1" noRot="1" noChangeAspect="1"/>
           </p:cNvSpPr>
           <p:nvPr>
             <p:ph type="sldImg" idx="2"/>
@@ -642,7 +436,7 @@
             <a:spLocks noGrp="1"/>
           </p:cNvSpPr>
           <p:nvPr>
-            <p:ph type="body" idx="3" sz="quarter"/>
+            <p:ph type="body" sz="quarter" idx="3"/>
           </p:nvPr>
         </p:nvSpPr>
         <p:spPr/>
@@ -651,7 +445,7 @@
           <a:lstStyle/>
           <a:p>
             <a:r>
-              <a:t>One minute. Her words first, then the translation in one line, then the decision. If the panel does not know what decision hangs on your answer by the end of this slide, nothing after it matters.</a:t>
+              <a:t>Quote from Rishabh branch project statement. State invoice and attempt grains are different. Failed attempts do not represent collected cash.</a:t>
             </a:r>
           </a:p>
         </p:txBody>
@@ -663,7 +457,7 @@
             <a:spLocks noGrp="1"/>
           </p:cNvSpPr>
           <p:nvPr>
-            <p:ph type="sldNum" idx="5" sz="quarter"/>
+            <p:ph type="sldNum" sz="quarter" idx="5"/>
           </p:nvPr>
         </p:nvSpPr>
         <p:spPr/>
@@ -677,7 +471,7 @@
 </file>
 
 <file path=ppt/notesSlides/notesSlide3.xml><?xml version="1.0" encoding="utf-8"?>
-<p:notes xmlns:a="http://schemas.openxmlformats.org/drawingml/2006/main" xmlns:p="http://schemas.openxmlformats.org/presentationml/2006/main" xmlns:r="http://schemas.openxmlformats.org/officeDocument/2006/relationships">
+<p:notes xmlns:a="http://schemas.openxmlformats.org/drawingml/2006/main" xmlns:r="http://schemas.openxmlformats.org/officeDocument/2006/relationships" xmlns:p="http://schemas.openxmlformats.org/presentationml/2006/main">
   <p:cSld>
     <p:spTree>
       <p:nvGrpSpPr>
@@ -697,7 +491,7 @@
         <p:nvSpPr>
           <p:cNvPr id="2" name="Slide Image Placeholder 1"/>
           <p:cNvSpPr>
-            <a:spLocks noGrp="1"/>
+            <a:spLocks noGrp="1" noRot="1" noChangeAspect="1"/>
           </p:cNvSpPr>
           <p:nvPr>
             <p:ph type="sldImg" idx="2"/>
@@ -712,7 +506,7 @@
             <a:spLocks noGrp="1"/>
           </p:cNvSpPr>
           <p:nvPr>
-            <p:ph type="body" idx="3" sz="quarter"/>
+            <p:ph type="body" sz="quarter" idx="3"/>
           </p:nvPr>
         </p:nvSpPr>
         <p:spPr/>
@@ -721,7 +515,24 @@
           <a:lstStyle/>
           <a:p>
             <a:r>
-              <a:t>Ninety seconds. Point at two numbers on the picture, the two that carry the claim. Do not read the diagram aloud.</a:t>
+              <a:rPr dirty="0"/>
+              <a:t>H1 close = 30 June 2026 23:59 IST; observation through 15 July. At close 11,571 invoices had no captured match (face value ₹1.945 </a:t>
+            </a:r>
+            <a:r>
+              <a:rPr dirty="0" err="1"/>
+              <a:t>cr</a:t>
+            </a:r>
+            <a:r>
+              <a:rPr dirty="0"/>
+              <a:t>), another 15 were partly paid (₹0.002 </a:t>
+            </a:r>
+            <a:r>
+              <a:rPr dirty="0" err="1"/>
+              <a:t>cr</a:t>
+            </a:r>
+            <a:r>
+              <a:rPr dirty="0"/>
+              <a:t> remaining). Positive balances ₹1.947 cr. This diagram is directional, not an arithmetic waterfall: face value of invoices with later captures differs from exact decrease in positive balances.</a:t>
             </a:r>
           </a:p>
         </p:txBody>
@@ -733,7 +544,7 @@
             <a:spLocks noGrp="1"/>
           </p:cNvSpPr>
           <p:nvPr>
-            <p:ph type="sldNum" idx="5" sz="quarter"/>
+            <p:ph type="sldNum" sz="quarter" idx="5"/>
           </p:nvPr>
         </p:nvSpPr>
         <p:spPr/>
@@ -747,7 +558,7 @@
 </file>
 
 <file path=ppt/notesSlides/notesSlide4.xml><?xml version="1.0" encoding="utf-8"?>
-<p:notes xmlns:a="http://schemas.openxmlformats.org/drawingml/2006/main" xmlns:p="http://schemas.openxmlformats.org/presentationml/2006/main" xmlns:r="http://schemas.openxmlformats.org/officeDocument/2006/relationships">
+<p:notes xmlns:a="http://schemas.openxmlformats.org/drawingml/2006/main" xmlns:r="http://schemas.openxmlformats.org/officeDocument/2006/relationships" xmlns:p="http://schemas.openxmlformats.org/presentationml/2006/main">
   <p:cSld>
     <p:spTree>
       <p:nvGrpSpPr>
@@ -767,7 +578,7 @@
         <p:nvSpPr>
           <p:cNvPr id="2" name="Slide Image Placeholder 1"/>
           <p:cNvSpPr>
-            <a:spLocks noGrp="1"/>
+            <a:spLocks noGrp="1" noRot="1" noChangeAspect="1"/>
           </p:cNvSpPr>
           <p:nvPr>
             <p:ph type="sldImg" idx="2"/>
@@ -782,7 +593,7 @@
             <a:spLocks noGrp="1"/>
           </p:cNvSpPr>
           <p:nvPr>
-            <p:ph type="body" idx="3" sz="quarter"/>
+            <p:ph type="body" sz="quarter" idx="3"/>
           </p:nvPr>
         </p:nvSpPr>
         <p:spPr/>
@@ -791,7 +602,7 @@
           <a:lstStyle/>
           <a:p>
             <a:r>
-              <a:t>Say the sentence. Stop. Count to two. The silence is the point; the slide has one sentence on it so the room reads it twice.</a:t>
+              <a:t>Figures sourced from docs/brief-c-analysis.md on Rishabh branch. Do not label unpaid as lost or unmatched captures as fraud. Different H1 invoice and H1 payment cohorts are deliberately not combined.</a:t>
             </a:r>
           </a:p>
         </p:txBody>
@@ -803,7 +614,7 @@
             <a:spLocks noGrp="1"/>
           </p:cNvSpPr>
           <p:nvPr>
-            <p:ph type="sldNum" idx="5" sz="quarter"/>
+            <p:ph type="sldNum" sz="quarter" idx="5"/>
           </p:nvPr>
         </p:nvSpPr>
         <p:spPr/>
@@ -817,7 +628,7 @@
 </file>
 
 <file path=ppt/notesSlides/notesSlide5.xml><?xml version="1.0" encoding="utf-8"?>
-<p:notes xmlns:a="http://schemas.openxmlformats.org/drawingml/2006/main" xmlns:p="http://schemas.openxmlformats.org/presentationml/2006/main" xmlns:r="http://schemas.openxmlformats.org/officeDocument/2006/relationships">
+<p:notes xmlns:a="http://schemas.openxmlformats.org/drawingml/2006/main" xmlns:r="http://schemas.openxmlformats.org/officeDocument/2006/relationships" xmlns:p="http://schemas.openxmlformats.org/presentationml/2006/main">
   <p:cSld>
     <p:spTree>
       <p:nvGrpSpPr>
@@ -837,7 +648,7 @@
         <p:nvSpPr>
           <p:cNvPr id="2" name="Slide Image Placeholder 1"/>
           <p:cNvSpPr>
-            <a:spLocks noGrp="1"/>
+            <a:spLocks noGrp="1" noRot="1" noChangeAspect="1"/>
           </p:cNvSpPr>
           <p:nvPr>
             <p:ph type="sldImg" idx="2"/>
@@ -852,7 +663,7 @@
             <a:spLocks noGrp="1"/>
           </p:cNvSpPr>
           <p:nvPr>
-            <p:ph type="body" idx="3" sz="quarter"/>
+            <p:ph type="body" sz="quarter" idx="3"/>
           </p:nvPr>
         </p:nvSpPr>
         <p:spPr/>
@@ -861,7 +672,7 @@
           <a:lstStyle/>
           <a:p>
             <a:r>
-              <a:t>Two minutes. Each number with its denominator, said aloud. Point at the chart's axis label where the denominator is written. This is the slide the finance controller checks against the decisions log.</a:t>
+              <a:t>Source Rishabh branch docs/brief-c-analysis.md. £ is not relevant; all numbers are INR. The H1 captured unmatched attempts come from a payment-attempt cohort; H1 invoice balances come from invoice cohort. They are distinct lenses and are not additive.</a:t>
             </a:r>
           </a:p>
         </p:txBody>
@@ -873,7 +684,7 @@
             <a:spLocks noGrp="1"/>
           </p:cNvSpPr>
           <p:nvPr>
-            <p:ph type="sldNum" idx="5" sz="quarter"/>
+            <p:ph type="sldNum" sz="quarter" idx="5"/>
           </p:nvPr>
         </p:nvSpPr>
         <p:spPr/>
@@ -887,7 +698,7 @@
 </file>
 
 <file path=ppt/notesSlides/notesSlide6.xml><?xml version="1.0" encoding="utf-8"?>
-<p:notes xmlns:a="http://schemas.openxmlformats.org/drawingml/2006/main" xmlns:p="http://schemas.openxmlformats.org/presentationml/2006/main" xmlns:r="http://schemas.openxmlformats.org/officeDocument/2006/relationships">
+<p:notes xmlns:a="http://schemas.openxmlformats.org/drawingml/2006/main" xmlns:r="http://schemas.openxmlformats.org/officeDocument/2006/relationships" xmlns:p="http://schemas.openxmlformats.org/presentationml/2006/main">
   <p:cSld>
     <p:spTree>
       <p:nvGrpSpPr>
@@ -907,7 +718,7 @@
         <p:nvSpPr>
           <p:cNvPr id="2" name="Slide Image Placeholder 1"/>
           <p:cNvSpPr>
-            <a:spLocks noGrp="1"/>
+            <a:spLocks noGrp="1" noRot="1" noChangeAspect="1"/>
           </p:cNvSpPr>
           <p:nvPr>
             <p:ph type="sldImg" idx="2"/>
@@ -922,7 +733,7 @@
             <a:spLocks noGrp="1"/>
           </p:cNvSpPr>
           <p:nvPr>
-            <p:ph type="body" idx="3" sz="quarter"/>
+            <p:ph type="body" sz="quarter" idx="3"/>
           </p:nvPr>
         </p:nvSpPr>
         <p:spPr/>
@@ -931,7 +742,7 @@
           <a:lstStyle/>
           <a:p>
             <a:r>
-              <a:t>Ninety seconds. One caveat, chosen, with its size. One rejected alternative from the approach log. This slide is where the panel decides whether you thought or just computed.</a:t>
+              <a:t>Financial numbers and match methods from Rishabh branch docs/brief-c-analysis.md and docs/decisions-log.md. The ₹0.608cr is diagnostic due to differing timing windows and lack of independent bank/cash evidence. Source stated synthetic fixture works; full-pack cold run not confirmed.</a:t>
             </a:r>
           </a:p>
         </p:txBody>
@@ -943,7 +754,7 @@
             <a:spLocks noGrp="1"/>
           </p:cNvSpPr>
           <p:nvPr>
-            <p:ph type="sldNum" idx="5" sz="quarter"/>
+            <p:ph type="sldNum" sz="quarter" idx="5"/>
           </p:nvPr>
         </p:nvSpPr>
         <p:spPr/>
@@ -957,7 +768,7 @@
 </file>
 
 <file path=ppt/notesSlides/notesSlide7.xml><?xml version="1.0" encoding="utf-8"?>
-<p:notes xmlns:a="http://schemas.openxmlformats.org/drawingml/2006/main" xmlns:p="http://schemas.openxmlformats.org/presentationml/2006/main" xmlns:r="http://schemas.openxmlformats.org/officeDocument/2006/relationships">
+<p:notes xmlns:a="http://schemas.openxmlformats.org/drawingml/2006/main" xmlns:r="http://schemas.openxmlformats.org/officeDocument/2006/relationships" xmlns:p="http://schemas.openxmlformats.org/presentationml/2006/main">
   <p:cSld>
     <p:spTree>
       <p:nvGrpSpPr>
@@ -977,7 +788,7 @@
         <p:nvSpPr>
           <p:cNvPr id="2" name="Slide Image Placeholder 1"/>
           <p:cNvSpPr>
-            <a:spLocks noGrp="1"/>
+            <a:spLocks noGrp="1" noRot="1" noChangeAspect="1"/>
           </p:cNvSpPr>
           <p:nvPr>
             <p:ph type="sldImg" idx="2"/>
@@ -992,7 +803,7 @@
             <a:spLocks noGrp="1"/>
           </p:cNvSpPr>
           <p:nvPr>
-            <p:ph type="body" idx="3" sz="quarter"/>
+            <p:ph type="body" sz="quarter" idx="3"/>
           </p:nvPr>
         </p:nvSpPr>
         <p:spPr/>
@@ -1001,7 +812,7 @@
           <a:lstStyle/>
           <a:p>
             <a:r>
-              <a:t>One minute. End on the cost of being wrong. No thanks, no summary, no inspirational closing line. Then say 'questions' and stop talking.</a:t>
+              <a:t>June is a prioritization signal not a causal diagnosis. Explicitly distinguish proposed next steps from actions documented as completed. Reproducible full-pack cold run is not confirmed in the repository notes.</a:t>
             </a:r>
           </a:p>
         </p:txBody>
@@ -1013,7 +824,7 @@
             <a:spLocks noGrp="1"/>
           </p:cNvSpPr>
           <p:nvPr>
-            <p:ph type="sldNum" idx="5" sz="quarter"/>
+            <p:ph type="sldNum" sz="quarter" idx="5"/>
           </p:nvPr>
         </p:nvSpPr>
         <p:spPr/>
@@ -1027,7 +838,7 @@
 </file>
 
 <file path=ppt/notesSlides/notesSlide8.xml><?xml version="1.0" encoding="utf-8"?>
-<p:notes xmlns:a="http://schemas.openxmlformats.org/drawingml/2006/main" xmlns:p="http://schemas.openxmlformats.org/presentationml/2006/main" xmlns:r="http://schemas.openxmlformats.org/officeDocument/2006/relationships">
+<p:notes xmlns:a="http://schemas.openxmlformats.org/drawingml/2006/main" xmlns:r="http://schemas.openxmlformats.org/officeDocument/2006/relationships" xmlns:p="http://schemas.openxmlformats.org/presentationml/2006/main">
   <p:cSld>
     <p:spTree>
       <p:nvGrpSpPr>
@@ -1047,7 +858,7 @@
         <p:nvSpPr>
           <p:cNvPr id="2" name="Slide Image Placeholder 1"/>
           <p:cNvSpPr>
-            <a:spLocks noGrp="1"/>
+            <a:spLocks noGrp="1" noRot="1" noChangeAspect="1"/>
           </p:cNvSpPr>
           <p:nvPr>
             <p:ph type="sldImg" idx="2"/>
@@ -1062,7 +873,7 @@
             <a:spLocks noGrp="1"/>
           </p:cNvSpPr>
           <p:nvPr>
-            <p:ph type="body" idx="3" sz="quarter"/>
+            <p:ph type="body" sz="quarter" idx="3"/>
           </p:nvPr>
         </p:nvSpPr>
         <p:spPr/>
@@ -1071,7 +882,7 @@
           <a:lstStyle/>
           <a:p>
             <a:r>
-              <a:t>Leave this up during questions. When asked 'why this and not that', open the approach-log row on screen rather than answering from memory.</a:t>
+              <a:t>Open the corresponding branch and log during questioning. The two branches show different maturity levels; never confuse preliminary full-window totals with final H1 cohort calculations.</a:t>
             </a:r>
           </a:p>
         </p:txBody>
@@ -1083,7 +894,7 @@
             <a:spLocks noGrp="1"/>
           </p:cNvSpPr>
           <p:nvPr>
-            <p:ph type="sldNum" idx="5" sz="quarter"/>
+            <p:ph type="sldNum" sz="quarter" idx="5"/>
           </p:nvPr>
         </p:nvSpPr>
         <p:spPr/>
@@ -1097,7 +908,7 @@
 </file>
 
 <file path=ppt/notesSlides/notesSlide9.xml><?xml version="1.0" encoding="utf-8"?>
-<p:notes xmlns:a="http://schemas.openxmlformats.org/drawingml/2006/main" xmlns:p="http://schemas.openxmlformats.org/presentationml/2006/main" xmlns:r="http://schemas.openxmlformats.org/officeDocument/2006/relationships">
+<p:notes xmlns:a="http://schemas.openxmlformats.org/drawingml/2006/main" xmlns:r="http://schemas.openxmlformats.org/officeDocument/2006/relationships" xmlns:p="http://schemas.openxmlformats.org/presentationml/2006/main">
   <p:cSld>
     <p:spTree>
       <p:nvGrpSpPr>
@@ -1117,7 +928,7 @@
         <p:nvSpPr>
           <p:cNvPr id="2" name="Slide Image Placeholder 1"/>
           <p:cNvSpPr>
-            <a:spLocks noGrp="1"/>
+            <a:spLocks noGrp="1" noRot="1" noChangeAspect="1"/>
           </p:cNvSpPr>
           <p:nvPr>
             <p:ph type="sldImg" idx="2"/>
@@ -1132,7 +943,7 @@
             <a:spLocks noGrp="1"/>
           </p:cNvSpPr>
           <p:nvPr>
-            <p:ph type="body" idx="3" sz="quarter"/>
+            <p:ph type="body" sz="quarter" idx="3"/>
           </p:nvPr>
         </p:nvSpPr>
         <p:spPr/>
@@ -1141,7 +952,7 @@
           <a:lstStyle/>
           <a:p>
             <a:r>
-              <a:t>Backup slide: shown only if the panel asks. Do not present it.</a:t>
+              <a:t>Rishabh branch decisions log C9-C13; the feature/brief-c-vysag branch separately documented 1,925 invoice references with multiple payments and a notebook 02 kernel issue.</a:t>
             </a:r>
           </a:p>
         </p:txBody>
@@ -1153,7 +964,7 @@
             <a:spLocks noGrp="1"/>
           </p:cNvSpPr>
           <p:nvPr>
-            <p:ph type="sldNum" idx="5" sz="quarter"/>
+            <p:ph type="sldNum" sz="quarter" idx="5"/>
           </p:nvPr>
         </p:nvSpPr>
         <p:spPr/>
@@ -1204,10 +1015,9 @@
           <a:lstStyle/>
           <a:p>
             <a:r>
-              <a:rPr lang="en-US" smtClean="0"/>
+              <a:rPr lang="en-US"/>
               <a:t>Click to edit Master title style</a:t>
             </a:r>
-            <a:endParaRPr lang="en-US"/>
           </a:p>
         </p:txBody>
       </p:sp>
@@ -1323,10 +1133,9 @@
           </a:lstStyle>
           <a:p>
             <a:r>
-              <a:rPr lang="en-US" smtClean="0"/>
+              <a:rPr lang="en-US"/>
               <a:t>Click to edit Master subtitle style</a:t>
             </a:r>
-            <a:endParaRPr lang="en-US"/>
           </a:p>
         </p:txBody>
       </p:sp>
@@ -1347,7 +1156,7 @@
           <a:p>
             <a:fld id="{5BCAD085-E8A6-8845-BD4E-CB4CCA059FC4}" type="datetimeFigureOut">
               <a:rPr lang="en-US" smtClean="0"/>
-              <a:t>1/27/13</a:t>
+              <a:t>10/25/2026</a:t>
             </a:fld>
             <a:endParaRPr lang="en-US"/>
           </a:p>
@@ -1441,10 +1250,9 @@
           <a:lstStyle/>
           <a:p>
             <a:r>
-              <a:rPr lang="en-US" smtClean="0"/>
+              <a:rPr lang="en-US"/>
               <a:t>Click to edit Master title style</a:t>
             </a:r>
-            <a:endParaRPr lang="en-US"/>
           </a:p>
         </p:txBody>
       </p:sp>
@@ -1465,38 +1273,37 @@
           <a:p>
             <a:pPr lvl="0"/>
             <a:r>
-              <a:rPr lang="en-US" smtClean="0"/>
+              <a:rPr lang="en-US"/>
               <a:t>Click to edit Master text styles</a:t>
             </a:r>
           </a:p>
           <a:p>
             <a:pPr lvl="1"/>
             <a:r>
-              <a:rPr lang="en-US" smtClean="0"/>
+              <a:rPr lang="en-US"/>
               <a:t>Second level</a:t>
             </a:r>
           </a:p>
           <a:p>
             <a:pPr lvl="2"/>
             <a:r>
-              <a:rPr lang="en-US" smtClean="0"/>
+              <a:rPr lang="en-US"/>
               <a:t>Third level</a:t>
             </a:r>
           </a:p>
           <a:p>
             <a:pPr lvl="3"/>
             <a:r>
-              <a:rPr lang="en-US" smtClean="0"/>
+              <a:rPr lang="en-US"/>
               <a:t>Fourth level</a:t>
             </a:r>
           </a:p>
           <a:p>
             <a:pPr lvl="4"/>
             <a:r>
-              <a:rPr lang="en-US" smtClean="0"/>
+              <a:rPr lang="en-US"/>
               <a:t>Fifth level</a:t>
             </a:r>
-            <a:endParaRPr lang="en-US"/>
           </a:p>
         </p:txBody>
       </p:sp>
@@ -1517,7 +1324,7 @@
           <a:p>
             <a:fld id="{5BCAD085-E8A6-8845-BD4E-CB4CCA059FC4}" type="datetimeFigureOut">
               <a:rPr lang="en-US" smtClean="0"/>
-              <a:t>1/27/13</a:t>
+              <a:t>10/25/2026</a:t>
             </a:fld>
             <a:endParaRPr lang="en-US"/>
           </a:p>
@@ -1616,10 +1423,9 @@
           <a:lstStyle/>
           <a:p>
             <a:r>
-              <a:rPr lang="en-US" smtClean="0"/>
+              <a:rPr lang="en-US"/>
               <a:t>Click to edit Master title style</a:t>
             </a:r>
-            <a:endParaRPr lang="en-US"/>
           </a:p>
         </p:txBody>
       </p:sp>
@@ -1645,38 +1451,37 @@
           <a:p>
             <a:pPr lvl="0"/>
             <a:r>
-              <a:rPr lang="en-US" smtClean="0"/>
+              <a:rPr lang="en-US"/>
               <a:t>Click to edit Master text styles</a:t>
             </a:r>
           </a:p>
           <a:p>
             <a:pPr lvl="1"/>
             <a:r>
-              <a:rPr lang="en-US" smtClean="0"/>
+              <a:rPr lang="en-US"/>
               <a:t>Second level</a:t>
             </a:r>
           </a:p>
           <a:p>
             <a:pPr lvl="2"/>
             <a:r>
-              <a:rPr lang="en-US" smtClean="0"/>
+              <a:rPr lang="en-US"/>
               <a:t>Third level</a:t>
             </a:r>
           </a:p>
           <a:p>
             <a:pPr lvl="3"/>
             <a:r>
-              <a:rPr lang="en-US" smtClean="0"/>
+              <a:rPr lang="en-US"/>
               <a:t>Fourth level</a:t>
             </a:r>
           </a:p>
           <a:p>
             <a:pPr lvl="4"/>
             <a:r>
-              <a:rPr lang="en-US" smtClean="0"/>
+              <a:rPr lang="en-US"/>
               <a:t>Fifth level</a:t>
             </a:r>
-            <a:endParaRPr lang="en-US"/>
           </a:p>
         </p:txBody>
       </p:sp>
@@ -1697,7 +1502,7 @@
           <a:p>
             <a:fld id="{5BCAD085-E8A6-8845-BD4E-CB4CCA059FC4}" type="datetimeFigureOut">
               <a:rPr lang="en-US" smtClean="0"/>
-              <a:t>1/27/13</a:t>
+              <a:t>10/25/2026</a:t>
             </a:fld>
             <a:endParaRPr lang="en-US"/>
           </a:p>
@@ -1791,10 +1596,9 @@
           <a:lstStyle/>
           <a:p>
             <a:r>
-              <a:rPr lang="en-US" smtClean="0"/>
+              <a:rPr lang="en-US"/>
               <a:t>Click to edit Master title style</a:t>
             </a:r>
-            <a:endParaRPr lang="en-US"/>
           </a:p>
         </p:txBody>
       </p:sp>
@@ -1815,38 +1619,37 @@
           <a:p>
             <a:pPr lvl="0"/>
             <a:r>
-              <a:rPr lang="en-US" smtClean="0"/>
+              <a:rPr lang="en-US"/>
               <a:t>Click to edit Master text styles</a:t>
             </a:r>
           </a:p>
           <a:p>
             <a:pPr lvl="1"/>
             <a:r>
-              <a:rPr lang="en-US" smtClean="0"/>
+              <a:rPr lang="en-US"/>
               <a:t>Second level</a:t>
             </a:r>
           </a:p>
           <a:p>
             <a:pPr lvl="2"/>
             <a:r>
-              <a:rPr lang="en-US" smtClean="0"/>
+              <a:rPr lang="en-US"/>
               <a:t>Third level</a:t>
             </a:r>
           </a:p>
           <a:p>
             <a:pPr lvl="3"/>
             <a:r>
-              <a:rPr lang="en-US" smtClean="0"/>
+              <a:rPr lang="en-US"/>
               <a:t>Fourth level</a:t>
             </a:r>
           </a:p>
           <a:p>
             <a:pPr lvl="4"/>
             <a:r>
-              <a:rPr lang="en-US" smtClean="0"/>
+              <a:rPr lang="en-US"/>
               <a:t>Fifth level</a:t>
             </a:r>
-            <a:endParaRPr lang="en-US"/>
           </a:p>
         </p:txBody>
       </p:sp>
@@ -1867,7 +1670,7 @@
           <a:p>
             <a:fld id="{5BCAD085-E8A6-8845-BD4E-CB4CCA059FC4}" type="datetimeFigureOut">
               <a:rPr lang="en-US" smtClean="0"/>
-              <a:t>1/27/13</a:t>
+              <a:t>10/25/2026</a:t>
             </a:fld>
             <a:endParaRPr lang="en-US"/>
           </a:p>
@@ -1970,10 +1773,9 @@
           </a:lstStyle>
           <a:p>
             <a:r>
-              <a:rPr lang="en-US" smtClean="0"/>
+              <a:rPr lang="en-US"/>
               <a:t>Click to edit Master title style</a:t>
             </a:r>
-            <a:endParaRPr lang="en-US"/>
           </a:p>
         </p:txBody>
       </p:sp>
@@ -2090,7 +1892,7 @@
           <a:p>
             <a:pPr lvl="0"/>
             <a:r>
-              <a:rPr lang="en-US" smtClean="0"/>
+              <a:rPr lang="en-US"/>
               <a:t>Click to edit Master text styles</a:t>
             </a:r>
           </a:p>
@@ -2113,7 +1915,7 @@
           <a:p>
             <a:fld id="{5BCAD085-E8A6-8845-BD4E-CB4CCA059FC4}" type="datetimeFigureOut">
               <a:rPr lang="en-US" smtClean="0"/>
-              <a:t>1/27/13</a:t>
+              <a:t>10/25/2026</a:t>
             </a:fld>
             <a:endParaRPr lang="en-US"/>
           </a:p>
@@ -2207,10 +2009,9 @@
           <a:lstStyle/>
           <a:p>
             <a:r>
-              <a:rPr lang="en-US" smtClean="0"/>
+              <a:rPr lang="en-US"/>
               <a:t>Click to edit Master title style</a:t>
             </a:r>
-            <a:endParaRPr lang="en-US"/>
           </a:p>
         </p:txBody>
       </p:sp>
@@ -2264,38 +2065,37 @@
           <a:p>
             <a:pPr lvl="0"/>
             <a:r>
-              <a:rPr lang="en-US" smtClean="0"/>
+              <a:rPr lang="en-US"/>
               <a:t>Click to edit Master text styles</a:t>
             </a:r>
           </a:p>
           <a:p>
             <a:pPr lvl="1"/>
             <a:r>
-              <a:rPr lang="en-US" smtClean="0"/>
+              <a:rPr lang="en-US"/>
               <a:t>Second level</a:t>
             </a:r>
           </a:p>
           <a:p>
             <a:pPr lvl="2"/>
             <a:r>
-              <a:rPr lang="en-US" smtClean="0"/>
+              <a:rPr lang="en-US"/>
               <a:t>Third level</a:t>
             </a:r>
           </a:p>
           <a:p>
             <a:pPr lvl="3"/>
             <a:r>
-              <a:rPr lang="en-US" smtClean="0"/>
+              <a:rPr lang="en-US"/>
               <a:t>Fourth level</a:t>
             </a:r>
           </a:p>
           <a:p>
             <a:pPr lvl="4"/>
             <a:r>
-              <a:rPr lang="en-US" smtClean="0"/>
+              <a:rPr lang="en-US"/>
               <a:t>Fifth level</a:t>
             </a:r>
-            <a:endParaRPr lang="en-US"/>
           </a:p>
         </p:txBody>
       </p:sp>
@@ -2349,38 +2149,37 @@
           <a:p>
             <a:pPr lvl="0"/>
             <a:r>
-              <a:rPr lang="en-US" smtClean="0"/>
+              <a:rPr lang="en-US"/>
               <a:t>Click to edit Master text styles</a:t>
             </a:r>
           </a:p>
           <a:p>
             <a:pPr lvl="1"/>
             <a:r>
-              <a:rPr lang="en-US" smtClean="0"/>
+              <a:rPr lang="en-US"/>
               <a:t>Second level</a:t>
             </a:r>
           </a:p>
           <a:p>
             <a:pPr lvl="2"/>
             <a:r>
-              <a:rPr lang="en-US" smtClean="0"/>
+              <a:rPr lang="en-US"/>
               <a:t>Third level</a:t>
             </a:r>
           </a:p>
           <a:p>
             <a:pPr lvl="3"/>
             <a:r>
-              <a:rPr lang="en-US" smtClean="0"/>
+              <a:rPr lang="en-US"/>
               <a:t>Fourth level</a:t>
             </a:r>
           </a:p>
           <a:p>
             <a:pPr lvl="4"/>
             <a:r>
-              <a:rPr lang="en-US" smtClean="0"/>
+              <a:rPr lang="en-US"/>
               <a:t>Fifth level</a:t>
             </a:r>
-            <a:endParaRPr lang="en-US"/>
           </a:p>
         </p:txBody>
       </p:sp>
@@ -2401,7 +2200,7 @@
           <a:p>
             <a:fld id="{5BCAD085-E8A6-8845-BD4E-CB4CCA059FC4}" type="datetimeFigureOut">
               <a:rPr lang="en-US" smtClean="0"/>
-              <a:t>1/27/13</a:t>
+              <a:t>10/25/2026</a:t>
             </a:fld>
             <a:endParaRPr lang="en-US"/>
           </a:p>
@@ -2499,10 +2298,9 @@
           </a:lstStyle>
           <a:p>
             <a:r>
-              <a:rPr lang="en-US" smtClean="0"/>
+              <a:rPr lang="en-US"/>
               <a:t>Click to edit Master title style</a:t>
             </a:r>
-            <a:endParaRPr lang="en-US"/>
           </a:p>
         </p:txBody>
       </p:sp>
@@ -2565,7 +2363,7 @@
           <a:p>
             <a:pPr lvl="0"/>
             <a:r>
-              <a:rPr lang="en-US" smtClean="0"/>
+              <a:rPr lang="en-US"/>
               <a:t>Click to edit Master text styles</a:t>
             </a:r>
           </a:p>
@@ -2621,38 +2419,37 @@
           <a:p>
             <a:pPr lvl="0"/>
             <a:r>
-              <a:rPr lang="en-US" smtClean="0"/>
+              <a:rPr lang="en-US"/>
               <a:t>Click to edit Master text styles</a:t>
             </a:r>
           </a:p>
           <a:p>
             <a:pPr lvl="1"/>
             <a:r>
-              <a:rPr lang="en-US" smtClean="0"/>
+              <a:rPr lang="en-US"/>
               <a:t>Second level</a:t>
             </a:r>
           </a:p>
           <a:p>
             <a:pPr lvl="2"/>
             <a:r>
-              <a:rPr lang="en-US" smtClean="0"/>
+              <a:rPr lang="en-US"/>
               <a:t>Third level</a:t>
             </a:r>
           </a:p>
           <a:p>
             <a:pPr lvl="3"/>
             <a:r>
-              <a:rPr lang="en-US" smtClean="0"/>
+              <a:rPr lang="en-US"/>
               <a:t>Fourth level</a:t>
             </a:r>
           </a:p>
           <a:p>
             <a:pPr lvl="4"/>
             <a:r>
-              <a:rPr lang="en-US" smtClean="0"/>
+              <a:rPr lang="en-US"/>
               <a:t>Fifth level</a:t>
             </a:r>
-            <a:endParaRPr lang="en-US"/>
           </a:p>
         </p:txBody>
       </p:sp>
@@ -2715,7 +2512,7 @@
           <a:p>
             <a:pPr lvl="0"/>
             <a:r>
-              <a:rPr lang="en-US" smtClean="0"/>
+              <a:rPr lang="en-US"/>
               <a:t>Click to edit Master text styles</a:t>
             </a:r>
           </a:p>
@@ -2771,38 +2568,37 @@
           <a:p>
             <a:pPr lvl="0"/>
             <a:r>
-              <a:rPr lang="en-US" smtClean="0"/>
+              <a:rPr lang="en-US"/>
               <a:t>Click to edit Master text styles</a:t>
             </a:r>
           </a:p>
           <a:p>
             <a:pPr lvl="1"/>
             <a:r>
-              <a:rPr lang="en-US" smtClean="0"/>
+              <a:rPr lang="en-US"/>
               <a:t>Second level</a:t>
             </a:r>
           </a:p>
           <a:p>
             <a:pPr lvl="2"/>
             <a:r>
-              <a:rPr lang="en-US" smtClean="0"/>
+              <a:rPr lang="en-US"/>
               <a:t>Third level</a:t>
             </a:r>
           </a:p>
           <a:p>
             <a:pPr lvl="3"/>
             <a:r>
-              <a:rPr lang="en-US" smtClean="0"/>
+              <a:rPr lang="en-US"/>
               <a:t>Fourth level</a:t>
             </a:r>
           </a:p>
           <a:p>
             <a:pPr lvl="4"/>
             <a:r>
-              <a:rPr lang="en-US" smtClean="0"/>
+              <a:rPr lang="en-US"/>
               <a:t>Fifth level</a:t>
             </a:r>
-            <a:endParaRPr lang="en-US"/>
           </a:p>
         </p:txBody>
       </p:sp>
@@ -2823,7 +2619,7 @@
           <a:p>
             <a:fld id="{5BCAD085-E8A6-8845-BD4E-CB4CCA059FC4}" type="datetimeFigureOut">
               <a:rPr lang="en-US" smtClean="0"/>
-              <a:t>1/27/13</a:t>
+              <a:t>10/25/2026</a:t>
             </a:fld>
             <a:endParaRPr lang="en-US"/>
           </a:p>
@@ -2917,10 +2713,9 @@
           <a:lstStyle/>
           <a:p>
             <a:r>
-              <a:rPr lang="en-US" smtClean="0"/>
+              <a:rPr lang="en-US"/>
               <a:t>Click to edit Master title style</a:t>
             </a:r>
-            <a:endParaRPr lang="en-US"/>
           </a:p>
         </p:txBody>
       </p:sp>
@@ -2941,7 +2736,7 @@
           <a:p>
             <a:fld id="{5BCAD085-E8A6-8845-BD4E-CB4CCA059FC4}" type="datetimeFigureOut">
               <a:rPr lang="en-US" smtClean="0"/>
-              <a:t>1/27/13</a:t>
+              <a:t>10/25/2026</a:t>
             </a:fld>
             <a:endParaRPr lang="en-US"/>
           </a:p>
@@ -3036,7 +2831,7 @@
           <a:p>
             <a:fld id="{5BCAD085-E8A6-8845-BD4E-CB4CCA059FC4}" type="datetimeFigureOut">
               <a:rPr lang="en-US" smtClean="0"/>
-              <a:t>1/27/13</a:t>
+              <a:t>10/25/2026</a:t>
             </a:fld>
             <a:endParaRPr lang="en-US"/>
           </a:p>
@@ -3139,10 +2934,9 @@
           </a:lstStyle>
           <a:p>
             <a:r>
-              <a:rPr lang="en-US" smtClean="0"/>
+              <a:rPr lang="en-US"/>
               <a:t>Click to edit Master title style</a:t>
             </a:r>
-            <a:endParaRPr lang="en-US"/>
           </a:p>
         </p:txBody>
       </p:sp>
@@ -3196,38 +2990,37 @@
           <a:p>
             <a:pPr lvl="0"/>
             <a:r>
-              <a:rPr lang="en-US" smtClean="0"/>
+              <a:rPr lang="en-US"/>
               <a:t>Click to edit Master text styles</a:t>
             </a:r>
           </a:p>
           <a:p>
             <a:pPr lvl="1"/>
             <a:r>
-              <a:rPr lang="en-US" smtClean="0"/>
+              <a:rPr lang="en-US"/>
               <a:t>Second level</a:t>
             </a:r>
           </a:p>
           <a:p>
             <a:pPr lvl="2"/>
             <a:r>
-              <a:rPr lang="en-US" smtClean="0"/>
+              <a:rPr lang="en-US"/>
               <a:t>Third level</a:t>
             </a:r>
           </a:p>
           <a:p>
             <a:pPr lvl="3"/>
             <a:r>
-              <a:rPr lang="en-US" smtClean="0"/>
+              <a:rPr lang="en-US"/>
               <a:t>Fourth level</a:t>
             </a:r>
           </a:p>
           <a:p>
             <a:pPr lvl="4"/>
             <a:r>
-              <a:rPr lang="en-US" smtClean="0"/>
+              <a:rPr lang="en-US"/>
               <a:t>Fifth level</a:t>
             </a:r>
-            <a:endParaRPr lang="en-US"/>
           </a:p>
         </p:txBody>
       </p:sp>
@@ -3290,7 +3083,7 @@
           <a:p>
             <a:pPr lvl="0"/>
             <a:r>
-              <a:rPr lang="en-US" smtClean="0"/>
+              <a:rPr lang="en-US"/>
               <a:t>Click to edit Master text styles</a:t>
             </a:r>
           </a:p>
@@ -3313,7 +3106,7 @@
           <a:p>
             <a:fld id="{5BCAD085-E8A6-8845-BD4E-CB4CCA059FC4}" type="datetimeFigureOut">
               <a:rPr lang="en-US" smtClean="0"/>
-              <a:t>1/27/13</a:t>
+              <a:t>10/25/2026</a:t>
             </a:fld>
             <a:endParaRPr lang="en-US"/>
           </a:p>
@@ -3416,10 +3209,9 @@
           </a:lstStyle>
           <a:p>
             <a:r>
-              <a:rPr lang="en-US" smtClean="0"/>
+              <a:rPr lang="en-US"/>
               <a:t>Click to edit Master title style</a:t>
             </a:r>
-            <a:endParaRPr lang="en-US"/>
           </a:p>
         </p:txBody>
       </p:sp>
@@ -3543,7 +3335,7 @@
           <a:p>
             <a:pPr lvl="0"/>
             <a:r>
-              <a:rPr lang="en-US" smtClean="0"/>
+              <a:rPr lang="en-US"/>
               <a:t>Click to edit Master text styles</a:t>
             </a:r>
           </a:p>
@@ -3566,7 +3358,7 @@
           <a:p>
             <a:fld id="{5BCAD085-E8A6-8845-BD4E-CB4CCA059FC4}" type="datetimeFigureOut">
               <a:rPr lang="en-US" smtClean="0"/>
-              <a:t>1/27/13</a:t>
+              <a:t>10/25/2026</a:t>
             </a:fld>
             <a:endParaRPr lang="en-US"/>
           </a:p>
@@ -3675,10 +3467,9 @@
           <a:lstStyle/>
           <a:p>
             <a:r>
-              <a:rPr lang="en-US" smtClean="0"/>
+              <a:rPr lang="en-US"/>
               <a:t>Click to edit Master title style</a:t>
             </a:r>
-            <a:endParaRPr lang="en-US"/>
           </a:p>
         </p:txBody>
       </p:sp>
@@ -3709,38 +3500,37 @@
           <a:p>
             <a:pPr lvl="0"/>
             <a:r>
-              <a:rPr lang="en-US" smtClean="0"/>
+              <a:rPr lang="en-US"/>
               <a:t>Click to edit Master text styles</a:t>
             </a:r>
           </a:p>
           <a:p>
             <a:pPr lvl="1"/>
             <a:r>
-              <a:rPr lang="en-US" smtClean="0"/>
+              <a:rPr lang="en-US"/>
               <a:t>Second level</a:t>
             </a:r>
           </a:p>
           <a:p>
             <a:pPr lvl="2"/>
             <a:r>
-              <a:rPr lang="en-US" smtClean="0"/>
+              <a:rPr lang="en-US"/>
               <a:t>Third level</a:t>
             </a:r>
           </a:p>
           <a:p>
             <a:pPr lvl="3"/>
             <a:r>
-              <a:rPr lang="en-US" smtClean="0"/>
+              <a:rPr lang="en-US"/>
               <a:t>Fourth level</a:t>
             </a:r>
           </a:p>
           <a:p>
             <a:pPr lvl="4"/>
             <a:r>
-              <a:rPr lang="en-US" smtClean="0"/>
+              <a:rPr lang="en-US"/>
               <a:t>Fifth level</a:t>
             </a:r>
-            <a:endParaRPr lang="en-US"/>
           </a:p>
         </p:txBody>
       </p:sp>
@@ -3779,7 +3569,7 @@
           <a:p>
             <a:fld id="{5BCAD085-E8A6-8845-BD4E-CB4CCA059FC4}" type="datetimeFigureOut">
               <a:rPr lang="en-US" smtClean="0"/>
-              <a:t>1/27/13</a:t>
+              <a:t>10/25/2026</a:t>
             </a:fld>
             <a:endParaRPr lang="en-US"/>
           </a:p>
@@ -4138,7 +3928,7 @@
 </file>
 
 <file path=ppt/slides/slide1.xml><?xml version="1.0" encoding="utf-8"?>
-<p:sld xmlns:a="http://schemas.openxmlformats.org/drawingml/2006/main" xmlns:p="http://schemas.openxmlformats.org/presentationml/2006/main" xmlns:r="http://schemas.openxmlformats.org/officeDocument/2006/relationships">
+<p:sld xmlns:a="http://schemas.openxmlformats.org/drawingml/2006/main" xmlns:r="http://schemas.openxmlformats.org/officeDocument/2006/relationships" xmlns:p="http://schemas.openxmlformats.org/presentationml/2006/main">
   <p:cSld>
     <p:spTree>
       <p:nvGrpSpPr>
@@ -4146,7 +3936,14 @@
         <p:cNvGrpSpPr/>
         <p:nvPr/>
       </p:nvGrpSpPr>
-      <p:grpSpPr/>
+      <p:grpSpPr>
+        <a:xfrm>
+          <a:off x="0" y="0"/>
+          <a:ext cx="0" cy="0"/>
+          <a:chOff x="0" y="0"/>
+          <a:chExt cx="0" cy="0"/>
+        </a:xfrm>
+      </p:grpSpPr>
       <p:sp>
         <p:nvSpPr>
           <p:cNvPr id="2" name="Rounded Rectangle 1"/>
@@ -4189,6 +3986,7 @@
           <a:lstStyle/>
           <a:p>
             <a:pPr algn="ctr"/>
+            <a:endParaRPr/>
           </a:p>
         </p:txBody>
       </p:sp>
@@ -4201,7 +3999,7 @@
           <p:nvPr/>
         </p:nvPicPr>
         <p:blipFill>
-          <a:blip r:embed="rId2"/>
+          <a:blip r:embed="rId3"/>
           <a:stretch>
             <a:fillRect/>
           </a:stretch>
@@ -4303,14 +4101,24 @@
           <a:noFill/>
         </p:spPr>
         <p:txBody>
-          <a:bodyPr wrap="square">
+          <a:bodyPr wrap="square" lIns="36576" rIns="36576">
             <a:spAutoFit/>
           </a:bodyPr>
           <a:lstStyle/>
           <a:p>
-            <a:r>
-              <a:rPr sz="2000" b="1"/>
-              <a:t>BRIEF C · INVOICE-TO-CAPTURE RECONCILIATION · GROUP 10</a:t>
+            <a:pPr algn="l">
+              <a:spcAft>
+                <a:spcPts val="0"/>
+              </a:spcAft>
+            </a:pPr>
+            <a:r>
+              <a:rPr sz="1900" b="1">
+                <a:solidFill>
+                  <a:srgbClr val="0085CC"/>
+                </a:solidFill>
+                <a:latin typeface="Aptos"/>
+              </a:rPr>
+              <a:t>BRIEF C  ·  MONEY RECONCILIATION  ·  GROUP 10</a:t>
             </a:r>
           </a:p>
         </p:txBody>
@@ -4324,7 +4132,7 @@
         <p:spPr>
           <a:xfrm>
             <a:off x="548640" y="2651760"/>
-            <a:ext cx="10972800" cy="1463040"/>
+            <a:ext cx="10972800" cy="615553"/>
           </a:xfrm>
           <a:prstGeom prst="rect">
             <a:avLst/>
@@ -4332,14 +4140,24 @@
           <a:noFill/>
         </p:spPr>
         <p:txBody>
-          <a:bodyPr wrap="square">
+          <a:bodyPr wrap="square" lIns="36576" rIns="36576">
             <a:spAutoFit/>
           </a:bodyPr>
           <a:lstStyle/>
           <a:p>
-            <a:r>
-              <a:rPr sz="3400" b="1"/>
-              <a:t>Can Finance separate timing from missing matches?</a:t>
+            <a:pPr algn="l">
+              <a:spcAft>
+                <a:spcPts val="0"/>
+              </a:spcAft>
+            </a:pPr>
+            <a:r>
+              <a:rPr sz="3400" b="1" dirty="0">
+                <a:solidFill>
+                  <a:schemeClr val="bg1"/>
+                </a:solidFill>
+                <a:latin typeface="Aptos"/>
+              </a:rPr>
+              <a:t>Which invoices were unpaid, unmatched or simply late?</a:t>
             </a:r>
           </a:p>
         </p:txBody>
@@ -4353,7 +4171,7 @@
         <p:spPr>
           <a:xfrm>
             <a:off x="548640" y="4206240"/>
-            <a:ext cx="10058400" cy="731520"/>
+            <a:ext cx="10058400" cy="400110"/>
           </a:xfrm>
           <a:prstGeom prst="rect">
             <a:avLst/>
@@ -4361,14 +4179,24 @@
           <a:noFill/>
         </p:spPr>
         <p:txBody>
-          <a:bodyPr wrap="square">
+          <a:bodyPr wrap="square" lIns="36576" rIns="36576">
             <a:spAutoFit/>
           </a:bodyPr>
           <a:lstStyle/>
           <a:p>
-            <a:r>
-              <a:rPr sz="1300"/>
-              <a:t>At H1 2026 close, 11,586 of 162,876 invoices (₹26.828 crore billed) carried ₹1.947 crore in positive balances; after later captures, ₹1.648 crore (6.14% of H1 billings) remained open across 9,824 invoices on 15 July, while 1,541 H1 captures worth ₹0.267 crore still lacked a safe invoice match—Finance should prioritize June's open invoices and resolve both exception lists before calling balances lost.</a:t>
+            <a:pPr algn="l">
+              <a:spcAft>
+                <a:spcPts val="0"/>
+              </a:spcAft>
+            </a:pPr>
+            <a:r>
+              <a:rPr sz="2000" b="0" dirty="0">
+                <a:solidFill>
+                  <a:schemeClr val="bg1"/>
+                </a:solidFill>
+                <a:latin typeface="Aptos"/>
+              </a:rPr>
+              <a:t>At 15 July: ₹1.648 crore remains open across 9,824 H1 invoices (6.14% of H1 billings).</a:t>
             </a:r>
           </a:p>
         </p:txBody>
@@ -4382,7 +4210,7 @@
         <p:spPr>
           <a:xfrm>
             <a:off x="548640" y="5852160"/>
-            <a:ext cx="10972800" cy="457200"/>
+            <a:ext cx="10972800" cy="353943"/>
           </a:xfrm>
           <a:prstGeom prst="rect">
             <a:avLst/>
@@ -4390,14 +4218,24 @@
           <a:noFill/>
         </p:spPr>
         <p:txBody>
-          <a:bodyPr wrap="square">
+          <a:bodyPr wrap="square" lIns="36576" rIns="36576">
             <a:spAutoFit/>
           </a:bodyPr>
           <a:lstStyle/>
           <a:p>
-            <a:r>
-              <a:rPr sz="1800"/>
-              <a:t>Rishabh · Group 10</a:t>
+            <a:pPr algn="l">
+              <a:spcAft>
+                <a:spcPts val="0"/>
+              </a:spcAft>
+            </a:pPr>
+            <a:r>
+              <a:rPr sz="1700" b="0" dirty="0">
+                <a:solidFill>
+                  <a:schemeClr val="bg1"/>
+                </a:solidFill>
+                <a:latin typeface="Aptos"/>
+              </a:rPr>
+              <a:t>Kalpa Health  ·  Cohort 2  ·  Build 1  ·  25 October 2026</a:t>
             </a:r>
           </a:p>
         </p:txBody>
@@ -4411,7 +4249,7 @@
 </file>
 
 <file path=ppt/slides/slide10.xml><?xml version="1.0" encoding="utf-8"?>
-<p:sld xmlns:a="http://schemas.openxmlformats.org/drawingml/2006/main" xmlns:p="http://schemas.openxmlformats.org/presentationml/2006/main" xmlns:r="http://schemas.openxmlformats.org/officeDocument/2006/relationships">
+<p:sld xmlns:a="http://schemas.openxmlformats.org/drawingml/2006/main" xmlns:r="http://schemas.openxmlformats.org/officeDocument/2006/relationships" xmlns:p="http://schemas.openxmlformats.org/presentationml/2006/main">
   <p:cSld>
     <p:spTree>
       <p:nvGrpSpPr>
@@ -4419,7 +4257,14 @@
         <p:cNvGrpSpPr/>
         <p:nvPr/>
       </p:nvGrpSpPr>
-      <p:grpSpPr/>
+      <p:grpSpPr>
+        <a:xfrm>
+          <a:off x="0" y="0"/>
+          <a:ext cx="0" cy="0"/>
+          <a:chOff x="0" y="0"/>
+          <a:chExt cx="0" cy="0"/>
+        </a:xfrm>
+      </p:grpSpPr>
       <p:sp>
         <p:nvSpPr>
           <p:cNvPr id="2" name="Rounded Rectangle 1"/>
@@ -4462,6 +4307,7 @@
           <a:lstStyle/>
           <a:p>
             <a:pPr algn="ctr"/>
+            <a:endParaRPr/>
           </a:p>
         </p:txBody>
       </p:sp>
@@ -4544,7 +4390,7 @@
           <p:nvPr/>
         </p:nvPicPr>
         <p:blipFill>
-          <a:blip r:embed="rId2"/>
+          <a:blip r:embed="rId3"/>
           <a:stretch>
             <a:fillRect/>
           </a:stretch>
@@ -4611,20 +4457,24 @@
           <a:noFill/>
         </p:spPr>
         <p:txBody>
-          <a:bodyPr wrap="square">
+          <a:bodyPr wrap="square" lIns="36576" rIns="36576">
             <a:spAutoFit/>
           </a:bodyPr>
           <a:lstStyle/>
           <a:p>
-            <a:pPr algn="l"/>
-            <a:r>
-              <a:rPr sz="2400" b="1">
-                <a:solidFill>
-                  <a:srgbClr val="1A1440"/>
-                </a:solidFill>
-                <a:latin typeface="Georgia"/>
-              </a:rPr>
-              <a:t>Appendix B · The cold run</a:t>
+            <a:pPr algn="l">
+              <a:spcAft>
+                <a:spcPts val="0"/>
+              </a:spcAft>
+            </a:pPr>
+            <a:r>
+              <a:rPr sz="2600" b="1">
+                <a:solidFill>
+                  <a:srgbClr val="11263A"/>
+                </a:solidFill>
+                <a:latin typeface="Aptos"/>
+              </a:rPr>
+              <a:t>Appendix B · Rebuild status and scope</a:t>
             </a:r>
           </a:p>
         </p:txBody>
@@ -4637,8 +4487,8 @@
         </p:nvSpPr>
         <p:spPr>
           <a:xfrm>
-            <a:off x="457200" y="1645920"/>
-            <a:ext cx="11247120" cy="4206240"/>
+            <a:off x="457200" y="1311624"/>
+            <a:ext cx="11247120" cy="4832092"/>
           </a:xfrm>
           <a:prstGeom prst="rect">
             <a:avLst/>
@@ -4646,35 +4496,219 @@
           <a:noFill/>
         </p:spPr>
         <p:txBody>
-          <a:bodyPr wrap="square">
+          <a:bodyPr wrap="square" lIns="36576" rIns="36576">
             <a:spAutoFit/>
           </a:bodyPr>
           <a:lstStyle/>
           <a:p>
-            <a:r>
-              <a:rPr sz="1900"/>
-              <a:t>Full-pack cold run in a fresh Codespace: not yet recorded.</a:t>
-            </a:r>
-          </a:p>
-          <a:p/>
-          <a:p>
-            <a:r>
-              <a:rPr sz="1900"/>
-              <a:t>Focused tests: 10 passed. Notebook JSON and code-cell validation: passed.</a:t>
-            </a:r>
-          </a:p>
-          <a:p/>
-          <a:p>
-            <a:r>
-              <a:rPr sz="1900"/>
-              <a:t>Headline: ₹1.947 crore positive balance at 30 June; ₹1.648 crore still open by 15 July.</a:t>
-            </a:r>
-          </a:p>
-          <a:p/>
-          <a:p>
-            <a:r>
-              <a:rPr sz="1900"/>
-              <a:t>Branch: Rishabh · validate the full data-pack run before final presentation.</a:t>
+            <a:pPr algn="l">
+              <a:spcAft>
+                <a:spcPts val="1200"/>
+              </a:spcAft>
+            </a:pPr>
+            <a:r>
+              <a:rPr sz="1600" b="0" dirty="0">
+                <a:solidFill>
+                  <a:srgbClr val="11263A"/>
+                </a:solidFill>
+                <a:latin typeface="Calibri" panose="020F0502020204030204" pitchFamily="34" charset="0"/>
+                <a:ea typeface="Calibri" panose="020F0502020204030204" pitchFamily="34" charset="0"/>
+                <a:cs typeface="Calibri" panose="020F0502020204030204" pitchFamily="34" charset="0"/>
+              </a:rPr>
+              <a:t>REPORTED WORKFLOW</a:t>
+            </a:r>
+          </a:p>
+          <a:p>
+            <a:pPr>
+              <a:spcAft>
+                <a:spcPts val="1200"/>
+              </a:spcAft>
+            </a:pPr>
+            <a:r>
+              <a:rPr sz="1600" b="0" dirty="0">
+                <a:solidFill>
+                  <a:srgbClr val="11263A"/>
+                </a:solidFill>
+                <a:latin typeface="Calibri" panose="020F0502020204030204" pitchFamily="34" charset="0"/>
+                <a:ea typeface="Calibri" panose="020F0502020204030204" pitchFamily="34" charset="0"/>
+                <a:cs typeface="Calibri" panose="020F0502020204030204" pitchFamily="34" charset="0"/>
+              </a:rPr>
+              <a:t>Clean finance pack → normalize safe IDs → reconcile invoice-level captures → review H1 cutoff and 15 July → export exception summaries.</a:t>
+            </a:r>
+          </a:p>
+          <a:p>
+            <a:pPr>
+              <a:spcAft>
+                <a:spcPts val="1200"/>
+              </a:spcAft>
+            </a:pPr>
+            <a:endParaRPr sz="1600" b="0" dirty="0">
+              <a:solidFill>
+                <a:srgbClr val="11263A"/>
+              </a:solidFill>
+              <a:latin typeface="Calibri" panose="020F0502020204030204" pitchFamily="34" charset="0"/>
+              <a:ea typeface="Calibri" panose="020F0502020204030204" pitchFamily="34" charset="0"/>
+              <a:cs typeface="Calibri" panose="020F0502020204030204" pitchFamily="34" charset="0"/>
+            </a:endParaRPr>
+          </a:p>
+          <a:p>
+            <a:pPr>
+              <a:spcAft>
+                <a:spcPts val="1200"/>
+              </a:spcAft>
+            </a:pPr>
+            <a:r>
+              <a:rPr sz="1600" b="0" dirty="0">
+                <a:solidFill>
+                  <a:srgbClr val="11263A"/>
+                </a:solidFill>
+                <a:latin typeface="Calibri" panose="020F0502020204030204" pitchFamily="34" charset="0"/>
+                <a:ea typeface="Calibri" panose="020F0502020204030204" pitchFamily="34" charset="0"/>
+                <a:cs typeface="Calibri" panose="020F0502020204030204" pitchFamily="34" charset="0"/>
+              </a:rPr>
+              <a:t>WHAT IS DOCUMENTED</a:t>
+            </a:r>
+          </a:p>
+          <a:p>
+            <a:pPr>
+              <a:spcAft>
+                <a:spcPts val="1200"/>
+              </a:spcAft>
+            </a:pPr>
+            <a:r>
+              <a:rPr sz="1600" b="0" dirty="0">
+                <a:solidFill>
+                  <a:srgbClr val="11263A"/>
+                </a:solidFill>
+                <a:latin typeface="Calibri" panose="020F0502020204030204" pitchFamily="34" charset="0"/>
+                <a:ea typeface="Calibri" panose="020F0502020204030204" pitchFamily="34" charset="0"/>
+                <a:cs typeface="Calibri" panose="020F0502020204030204" pitchFamily="34" charset="0"/>
+              </a:rPr>
+              <a:t>H1 bridge values and audit rules are reported in the Rishabh branch. A synthetic integration fixture passed.</a:t>
+            </a:r>
+          </a:p>
+          <a:p>
+            <a:pPr>
+              <a:spcAft>
+                <a:spcPts val="1200"/>
+              </a:spcAft>
+            </a:pPr>
+            <a:endParaRPr sz="1600" b="0" dirty="0">
+              <a:solidFill>
+                <a:srgbClr val="11263A"/>
+              </a:solidFill>
+              <a:latin typeface="Calibri" panose="020F0502020204030204" pitchFamily="34" charset="0"/>
+              <a:ea typeface="Calibri" panose="020F0502020204030204" pitchFamily="34" charset="0"/>
+              <a:cs typeface="Calibri" panose="020F0502020204030204" pitchFamily="34" charset="0"/>
+            </a:endParaRPr>
+          </a:p>
+          <a:p>
+            <a:pPr>
+              <a:spcAft>
+                <a:spcPts val="1200"/>
+              </a:spcAft>
+            </a:pPr>
+            <a:r>
+              <a:rPr sz="1600" b="0" dirty="0">
+                <a:solidFill>
+                  <a:srgbClr val="11263A"/>
+                </a:solidFill>
+                <a:latin typeface="Calibri" panose="020F0502020204030204" pitchFamily="34" charset="0"/>
+                <a:ea typeface="Calibri" panose="020F0502020204030204" pitchFamily="34" charset="0"/>
+                <a:cs typeface="Calibri" panose="020F0502020204030204" pitchFamily="34" charset="0"/>
+              </a:rPr>
+              <a:t>WHAT IS NOT YET CONFIRMED</a:t>
+            </a:r>
+          </a:p>
+          <a:p>
+            <a:pPr>
+              <a:spcAft>
+                <a:spcPts val="1200"/>
+              </a:spcAft>
+            </a:pPr>
+            <a:r>
+              <a:rPr sz="1600" b="0" dirty="0">
+                <a:solidFill>
+                  <a:srgbClr val="11263A"/>
+                </a:solidFill>
+                <a:latin typeface="Calibri" panose="020F0502020204030204" pitchFamily="34" charset="0"/>
+                <a:ea typeface="Calibri" panose="020F0502020204030204" pitchFamily="34" charset="0"/>
+                <a:cs typeface="Calibri" panose="020F0502020204030204" pitchFamily="34" charset="0"/>
+              </a:rPr>
+              <a:t>An independent fresh-</a:t>
+            </a:r>
+            <a:r>
+              <a:rPr sz="1600" b="0" dirty="0" err="1">
+                <a:solidFill>
+                  <a:srgbClr val="11263A"/>
+                </a:solidFill>
+                <a:latin typeface="Calibri" panose="020F0502020204030204" pitchFamily="34" charset="0"/>
+                <a:ea typeface="Calibri" panose="020F0502020204030204" pitchFamily="34" charset="0"/>
+                <a:cs typeface="Calibri" panose="020F0502020204030204" pitchFamily="34" charset="0"/>
+              </a:rPr>
+              <a:t>Codespace</a:t>
+            </a:r>
+            <a:r>
+              <a:rPr sz="1600" b="0" dirty="0">
+                <a:solidFill>
+                  <a:srgbClr val="11263A"/>
+                </a:solidFill>
+                <a:latin typeface="Calibri" panose="020F0502020204030204" pitchFamily="34" charset="0"/>
+                <a:ea typeface="Calibri" panose="020F0502020204030204" pitchFamily="34" charset="0"/>
+                <a:cs typeface="Calibri" panose="020F0502020204030204" pitchFamily="34" charset="0"/>
+              </a:rPr>
+              <a:t> full-pack cold run, runtime and matching slide-claim commit SHA are not recorded.</a:t>
+            </a:r>
+          </a:p>
+          <a:p>
+            <a:pPr>
+              <a:spcAft>
+                <a:spcPts val="1200"/>
+              </a:spcAft>
+            </a:pPr>
+            <a:endParaRPr sz="1600" b="0" dirty="0">
+              <a:solidFill>
+                <a:srgbClr val="11263A"/>
+              </a:solidFill>
+              <a:latin typeface="Calibri" panose="020F0502020204030204" pitchFamily="34" charset="0"/>
+              <a:ea typeface="Calibri" panose="020F0502020204030204" pitchFamily="34" charset="0"/>
+              <a:cs typeface="Calibri" panose="020F0502020204030204" pitchFamily="34" charset="0"/>
+            </a:endParaRPr>
+          </a:p>
+          <a:p>
+            <a:pPr>
+              <a:spcAft>
+                <a:spcPts val="1200"/>
+              </a:spcAft>
+            </a:pPr>
+            <a:r>
+              <a:rPr sz="1600" b="0" dirty="0">
+                <a:solidFill>
+                  <a:srgbClr val="11263A"/>
+                </a:solidFill>
+                <a:latin typeface="Calibri" panose="020F0502020204030204" pitchFamily="34" charset="0"/>
+                <a:ea typeface="Calibri" panose="020F0502020204030204" pitchFamily="34" charset="0"/>
+                <a:cs typeface="Calibri" panose="020F0502020204030204" pitchFamily="34" charset="0"/>
+              </a:rPr>
+              <a:t>VYSAG BRANCH LEARNING</a:t>
+            </a:r>
+          </a:p>
+          <a:p>
+            <a:pPr>
+              <a:spcAft>
+                <a:spcPts val="1200"/>
+              </a:spcAft>
+            </a:pPr>
+            <a:r>
+              <a:rPr sz="1600" b="0" dirty="0">
+                <a:solidFill>
+                  <a:srgbClr val="11263A"/>
+                </a:solidFill>
+                <a:latin typeface="Calibri" panose="020F0502020204030204" pitchFamily="34" charset="0"/>
+                <a:ea typeface="Calibri" panose="020F0502020204030204" pitchFamily="34" charset="0"/>
+                <a:cs typeface="Calibri" panose="020F0502020204030204" pitchFamily="34" charset="0"/>
+              </a:rPr>
+              <a:t>Notebook 02 kernel crashes; invoice/payment profiling continued independently in Notebook 03. Raw full-window counts must not be presented as H1 receipts.</a:t>
             </a:r>
           </a:p>
         </p:txBody>
@@ -4688,7 +4722,7 @@
 </file>
 
 <file path=ppt/slides/slide2.xml><?xml version="1.0" encoding="utf-8"?>
-<p:sld xmlns:a="http://schemas.openxmlformats.org/drawingml/2006/main" xmlns:p="http://schemas.openxmlformats.org/presentationml/2006/main" xmlns:r="http://schemas.openxmlformats.org/officeDocument/2006/relationships">
+<p:sld xmlns:a="http://schemas.openxmlformats.org/drawingml/2006/main" xmlns:r="http://schemas.openxmlformats.org/officeDocument/2006/relationships" xmlns:p="http://schemas.openxmlformats.org/presentationml/2006/main">
   <p:cSld>
     <p:spTree>
       <p:nvGrpSpPr>
@@ -4696,7 +4730,14 @@
         <p:cNvGrpSpPr/>
         <p:nvPr/>
       </p:nvGrpSpPr>
-      <p:grpSpPr/>
+      <p:grpSpPr>
+        <a:xfrm>
+          <a:off x="0" y="0"/>
+          <a:ext cx="0" cy="0"/>
+          <a:chOff x="0" y="0"/>
+          <a:chExt cx="0" cy="0"/>
+        </a:xfrm>
+      </p:grpSpPr>
       <p:sp>
         <p:nvSpPr>
           <p:cNvPr id="2" name="Rounded Rectangle 1"/>
@@ -4739,6 +4780,7 @@
           <a:lstStyle/>
           <a:p>
             <a:pPr algn="ctr"/>
+            <a:endParaRPr/>
           </a:p>
         </p:txBody>
       </p:sp>
@@ -4821,7 +4863,7 @@
           <p:nvPr/>
         </p:nvPicPr>
         <p:blipFill>
-          <a:blip r:embed="rId2"/>
+          <a:blip r:embed="rId3"/>
           <a:stretch>
             <a:fillRect/>
           </a:stretch>
@@ -4888,14 +4930,24 @@
           <a:noFill/>
         </p:spPr>
         <p:txBody>
-          <a:bodyPr wrap="square">
+          <a:bodyPr wrap="square" lIns="36576" rIns="36576">
             <a:spAutoFit/>
           </a:bodyPr>
           <a:lstStyle/>
           <a:p>
-            <a:r>
-              <a:rPr sz="2500" b="1"/>
-              <a:t>Which H1 invoices had no captured match, which captured payments matched no invoice, and how much was timing?</a:t>
+            <a:pPr algn="l">
+              <a:spcAft>
+                <a:spcPts val="0"/>
+              </a:spcAft>
+            </a:pPr>
+            <a:r>
+              <a:rPr sz="2700" b="1">
+                <a:solidFill>
+                  <a:srgbClr val="11263A"/>
+                </a:solidFill>
+                <a:latin typeface="Aptos"/>
+              </a:rPr>
+              <a:t>The COO wants a reconciled answer—not two unrelated totals</a:t>
             </a:r>
           </a:p>
         </p:txBody>
@@ -4917,46 +4969,82 @@
           <a:noFill/>
         </p:spPr>
         <p:txBody>
-          <a:bodyPr wrap="square">
+          <a:bodyPr wrap="square" lIns="36576" rIns="36576">
             <a:spAutoFit/>
           </a:bodyPr>
           <a:lstStyle/>
           <a:p>
-            <a:r>
-              <a:rPr sz="1900"/>
-              <a:t>Her words:</a:t>
-            </a:r>
-          </a:p>
-          <a:p>
-            <a:r>
-              <a:rPr sz="1900"/>
+            <a:pPr algn="l">
+              <a:spcAft>
+                <a:spcPts val="1200"/>
+              </a:spcAft>
+            </a:pPr>
+            <a:r>
+              <a:rPr sz="2100" b="0">
+                <a:solidFill>
+                  <a:srgbClr val="11263A"/>
+                </a:solidFill>
+                <a:latin typeface="Aptos"/>
+              </a:rPr>
               <a:t>“Which invoices were never paid, which payments match no invoice, and how much of the gap is only timing?”</a:t>
             </a:r>
           </a:p>
-          <a:p/>
-          <a:p>
-            <a:r>
-              <a:rPr sz="1900"/>
-              <a:t>Our translation:</a:t>
-            </a:r>
-          </a:p>
-          <a:p>
-            <a:r>
-              <a:rPr sz="1900"/>
-              <a:t>Build an H1 invoice-to-capture bridge at each source table’s grain, applying only safe reference matches and showing counts, rupees, and cutoffs.</a:t>
-            </a:r>
-          </a:p>
-          <a:p/>
-          <a:p>
-            <a:r>
-              <a:rPr sz="1900"/>
-              <a:t>The decision it drives:</a:t>
-            </a:r>
-          </a:p>
-          <a:p>
-            <a:r>
-              <a:rPr sz="1900"/>
-              <a:t>Prioritize Finance follow-up while keeping late receipts and unresolved exceptions separate from confirmed losses.</a:t>
+          <a:p>
+            <a:pPr>
+              <a:spcAft>
+                <a:spcPts val="1200"/>
+              </a:spcAft>
+            </a:pPr>
+            <a:endParaRPr sz="2100" b="0">
+              <a:solidFill>
+                <a:srgbClr val="11263A"/>
+              </a:solidFill>
+              <a:latin typeface="Aptos"/>
+            </a:endParaRPr>
+          </a:p>
+          <a:p>
+            <a:pPr>
+              <a:spcAft>
+                <a:spcPts val="1200"/>
+              </a:spcAft>
+            </a:pPr>
+            <a:r>
+              <a:rPr sz="2100" b="0">
+                <a:solidFill>
+                  <a:srgbClr val="11263A"/>
+                </a:solidFill>
+                <a:latin typeface="Aptos"/>
+              </a:rPr>
+              <a:t>Our translation: Match H1 invoices to eligible captured payments, trace exceptions and separate post-close receipts.</a:t>
+            </a:r>
+          </a:p>
+          <a:p>
+            <a:pPr>
+              <a:spcAft>
+                <a:spcPts val="1200"/>
+              </a:spcAft>
+            </a:pPr>
+            <a:endParaRPr sz="2100" b="0">
+              <a:solidFill>
+                <a:srgbClr val="11263A"/>
+              </a:solidFill>
+              <a:latin typeface="Aptos"/>
+            </a:endParaRPr>
+          </a:p>
+          <a:p>
+            <a:pPr>
+              <a:spcAft>
+                <a:spcPts val="1200"/>
+              </a:spcAft>
+            </a:pPr>
+            <a:r>
+              <a:rPr sz="2100" b="0">
+                <a:solidFill>
+                  <a:srgbClr val="11263A"/>
+                </a:solidFill>
+                <a:latin typeface="Aptos"/>
+              </a:rPr>
+              <a:t>Decision: Which invoices and unmatched captures should Finance investigate first?</a:t>
             </a:r>
           </a:p>
         </p:txBody>
@@ -4970,7 +5058,7 @@
 </file>
 
 <file path=ppt/slides/slide3.xml><?xml version="1.0" encoding="utf-8"?>
-<p:sld xmlns:a="http://schemas.openxmlformats.org/drawingml/2006/main" xmlns:p="http://schemas.openxmlformats.org/presentationml/2006/main" xmlns:r="http://schemas.openxmlformats.org/officeDocument/2006/relationships">
+<p:sld xmlns:a="http://schemas.openxmlformats.org/drawingml/2006/main" xmlns:r="http://schemas.openxmlformats.org/officeDocument/2006/relationships" xmlns:p="http://schemas.openxmlformats.org/presentationml/2006/main">
   <p:cSld>
     <p:spTree>
       <p:nvGrpSpPr>
@@ -4978,7 +5066,14 @@
         <p:cNvGrpSpPr/>
         <p:nvPr/>
       </p:nvGrpSpPr>
-      <p:grpSpPr/>
+      <p:grpSpPr>
+        <a:xfrm>
+          <a:off x="0" y="0"/>
+          <a:ext cx="0" cy="0"/>
+          <a:chOff x="0" y="0"/>
+          <a:chExt cx="0" cy="0"/>
+        </a:xfrm>
+      </p:grpSpPr>
       <p:sp>
         <p:nvSpPr>
           <p:cNvPr id="2" name="Rounded Rectangle 1"/>
@@ -5021,6 +5116,7 @@
           <a:lstStyle/>
           <a:p>
             <a:pPr algn="ctr"/>
+            <a:endParaRPr/>
           </a:p>
         </p:txBody>
       </p:sp>
@@ -5103,7 +5199,7 @@
           <p:nvPr/>
         </p:nvPicPr>
         <p:blipFill>
-          <a:blip r:embed="rId2"/>
+          <a:blip r:embed="rId3"/>
           <a:stretch>
             <a:fillRect/>
           </a:stretch>
@@ -5170,14 +5266,24 @@
           <a:noFill/>
         </p:spPr>
         <p:txBody>
-          <a:bodyPr wrap="square">
+          <a:bodyPr wrap="square" lIns="36576" rIns="36576">
             <a:spAutoFit/>
           </a:bodyPr>
           <a:lstStyle/>
           <a:p>
-            <a:r>
-              <a:rPr sz="2400" b="1"/>
-              <a:t>Close balances, later receipts, remaining open amount, and unmatched captures</a:t>
+            <a:pPr algn="l">
+              <a:spcAft>
+                <a:spcPts val="0"/>
+              </a:spcAft>
+            </a:pPr>
+            <a:r>
+              <a:rPr sz="2600" b="1">
+                <a:solidFill>
+                  <a:srgbClr val="11263A"/>
+                </a:solidFill>
+                <a:latin typeface="Aptos"/>
+              </a:rPr>
+              <a:t>A controlled invoice-to-payment bridge, with timing separated</a:t>
             </a:r>
           </a:p>
         </p:txBody>
@@ -5226,69 +5332,26 @@
           <a:lstStyle/>
           <a:p>
             <a:pPr algn="ctr"/>
-          </a:p>
-        </p:txBody>
-      </p:sp>
-      <p:pic>
-        <p:nvPicPr>
-          <p:cNvPr id="9" name="Picture 8" descr="image.png"/>
-          <p:cNvPicPr>
-            <a:picLocks noChangeAspect="1"/>
-          </p:cNvPicPr>
-          <p:nvPr/>
-        </p:nvPicPr>
-        <p:blipFill>
-          <a:blip r:embed="rId4"/>
-          <a:stretch>
-            <a:fillRect/>
-          </a:stretch>
-        </p:blipFill>
-        <p:spPr>
-          <a:xfrm>
-            <a:off x="822960" y="1874519"/>
-            <a:ext cx="10515600" cy="4160520"/>
-          </a:xfrm>
-          <a:prstGeom prst="rect">
+            <a:endParaRPr/>
+          </a:p>
+        </p:txBody>
+      </p:sp>
+      <p:sp>
+        <p:nvSpPr>
+          <p:cNvPr id="9" name="Rounded Rectangle 8"/>
+          <p:cNvSpPr/>
+          <p:nvPr/>
+        </p:nvSpPr>
+        <p:spPr>
+          <a:xfrm>
+            <a:off x="731520" y="1847088"/>
+            <a:ext cx="3246120" cy="1051560"/>
+          </a:xfrm>
+          <a:prstGeom prst="roundRect">
             <a:avLst/>
           </a:prstGeom>
-        </p:spPr>
-      </p:pic>
-    </p:spTree>
-  </p:cSld>
-  <p:clrMapOvr>
-    <a:masterClrMapping/>
-  </p:clrMapOvr>
-</p:sld>
-</file>
-
-<file path=ppt/slides/slide4.xml><?xml version="1.0" encoding="utf-8"?>
-<p:sld xmlns:a="http://schemas.openxmlformats.org/drawingml/2006/main" xmlns:p="http://schemas.openxmlformats.org/presentationml/2006/main" xmlns:r="http://schemas.openxmlformats.org/officeDocument/2006/relationships">
-  <p:cSld>
-    <p:spTree>
-      <p:nvGrpSpPr>
-        <p:cNvPr id="1" name=""/>
-        <p:cNvGrpSpPr/>
-        <p:nvPr/>
-      </p:nvGrpSpPr>
-      <p:grpSpPr/>
-      <p:sp>
-        <p:nvSpPr>
-          <p:cNvPr id="2" name="Rounded Rectangle 1"/>
-          <p:cNvSpPr/>
-          <p:nvPr/>
-        </p:nvSpPr>
-        <p:spPr>
-          <a:xfrm>
-            <a:off x="0" y="0"/>
-            <a:ext cx="12191695" cy="73152"/>
-          </a:xfrm>
-          <a:prstGeom prst="roundRect">
-            <a:avLst>
-              <a:gd name="adj" fmla="val 8000"/>
-            </a:avLst>
-          </a:prstGeom>
           <a:solidFill>
-            <a:srgbClr val="4E38AB"/>
+            <a:srgbClr val="EBF3F8"/>
           </a:solidFill>
           <a:ln>
             <a:noFill/>
@@ -5313,19 +5376,20 @@
           <a:lstStyle/>
           <a:p>
             <a:pPr algn="ctr"/>
-          </a:p>
-        </p:txBody>
-      </p:sp>
-      <p:sp>
-        <p:nvSpPr>
-          <p:cNvPr id="3" name="TextBox 2"/>
+            <a:endParaRPr/>
+          </a:p>
+        </p:txBody>
+      </p:sp>
+      <p:sp>
+        <p:nvSpPr>
+          <p:cNvPr id="10" name="TextBox 9"/>
           <p:cNvSpPr txBox="1"/>
           <p:nvPr/>
         </p:nvSpPr>
         <p:spPr>
           <a:xfrm>
-            <a:off x="457200" y="228600"/>
-            <a:ext cx="7315200" cy="365760"/>
+            <a:off x="868680" y="1956816"/>
+            <a:ext cx="2971800" cy="256032"/>
           </a:xfrm>
           <a:prstGeom prst="rect">
             <a:avLst/>
@@ -5333,34 +5397,38 @@
           <a:noFill/>
         </p:spPr>
         <p:txBody>
-          <a:bodyPr wrap="square">
+          <a:bodyPr wrap="square" lIns="36576" rIns="36576">
             <a:spAutoFit/>
           </a:bodyPr>
           <a:lstStyle/>
           <a:p>
-            <a:pPr algn="l"/>
-            <a:r>
-              <a:rPr sz="1000" b="1">
-                <a:solidFill>
-                  <a:srgbClr val="4E38AB"/>
-                </a:solidFill>
-                <a:latin typeface="Arial"/>
-              </a:rPr>
-              <a:t>3 · THE CLAIM</a:t>
-            </a:r>
-          </a:p>
-        </p:txBody>
-      </p:sp>
-      <p:sp>
-        <p:nvSpPr>
-          <p:cNvPr id="4" name="TextBox 3"/>
+            <a:pPr>
+              <a:spcAft>
+                <a:spcPts val="0"/>
+              </a:spcAft>
+            </a:pPr>
+            <a:r>
+              <a:rPr sz="1400" b="1">
+                <a:solidFill>
+                  <a:srgbClr val="556572"/>
+                </a:solidFill>
+                <a:latin typeface="Aptos"/>
+              </a:rPr>
+              <a:t>H1 INVOICES</a:t>
+            </a:r>
+          </a:p>
+        </p:txBody>
+      </p:sp>
+      <p:sp>
+        <p:nvSpPr>
+          <p:cNvPr id="11" name="TextBox 10"/>
           <p:cNvSpPr txBox="1"/>
           <p:nvPr/>
         </p:nvSpPr>
         <p:spPr>
           <a:xfrm>
-            <a:off x="10332720" y="228600"/>
-            <a:ext cx="1463040" cy="365760"/>
+            <a:off x="868680" y="2258568"/>
+            <a:ext cx="2971800" cy="484632"/>
           </a:xfrm>
           <a:prstGeom prst="rect">
             <a:avLst/>
@@ -5368,130 +5436,44 @@
           <a:noFill/>
         </p:spPr>
         <p:txBody>
-          <a:bodyPr wrap="square">
+          <a:bodyPr wrap="square" lIns="36576" rIns="36576">
             <a:spAutoFit/>
           </a:bodyPr>
           <a:lstStyle/>
           <a:p>
-            <a:pPr algn="r"/>
-            <a:r>
-              <a:rPr sz="1000" b="0">
-                <a:solidFill>
-                  <a:srgbClr val="6B6690"/>
-                </a:solidFill>
-                <a:latin typeface="Arial"/>
-              </a:rPr>
-              <a:t>3 / 6</a:t>
-            </a:r>
-          </a:p>
-        </p:txBody>
-      </p:sp>
-      <p:pic>
-        <p:nvPicPr>
-          <p:cNvPr id="5" name="Picture 4" descr="iitgn_seal.png"/>
-          <p:cNvPicPr>
-            <a:picLocks noChangeAspect="1"/>
-          </p:cNvPicPr>
-          <p:nvPr/>
-        </p:nvPicPr>
-        <p:blipFill>
-          <a:blip r:embed="rId2"/>
-          <a:stretch>
-            <a:fillRect/>
-          </a:stretch>
-        </p:blipFill>
-        <p:spPr>
-          <a:xfrm>
-            <a:off x="457200" y="6263640"/>
-            <a:ext cx="411480" cy="411480"/>
-          </a:xfrm>
-          <a:prstGeom prst="rect">
+            <a:pPr>
+              <a:spcAft>
+                <a:spcPts val="0"/>
+              </a:spcAft>
+            </a:pPr>
+            <a:r>
+              <a:rPr sz="2100" b="1">
+                <a:solidFill>
+                  <a:srgbClr val="1A3E5C"/>
+                </a:solidFill>
+                <a:latin typeface="Aptos"/>
+              </a:rPr>
+              <a:t>162,876  |  ₹26.828 cr</a:t>
+            </a:r>
+          </a:p>
+        </p:txBody>
+      </p:sp>
+      <p:sp>
+        <p:nvSpPr>
+          <p:cNvPr id="12" name="Rounded Rectangle 11"/>
+          <p:cNvSpPr/>
+          <p:nvPr/>
+        </p:nvSpPr>
+        <p:spPr>
+          <a:xfrm>
+            <a:off x="4462272" y="1847088"/>
+            <a:ext cx="3246120" cy="1051560"/>
+          </a:xfrm>
+          <a:prstGeom prst="roundRect">
             <a:avLst/>
           </a:prstGeom>
-        </p:spPr>
-      </p:pic>
-      <p:sp>
-        <p:nvSpPr>
-          <p:cNvPr id="6" name="TextBox 5"/>
-          <p:cNvSpPr txBox="1"/>
-          <p:nvPr/>
-        </p:nvSpPr>
-        <p:spPr>
-          <a:xfrm>
-            <a:off x="960120" y="6309360"/>
-            <a:ext cx="9144000" cy="365760"/>
-          </a:xfrm>
-          <a:prstGeom prst="rect">
-            <a:avLst/>
-          </a:prstGeom>
-          <a:noFill/>
-        </p:spPr>
-        <p:txBody>
-          <a:bodyPr wrap="square">
-            <a:spAutoFit/>
-          </a:bodyPr>
-          <a:lstStyle/>
-          <a:p>
-            <a:pPr algn="l"/>
-            <a:r>
-              <a:rPr sz="800" b="0">
-                <a:solidFill>
-                  <a:srgbClr val="6B6690"/>
-                </a:solidFill>
-                <a:latin typeface="Arial"/>
-              </a:rPr>
-              <a:t>Indian Institute of Technology Gandhinagar · PG Diploma in AI-ML and Agentic AI Engineering · Cohort 2 · Build 1</a:t>
-            </a:r>
-          </a:p>
-        </p:txBody>
-      </p:sp>
-      <p:sp>
-        <p:nvSpPr>
-          <p:cNvPr id="7" name="TextBox 6"/>
-          <p:cNvSpPr txBox="1"/>
-          <p:nvPr/>
-        </p:nvSpPr>
-        <p:spPr>
-          <a:xfrm>
-            <a:off x="457200" y="640080"/>
-            <a:ext cx="11247120" cy="914400"/>
-          </a:xfrm>
-          <a:prstGeom prst="rect">
-            <a:avLst/>
-          </a:prstGeom>
-          <a:noFill/>
-        </p:spPr>
-        <p:txBody>
-          <a:bodyPr wrap="square">
-            <a:spAutoFit/>
-          </a:bodyPr>
-          <a:lstStyle/>
-          <a:p>
-            <a:r>
-              <a:rPr sz="2400" b="1"/>
-              <a:t>A board sentence with period, denominator, cutoff, and a Finance action</a:t>
-            </a:r>
-          </a:p>
-        </p:txBody>
-      </p:sp>
-      <p:sp>
-        <p:nvSpPr>
-          <p:cNvPr id="8" name="Rounded Rectangle 7"/>
-          <p:cNvSpPr/>
-          <p:nvPr/>
-        </p:nvSpPr>
-        <p:spPr>
-          <a:xfrm>
-            <a:off x="457200" y="2011680"/>
-            <a:ext cx="11247120" cy="2377440"/>
-          </a:xfrm>
-          <a:prstGeom prst="roundRect">
-            <a:avLst>
-              <a:gd name="adj" fmla="val 8000"/>
-            </a:avLst>
-          </a:prstGeom>
           <a:solidFill>
-            <a:srgbClr val="EEEAFB"/>
+            <a:srgbClr val="EBF3F8"/>
           </a:solidFill>
           <a:ln>
             <a:noFill/>
@@ -5516,19 +5498,20 @@
           <a:lstStyle/>
           <a:p>
             <a:pPr algn="ctr"/>
-          </a:p>
-        </p:txBody>
-      </p:sp>
-      <p:sp>
-        <p:nvSpPr>
-          <p:cNvPr id="9" name="TextBox 8"/>
+            <a:endParaRPr/>
+          </a:p>
+        </p:txBody>
+      </p:sp>
+      <p:sp>
+        <p:nvSpPr>
+          <p:cNvPr id="13" name="TextBox 12"/>
           <p:cNvSpPr txBox="1"/>
           <p:nvPr/>
         </p:nvSpPr>
         <p:spPr>
           <a:xfrm>
-            <a:off x="822960" y="2286000"/>
-            <a:ext cx="10515600" cy="1828800"/>
+            <a:off x="4599432" y="1956816"/>
+            <a:ext cx="2971800" cy="256032"/>
           </a:xfrm>
           <a:prstGeom prst="rect">
             <a:avLst/>
@@ -5536,54 +5519,83 @@
           <a:noFill/>
         </p:spPr>
         <p:txBody>
-          <a:bodyPr wrap="square">
+          <a:bodyPr wrap="square" lIns="36576" rIns="36576">
             <a:spAutoFit/>
           </a:bodyPr>
           <a:lstStyle/>
           <a:p>
-            <a:r>
-              <a:rPr sz="1900"/>
-              <a:t>At H1 2026 close, 11,586 of 162,876 invoices (₹26.828 crore billed) carried ₹1.947 crore in positive balances; after later captures, ₹1.648 crore (6.14% of H1 billings) remained open across 9,824 invoices on 15 July, while 1,541 H1 captures worth ₹0.267 crore still lacked a safe invoice match—Finance should prioritize June's open invoices and resolve both exception lists before calling balances lost.</a:t>
-            </a:r>
-          </a:p>
-        </p:txBody>
-      </p:sp>
-    </p:spTree>
-  </p:cSld>
-  <p:clrMapOvr>
-    <a:masterClrMapping/>
-  </p:clrMapOvr>
-</p:sld>
-</file>
-
-<file path=ppt/slides/slide5.xml><?xml version="1.0" encoding="utf-8"?>
-<p:sld xmlns:a="http://schemas.openxmlformats.org/drawingml/2006/main" xmlns:p="http://schemas.openxmlformats.org/presentationml/2006/main" xmlns:r="http://schemas.openxmlformats.org/officeDocument/2006/relationships">
-  <p:cSld>
-    <p:spTree>
-      <p:nvGrpSpPr>
-        <p:cNvPr id="1" name=""/>
-        <p:cNvGrpSpPr/>
-        <p:nvPr/>
-      </p:nvGrpSpPr>
-      <p:grpSpPr/>
-      <p:sp>
-        <p:nvSpPr>
-          <p:cNvPr id="2" name="Rounded Rectangle 1"/>
+            <a:pPr>
+              <a:spcAft>
+                <a:spcPts val="0"/>
+              </a:spcAft>
+            </a:pPr>
+            <a:r>
+              <a:rPr sz="1400" b="1">
+                <a:solidFill>
+                  <a:srgbClr val="556572"/>
+                </a:solidFill>
+                <a:latin typeface="Aptos"/>
+              </a:rPr>
+              <a:t>CAPTURES BY 30 JUN</a:t>
+            </a:r>
+          </a:p>
+        </p:txBody>
+      </p:sp>
+      <p:sp>
+        <p:nvSpPr>
+          <p:cNvPr id="14" name="TextBox 13"/>
+          <p:cNvSpPr txBox="1"/>
+          <p:nvPr/>
+        </p:nvSpPr>
+        <p:spPr>
+          <a:xfrm>
+            <a:off x="4599432" y="2258568"/>
+            <a:ext cx="2971800" cy="484632"/>
+          </a:xfrm>
+          <a:prstGeom prst="rect">
+            <a:avLst/>
+          </a:prstGeom>
+          <a:noFill/>
+        </p:spPr>
+        <p:txBody>
+          <a:bodyPr wrap="square" lIns="36576" rIns="36576">
+            <a:spAutoFit/>
+          </a:bodyPr>
+          <a:lstStyle/>
+          <a:p>
+            <a:pPr>
+              <a:spcAft>
+                <a:spcPts val="0"/>
+              </a:spcAft>
+            </a:pPr>
+            <a:r>
+              <a:rPr sz="2100" b="1">
+                <a:solidFill>
+                  <a:srgbClr val="1A3E5C"/>
+                </a:solidFill>
+                <a:latin typeface="Aptos"/>
+              </a:rPr>
+              <a:t>₹24.998 cr matched</a:t>
+            </a:r>
+          </a:p>
+        </p:txBody>
+      </p:sp>
+      <p:sp>
+        <p:nvSpPr>
+          <p:cNvPr id="15" name="Rounded Rectangle 14"/>
           <p:cNvSpPr/>
           <p:nvPr/>
         </p:nvSpPr>
         <p:spPr>
           <a:xfrm>
-            <a:off x="0" y="0"/>
-            <a:ext cx="12191695" cy="73152"/>
+            <a:off x="8183879" y="1847088"/>
+            <a:ext cx="3246120" cy="1051560"/>
           </a:xfrm>
           <a:prstGeom prst="roundRect">
-            <a:avLst>
-              <a:gd name="adj" fmla="val 8000"/>
-            </a:avLst>
+            <a:avLst/>
           </a:prstGeom>
           <a:solidFill>
-            <a:srgbClr val="4E38AB"/>
+            <a:srgbClr val="EBF3F8"/>
           </a:solidFill>
           <a:ln>
             <a:noFill/>
@@ -5608,19 +5620,20 @@
           <a:lstStyle/>
           <a:p>
             <a:pPr algn="ctr"/>
-          </a:p>
-        </p:txBody>
-      </p:sp>
-      <p:sp>
-        <p:nvSpPr>
-          <p:cNvPr id="3" name="TextBox 2"/>
+            <a:endParaRPr/>
+          </a:p>
+        </p:txBody>
+      </p:sp>
+      <p:sp>
+        <p:nvSpPr>
+          <p:cNvPr id="16" name="TextBox 15"/>
           <p:cNvSpPr txBox="1"/>
           <p:nvPr/>
         </p:nvSpPr>
         <p:spPr>
           <a:xfrm>
-            <a:off x="457200" y="228600"/>
-            <a:ext cx="7315200" cy="365760"/>
+            <a:off x="8321040" y="1956816"/>
+            <a:ext cx="2971800" cy="256032"/>
           </a:xfrm>
           <a:prstGeom prst="rect">
             <a:avLst/>
@@ -5628,34 +5641,38 @@
           <a:noFill/>
         </p:spPr>
         <p:txBody>
-          <a:bodyPr wrap="square">
+          <a:bodyPr wrap="square" lIns="36576" rIns="36576">
             <a:spAutoFit/>
           </a:bodyPr>
           <a:lstStyle/>
           <a:p>
-            <a:pPr algn="l"/>
-            <a:r>
-              <a:rPr sz="1000" b="1">
-                <a:solidFill>
-                  <a:srgbClr val="4E38AB"/>
-                </a:solidFill>
-                <a:latin typeface="Arial"/>
-              </a:rPr>
-              <a:t>4 · THE EVIDENCE</a:t>
-            </a:r>
-          </a:p>
-        </p:txBody>
-      </p:sp>
-      <p:sp>
-        <p:nvSpPr>
-          <p:cNvPr id="4" name="TextBox 3"/>
+            <a:pPr>
+              <a:spcAft>
+                <a:spcPts val="0"/>
+              </a:spcAft>
+            </a:pPr>
+            <a:r>
+              <a:rPr sz="1400" b="1">
+                <a:solidFill>
+                  <a:srgbClr val="556572"/>
+                </a:solidFill>
+                <a:latin typeface="Aptos"/>
+              </a:rPr>
+              <a:t>POSITIVE BALANCE</a:t>
+            </a:r>
+          </a:p>
+        </p:txBody>
+      </p:sp>
+      <p:sp>
+        <p:nvSpPr>
+          <p:cNvPr id="17" name="TextBox 16"/>
           <p:cNvSpPr txBox="1"/>
           <p:nvPr/>
         </p:nvSpPr>
         <p:spPr>
           <a:xfrm>
-            <a:off x="10332720" y="228600"/>
-            <a:ext cx="1463040" cy="365760"/>
+            <a:off x="8321040" y="2258568"/>
+            <a:ext cx="2971800" cy="484632"/>
           </a:xfrm>
           <a:prstGeom prst="rect">
             <a:avLst/>
@@ -5663,196 +5680,47 @@
           <a:noFill/>
         </p:spPr>
         <p:txBody>
-          <a:bodyPr wrap="square">
+          <a:bodyPr wrap="square" lIns="36576" rIns="36576">
             <a:spAutoFit/>
           </a:bodyPr>
           <a:lstStyle/>
           <a:p>
-            <a:pPr algn="r"/>
-            <a:r>
-              <a:rPr sz="1000" b="0">
-                <a:solidFill>
-                  <a:srgbClr val="6B6690"/>
-                </a:solidFill>
-                <a:latin typeface="Arial"/>
-              </a:rPr>
-              <a:t>4 / 6</a:t>
-            </a:r>
-          </a:p>
-        </p:txBody>
-      </p:sp>
-      <p:pic>
-        <p:nvPicPr>
-          <p:cNvPr id="5" name="Picture 4" descr="iitgn_seal.png"/>
-          <p:cNvPicPr>
-            <a:picLocks noChangeAspect="1"/>
-          </p:cNvPicPr>
-          <p:nvPr/>
-        </p:nvPicPr>
-        <p:blipFill>
-          <a:blip r:embed="rId2"/>
-          <a:stretch>
-            <a:fillRect/>
-          </a:stretch>
-        </p:blipFill>
-        <p:spPr>
-          <a:xfrm>
-            <a:off x="457200" y="6263640"/>
-            <a:ext cx="411480" cy="411480"/>
-          </a:xfrm>
-          <a:prstGeom prst="rect">
+            <a:pPr>
+              <a:spcAft>
+                <a:spcPts val="0"/>
+              </a:spcAft>
+            </a:pPr>
+            <a:r>
+              <a:rPr sz="2100" b="1">
+                <a:solidFill>
+                  <a:srgbClr val="1A3E5C"/>
+                </a:solidFill>
+                <a:latin typeface="Aptos"/>
+              </a:rPr>
+              <a:t>₹1.947 cr  |  11,586</a:t>
+            </a:r>
+          </a:p>
+        </p:txBody>
+      </p:sp>
+      <p:sp>
+        <p:nvSpPr>
+          <p:cNvPr id="18" name="Rounded Rectangle 17"/>
+          <p:cNvSpPr/>
+          <p:nvPr/>
+        </p:nvSpPr>
+        <p:spPr>
+          <a:xfrm>
+            <a:off x="2377440" y="3867912"/>
+            <a:ext cx="3246120" cy="1051560"/>
+          </a:xfrm>
+          <a:prstGeom prst="roundRect">
             <a:avLst/>
           </a:prstGeom>
-        </p:spPr>
-      </p:pic>
-      <p:sp>
-        <p:nvSpPr>
-          <p:cNvPr id="6" name="TextBox 5"/>
-          <p:cNvSpPr txBox="1"/>
-          <p:nvPr/>
-        </p:nvSpPr>
-        <p:spPr>
-          <a:xfrm>
-            <a:off x="960120" y="6309360"/>
-            <a:ext cx="9144000" cy="365760"/>
-          </a:xfrm>
-          <a:prstGeom prst="rect">
-            <a:avLst/>
-          </a:prstGeom>
-          <a:noFill/>
-        </p:spPr>
-        <p:txBody>
-          <a:bodyPr wrap="square">
-            <a:spAutoFit/>
-          </a:bodyPr>
-          <a:lstStyle/>
-          <a:p>
-            <a:pPr algn="l"/>
-            <a:r>
-              <a:rPr sz="800" b="0">
-                <a:solidFill>
-                  <a:srgbClr val="6B6690"/>
-                </a:solidFill>
-                <a:latin typeface="Arial"/>
-              </a:rPr>
-              <a:t>Indian Institute of Technology Gandhinagar · PG Diploma in AI-ML and Agentic AI Engineering · Cohort 2 · Build 1</a:t>
-            </a:r>
-          </a:p>
-        </p:txBody>
-      </p:sp>
-      <p:sp>
-        <p:nvSpPr>
-          <p:cNvPr id="7" name="TextBox 6"/>
-          <p:cNvSpPr txBox="1"/>
-          <p:nvPr/>
-        </p:nvSpPr>
-        <p:spPr>
-          <a:xfrm>
-            <a:off x="457200" y="640080"/>
-            <a:ext cx="11247120" cy="914400"/>
-          </a:xfrm>
-          <a:prstGeom prst="rect">
-            <a:avLst/>
-          </a:prstGeom>
-          <a:noFill/>
-        </p:spPr>
-        <p:txBody>
-          <a:bodyPr wrap="square">
-            <a:spAutoFit/>
-          </a:bodyPr>
-          <a:lstStyle/>
-          <a:p>
-            <a:r>
-              <a:rPr sz="2400" b="1"/>
-              <a:t>Three measured numbers; the fourth bar is a separate exception</a:t>
-            </a:r>
-          </a:p>
-        </p:txBody>
-      </p:sp>
-      <p:sp>
-        <p:nvSpPr>
-          <p:cNvPr id="8" name="TextBox 7"/>
-          <p:cNvSpPr txBox="1"/>
-          <p:nvPr/>
-        </p:nvSpPr>
-        <p:spPr>
-          <a:xfrm>
-            <a:off x="457200" y="1645920"/>
-            <a:ext cx="4754880" cy="4114800"/>
-          </a:xfrm>
-          <a:prstGeom prst="rect">
-            <a:avLst/>
-          </a:prstGeom>
-          <a:noFill/>
-        </p:spPr>
-        <p:txBody>
-          <a:bodyPr wrap="square">
-            <a:spAutoFit/>
-          </a:bodyPr>
-          <a:lstStyle/>
-          <a:p>
-            <a:r>
-              <a:rPr sz="1700"/>
-              <a:t>1 · 4.97% growth</a:t>
-            </a:r>
-          </a:p>
-          <a:p>
-            <a:r>
-              <a:rPr sz="1700"/>
-              <a:t>457,539 / 435,880 active scheduled test lines, H1 2026 vs H1 2025; rounds to 5%.</a:t>
-            </a:r>
-          </a:p>
-          <a:p/>
-          <a:p>
-            <a:r>
-              <a:rPr sz="1700"/>
-              <a:t>2 · ₹1.947 crore</a:t>
-            </a:r>
-          </a:p>
-          <a:p>
-            <a:r>
-              <a:rPr sz="1700"/>
-              <a:t>Positive balances across 11,586 invoices at 30 June.</a:t>
-            </a:r>
-          </a:p>
-          <a:p/>
-          <a:p>
-            <a:r>
-              <a:rPr sz="1700"/>
-              <a:t>3 · ₹1.648 crore</a:t>
-            </a:r>
-          </a:p>
-          <a:p>
-            <a:r>
-              <a:rPr sz="1700"/>
-              <a:t>Still open across 9,824 invoices by 15 July: 6.14% of ₹26.828 crore H1 billing.</a:t>
-            </a:r>
-          </a:p>
-        </p:txBody>
-      </p:sp>
-      <p:sp>
-        <p:nvSpPr>
-          <p:cNvPr id="9" name="Rounded Rectangle 8"/>
-          <p:cNvSpPr/>
-          <p:nvPr/>
-        </p:nvSpPr>
-        <p:spPr>
-          <a:xfrm>
-            <a:off x="5486400" y="1645920"/>
-            <a:ext cx="6217920" cy="4206240"/>
-          </a:xfrm>
-          <a:prstGeom prst="roundRect">
-            <a:avLst>
-              <a:gd name="adj" fmla="val 8000"/>
-            </a:avLst>
-          </a:prstGeom>
           <a:solidFill>
-            <a:srgbClr val="FFFFFF"/>
+            <a:srgbClr val="EBF3F8"/>
           </a:solidFill>
           <a:ln>
-            <a:solidFill>
-              <a:srgbClr val="D9D2F4"/>
-            </a:solidFill>
+            <a:noFill/>
           </a:ln>
         </p:spPr>
         <p:style>
@@ -5874,69 +5742,104 @@
           <a:lstStyle/>
           <a:p>
             <a:pPr algn="ctr"/>
-          </a:p>
-        </p:txBody>
-      </p:sp>
-      <p:pic>
-        <p:nvPicPr>
-          <p:cNvPr id="10" name="Picture 9" descr="image.png"/>
-          <p:cNvPicPr>
-            <a:picLocks noChangeAspect="1"/>
-          </p:cNvPicPr>
-          <p:nvPr/>
-        </p:nvPicPr>
-        <p:blipFill>
-          <a:blip r:embed="rId4"/>
-          <a:stretch>
-            <a:fillRect/>
-          </a:stretch>
-        </p:blipFill>
-        <p:spPr>
-          <a:xfrm>
-            <a:off x="5486400" y="1965960"/>
-            <a:ext cx="6035040" cy="3794760"/>
+            <a:endParaRPr/>
+          </a:p>
+        </p:txBody>
+      </p:sp>
+      <p:sp>
+        <p:nvSpPr>
+          <p:cNvPr id="19" name="TextBox 18"/>
+          <p:cNvSpPr txBox="1"/>
+          <p:nvPr/>
+        </p:nvSpPr>
+        <p:spPr>
+          <a:xfrm>
+            <a:off x="2514600" y="3977640"/>
+            <a:ext cx="2971800" cy="256032"/>
           </a:xfrm>
           <a:prstGeom prst="rect">
             <a:avLst/>
           </a:prstGeom>
-        </p:spPr>
-      </p:pic>
-    </p:spTree>
-  </p:cSld>
-  <p:clrMapOvr>
-    <a:masterClrMapping/>
-  </p:clrMapOvr>
-</p:sld>
-</file>
-
-<file path=ppt/slides/slide6.xml><?xml version="1.0" encoding="utf-8"?>
-<p:sld xmlns:a="http://schemas.openxmlformats.org/drawingml/2006/main" xmlns:p="http://schemas.openxmlformats.org/presentationml/2006/main" xmlns:r="http://schemas.openxmlformats.org/officeDocument/2006/relationships">
-  <p:cSld>
-    <p:spTree>
-      <p:nvGrpSpPr>
-        <p:cNvPr id="1" name=""/>
-        <p:cNvGrpSpPr/>
-        <p:nvPr/>
-      </p:nvGrpSpPr>
-      <p:grpSpPr/>
-      <p:sp>
-        <p:nvSpPr>
-          <p:cNvPr id="2" name="Rounded Rectangle 1"/>
+          <a:noFill/>
+        </p:spPr>
+        <p:txBody>
+          <a:bodyPr wrap="square" lIns="36576" rIns="36576">
+            <a:spAutoFit/>
+          </a:bodyPr>
+          <a:lstStyle/>
+          <a:p>
+            <a:pPr>
+              <a:spcAft>
+                <a:spcPts val="0"/>
+              </a:spcAft>
+            </a:pPr>
+            <a:r>
+              <a:rPr sz="1400" b="1">
+                <a:solidFill>
+                  <a:srgbClr val="556572"/>
+                </a:solidFill>
+                <a:latin typeface="Aptos"/>
+              </a:rPr>
+              <a:t>LATER CAPTURES</a:t>
+            </a:r>
+          </a:p>
+        </p:txBody>
+      </p:sp>
+      <p:sp>
+        <p:nvSpPr>
+          <p:cNvPr id="20" name="TextBox 19"/>
+          <p:cNvSpPr txBox="1"/>
+          <p:nvPr/>
+        </p:nvSpPr>
+        <p:spPr>
+          <a:xfrm>
+            <a:off x="2514600" y="4279392"/>
+            <a:ext cx="2971800" cy="484632"/>
+          </a:xfrm>
+          <a:prstGeom prst="rect">
+            <a:avLst/>
+          </a:prstGeom>
+          <a:noFill/>
+        </p:spPr>
+        <p:txBody>
+          <a:bodyPr wrap="square" lIns="36576" rIns="36576">
+            <a:spAutoFit/>
+          </a:bodyPr>
+          <a:lstStyle/>
+          <a:p>
+            <a:pPr>
+              <a:spcAft>
+                <a:spcPts val="0"/>
+              </a:spcAft>
+            </a:pPr>
+            <a:r>
+              <a:rPr sz="2100" b="1">
+                <a:solidFill>
+                  <a:srgbClr val="1A3E5C"/>
+                </a:solidFill>
+                <a:latin typeface="Aptos"/>
+              </a:rPr>
+              <a:t>₹0.298 cr face value*</a:t>
+            </a:r>
+          </a:p>
+        </p:txBody>
+      </p:sp>
+      <p:sp>
+        <p:nvSpPr>
+          <p:cNvPr id="21" name="Rounded Rectangle 20"/>
           <p:cNvSpPr/>
           <p:nvPr/>
         </p:nvSpPr>
         <p:spPr>
           <a:xfrm>
-            <a:off x="0" y="0"/>
-            <a:ext cx="12191695" cy="73152"/>
+            <a:off x="6537960" y="3867912"/>
+            <a:ext cx="3246120" cy="1051560"/>
           </a:xfrm>
           <a:prstGeom prst="roundRect">
-            <a:avLst>
-              <a:gd name="adj" fmla="val 8000"/>
-            </a:avLst>
+            <a:avLst/>
           </a:prstGeom>
           <a:solidFill>
-            <a:srgbClr val="4E38AB"/>
+            <a:srgbClr val="EBF3F8"/>
           </a:solidFill>
           <a:ln>
             <a:noFill/>
@@ -5961,19 +5864,20 @@
           <a:lstStyle/>
           <a:p>
             <a:pPr algn="ctr"/>
-          </a:p>
-        </p:txBody>
-      </p:sp>
-      <p:sp>
-        <p:nvSpPr>
-          <p:cNvPr id="3" name="TextBox 2"/>
+            <a:endParaRPr/>
+          </a:p>
+        </p:txBody>
+      </p:sp>
+      <p:sp>
+        <p:nvSpPr>
+          <p:cNvPr id="22" name="TextBox 21"/>
           <p:cNvSpPr txBox="1"/>
           <p:nvPr/>
         </p:nvSpPr>
         <p:spPr>
           <a:xfrm>
-            <a:off x="457200" y="228600"/>
-            <a:ext cx="7315200" cy="365760"/>
+            <a:off x="6675120" y="3977640"/>
+            <a:ext cx="2971800" cy="256032"/>
           </a:xfrm>
           <a:prstGeom prst="rect">
             <a:avLst/>
@@ -5981,34 +5885,38 @@
           <a:noFill/>
         </p:spPr>
         <p:txBody>
-          <a:bodyPr wrap="square">
+          <a:bodyPr wrap="square" lIns="36576" rIns="36576">
             <a:spAutoFit/>
           </a:bodyPr>
           <a:lstStyle/>
           <a:p>
-            <a:pPr algn="l"/>
-            <a:r>
-              <a:rPr sz="1000" b="1">
-                <a:solidFill>
-                  <a:srgbClr val="4E38AB"/>
-                </a:solidFill>
-                <a:latin typeface="Arial"/>
-              </a:rPr>
-              <a:t>5 · THE CAVEAT AND THE ALTERNATIVE</a:t>
-            </a:r>
-          </a:p>
-        </p:txBody>
-      </p:sp>
-      <p:sp>
-        <p:nvSpPr>
-          <p:cNvPr id="4" name="TextBox 3"/>
+            <a:pPr>
+              <a:spcAft>
+                <a:spcPts val="0"/>
+              </a:spcAft>
+            </a:pPr>
+            <a:r>
+              <a:rPr sz="1400" b="1">
+                <a:solidFill>
+                  <a:srgbClr val="556572"/>
+                </a:solidFill>
+                <a:latin typeface="Aptos"/>
+              </a:rPr>
+              <a:t>OPEN BY 15 JUL</a:t>
+            </a:r>
+          </a:p>
+        </p:txBody>
+      </p:sp>
+      <p:sp>
+        <p:nvSpPr>
+          <p:cNvPr id="23" name="TextBox 22"/>
           <p:cNvSpPr txBox="1"/>
           <p:nvPr/>
         </p:nvSpPr>
         <p:spPr>
           <a:xfrm>
-            <a:off x="10332720" y="228600"/>
-            <a:ext cx="1463040" cy="365760"/>
+            <a:off x="6675120" y="4279392"/>
+            <a:ext cx="2971800" cy="484632"/>
           </a:xfrm>
           <a:prstGeom prst="rect">
             <a:avLst/>
@@ -6016,58 +5924,77 @@
           <a:noFill/>
         </p:spPr>
         <p:txBody>
-          <a:bodyPr wrap="square">
+          <a:bodyPr wrap="square" lIns="36576" rIns="36576">
             <a:spAutoFit/>
           </a:bodyPr>
           <a:lstStyle/>
           <a:p>
-            <a:pPr algn="r"/>
-            <a:r>
-              <a:rPr sz="1000" b="0">
-                <a:solidFill>
-                  <a:srgbClr val="6B6690"/>
-                </a:solidFill>
-                <a:latin typeface="Arial"/>
-              </a:rPr>
-              <a:t>5 / 6</a:t>
-            </a:r>
-          </a:p>
-        </p:txBody>
-      </p:sp>
-      <p:pic>
-        <p:nvPicPr>
-          <p:cNvPr id="5" name="Picture 4" descr="iitgn_seal.png"/>
-          <p:cNvPicPr>
-            <a:picLocks noChangeAspect="1"/>
-          </p:cNvPicPr>
-          <p:nvPr/>
-        </p:nvPicPr>
-        <p:blipFill>
-          <a:blip r:embed="rId2"/>
-          <a:stretch>
-            <a:fillRect/>
-          </a:stretch>
-        </p:blipFill>
-        <p:spPr>
-          <a:xfrm>
-            <a:off x="457200" y="6263640"/>
-            <a:ext cx="411480" cy="411480"/>
+            <a:pPr>
+              <a:spcAft>
+                <a:spcPts val="0"/>
+              </a:spcAft>
+            </a:pPr>
+            <a:r>
+              <a:rPr sz="2100" b="1">
+                <a:solidFill>
+                  <a:srgbClr val="1A3E5C"/>
+                </a:solidFill>
+                <a:latin typeface="Aptos"/>
+              </a:rPr>
+              <a:t>₹1.648 cr  |  9,824</a:t>
+            </a:r>
+          </a:p>
+        </p:txBody>
+      </p:sp>
+      <p:sp>
+        <p:nvSpPr>
+          <p:cNvPr id="24" name="TextBox 23"/>
+          <p:cNvSpPr txBox="1"/>
+          <p:nvPr/>
+        </p:nvSpPr>
+        <p:spPr>
+          <a:xfrm>
+            <a:off x="4078224" y="2075688"/>
+            <a:ext cx="365760" cy="502920"/>
           </a:xfrm>
           <a:prstGeom prst="rect">
             <a:avLst/>
           </a:prstGeom>
-        </p:spPr>
-      </p:pic>
-      <p:sp>
-        <p:nvSpPr>
-          <p:cNvPr id="6" name="TextBox 5"/>
+          <a:noFill/>
+        </p:spPr>
+        <p:txBody>
+          <a:bodyPr wrap="square" lIns="36576" rIns="36576">
+            <a:spAutoFit/>
+          </a:bodyPr>
+          <a:lstStyle/>
+          <a:p>
+            <a:pPr>
+              <a:spcAft>
+                <a:spcPts val="0"/>
+              </a:spcAft>
+            </a:pPr>
+            <a:r>
+              <a:rPr sz="2900" b="1">
+                <a:solidFill>
+                  <a:srgbClr val="0085CC"/>
+                </a:solidFill>
+                <a:latin typeface="Aptos"/>
+              </a:rPr>
+              <a:t>→</a:t>
+            </a:r>
+          </a:p>
+        </p:txBody>
+      </p:sp>
+      <p:sp>
+        <p:nvSpPr>
+          <p:cNvPr id="25" name="TextBox 24"/>
           <p:cNvSpPr txBox="1"/>
           <p:nvPr/>
         </p:nvSpPr>
         <p:spPr>
           <a:xfrm>
-            <a:off x="960120" y="6309360"/>
-            <a:ext cx="9144000" cy="365760"/>
+            <a:off x="7790688" y="2075688"/>
+            <a:ext cx="365760" cy="502920"/>
           </a:xfrm>
           <a:prstGeom prst="rect">
             <a:avLst/>
@@ -6075,34 +6002,38 @@
           <a:noFill/>
         </p:spPr>
         <p:txBody>
-          <a:bodyPr wrap="square">
+          <a:bodyPr wrap="square" lIns="36576" rIns="36576">
             <a:spAutoFit/>
           </a:bodyPr>
           <a:lstStyle/>
           <a:p>
-            <a:pPr algn="l"/>
-            <a:r>
-              <a:rPr sz="800" b="0">
-                <a:solidFill>
-                  <a:srgbClr val="6B6690"/>
-                </a:solidFill>
-                <a:latin typeface="Arial"/>
-              </a:rPr>
-              <a:t>Indian Institute of Technology Gandhinagar · PG Diploma in AI-ML and Agentic AI Engineering · Cohort 2 · Build 1</a:t>
-            </a:r>
-          </a:p>
-        </p:txBody>
-      </p:sp>
-      <p:sp>
-        <p:nvSpPr>
-          <p:cNvPr id="7" name="TextBox 6"/>
+            <a:pPr>
+              <a:spcAft>
+                <a:spcPts val="0"/>
+              </a:spcAft>
+            </a:pPr>
+            <a:r>
+              <a:rPr sz="2900" b="1">
+                <a:solidFill>
+                  <a:srgbClr val="0085CC"/>
+                </a:solidFill>
+                <a:latin typeface="Aptos"/>
+              </a:rPr>
+              <a:t>→</a:t>
+            </a:r>
+          </a:p>
+        </p:txBody>
+      </p:sp>
+      <p:sp>
+        <p:nvSpPr>
+          <p:cNvPr id="26" name="TextBox 25"/>
           <p:cNvSpPr txBox="1"/>
           <p:nvPr/>
         </p:nvSpPr>
         <p:spPr>
           <a:xfrm>
-            <a:off x="457200" y="640080"/>
-            <a:ext cx="11247120" cy="914400"/>
+            <a:off x="5550408" y="3154680"/>
+            <a:ext cx="1417320" cy="411480"/>
           </a:xfrm>
           <a:prstGeom prst="rect">
             <a:avLst/>
@@ -6110,28 +6041,38 @@
           <a:noFill/>
         </p:spPr>
         <p:txBody>
-          <a:bodyPr wrap="square">
+          <a:bodyPr wrap="square" lIns="36576" rIns="36576">
             <a:spAutoFit/>
           </a:bodyPr>
           <a:lstStyle/>
           <a:p>
-            <a:r>
-              <a:rPr sz="2400" b="1"/>
-              <a:t>The balance is provisional; do not net unrelated invoices or claim a loss</a:t>
-            </a:r>
-          </a:p>
-        </p:txBody>
-      </p:sp>
-      <p:sp>
-        <p:nvSpPr>
-          <p:cNvPr id="8" name="TextBox 7"/>
+            <a:pPr>
+              <a:spcAft>
+                <a:spcPts val="0"/>
+              </a:spcAft>
+            </a:pPr>
+            <a:r>
+              <a:rPr sz="1600" b="1">
+                <a:solidFill>
+                  <a:srgbClr val="0085CC"/>
+                </a:solidFill>
+                <a:latin typeface="Aptos"/>
+              </a:rPr>
+              <a:t>↓ timing</a:t>
+            </a:r>
+          </a:p>
+        </p:txBody>
+      </p:sp>
+      <p:sp>
+        <p:nvSpPr>
+          <p:cNvPr id="27" name="TextBox 26"/>
           <p:cNvSpPr txBox="1"/>
           <p:nvPr/>
         </p:nvSpPr>
         <p:spPr>
           <a:xfrm>
-            <a:off x="457200" y="1645920"/>
-            <a:ext cx="11247120" cy="4206240"/>
+            <a:off x="777240" y="5349240"/>
+            <a:ext cx="10789920" cy="384048"/>
           </a:xfrm>
           <a:prstGeom prst="rect">
             <a:avLst/>
@@ -6139,33 +6080,24 @@
           <a:noFill/>
         </p:spPr>
         <p:txBody>
-          <a:bodyPr wrap="square">
+          <a:bodyPr wrap="square" lIns="36576" rIns="36576">
             <a:spAutoFit/>
           </a:bodyPr>
           <a:lstStyle/>
           <a:p>
-            <a:r>
-              <a:rPr sz="1800"/>
-              <a:t>What could change the claim:</a:t>
-            </a:r>
-          </a:p>
-          <a:p>
-            <a:r>
-              <a:rPr sz="1800"/>
-              <a:t>Finance has not confirmed source completeness, contractual due dates, refunds/reversals, or independent bank and clinic-cash coverage. The ₹1.648 crore is open at the observation cutoff, not a verified overdue or loss amount.</a:t>
-            </a:r>
-          </a:p>
-          <a:p/>
-          <a:p>
-            <a:r>
-              <a:rPr sz="1800"/>
-              <a:t>Alternative rejected:</a:t>
-            </a:r>
-          </a:p>
-          <a:p>
-            <a:r>
-              <a:rPr sz="1800"/>
-              <a:t>Netting ₹0.117 crore of overcaptures against positive balances would reduce the headline from ₹1.947 crore to a net diagnostic of ₹1.830 crore, but could offset unrelated invoices. We report the positive balances and overcaptures separately.</a:t>
+            <a:pPr>
+              <a:spcAft>
+                <a:spcPts val="0"/>
+              </a:spcAft>
+            </a:pPr>
+            <a:r>
+              <a:rPr sz="1200" b="0">
+                <a:solidFill>
+                  <a:srgbClr val="556572"/>
+                </a:solidFill>
+                <a:latin typeface="Aptos"/>
+              </a:rPr>
+              <a:t>* Later-capture figure is face value of the formerly no-capture invoices; it is not a direct arithmetic bridge subtraction.</a:t>
             </a:r>
           </a:p>
         </p:txBody>
@@ -6178,8 +6110,8 @@
 </p:sld>
 </file>
 
-<file path=ppt/slides/slide7.xml><?xml version="1.0" encoding="utf-8"?>
-<p:sld xmlns:a="http://schemas.openxmlformats.org/drawingml/2006/main" xmlns:p="http://schemas.openxmlformats.org/presentationml/2006/main" xmlns:r="http://schemas.openxmlformats.org/officeDocument/2006/relationships">
+<file path=ppt/slides/slide4.xml><?xml version="1.0" encoding="utf-8"?>
+<p:sld xmlns:a="http://schemas.openxmlformats.org/drawingml/2006/main" xmlns:r="http://schemas.openxmlformats.org/officeDocument/2006/relationships" xmlns:p="http://schemas.openxmlformats.org/presentationml/2006/main">
   <p:cSld>
     <p:spTree>
       <p:nvGrpSpPr>
@@ -6187,7 +6119,14 @@
         <p:cNvGrpSpPr/>
         <p:nvPr/>
       </p:nvGrpSpPr>
-      <p:grpSpPr/>
+      <p:grpSpPr>
+        <a:xfrm>
+          <a:off x="0" y="0"/>
+          <a:ext cx="0" cy="0"/>
+          <a:chOff x="0" y="0"/>
+          <a:chExt cx="0" cy="0"/>
+        </a:xfrm>
+      </p:grpSpPr>
       <p:sp>
         <p:nvSpPr>
           <p:cNvPr id="2" name="Rounded Rectangle 1"/>
@@ -6230,6 +6169,7 @@
           <a:lstStyle/>
           <a:p>
             <a:pPr algn="ctr"/>
+            <a:endParaRPr/>
           </a:p>
         </p:txBody>
       </p:sp>
@@ -6263,7 +6203,7 @@
                 </a:solidFill>
                 <a:latin typeface="Arial"/>
               </a:rPr>
-              <a:t>6 · THE ACTION</a:t>
+              <a:t>3 · THE CLAIM</a:t>
             </a:r>
           </a:p>
         </p:txBody>
@@ -6298,7 +6238,7 @@
                 </a:solidFill>
                 <a:latin typeface="Arial"/>
               </a:rPr>
-              <a:t>6 / 6</a:t>
+              <a:t>3 / 6</a:t>
             </a:r>
           </a:p>
         </p:txBody>
@@ -6312,7 +6252,7 @@
           <p:nvPr/>
         </p:nvPicPr>
         <p:blipFill>
-          <a:blip r:embed="rId2"/>
+          <a:blip r:embed="rId3"/>
           <a:stretch>
             <a:fillRect/>
           </a:stretch>
@@ -6379,96 +6319,38 @@
           <a:noFill/>
         </p:spPr>
         <p:txBody>
-          <a:bodyPr wrap="square">
+          <a:bodyPr wrap="square" lIns="36576" rIns="36576">
             <a:spAutoFit/>
           </a:bodyPr>
           <a:lstStyle/>
           <a:p>
-            <a:r>
-              <a:rPr sz="2400" b="1"/>
-              <a:t>Start with the largest measured cohort; verify both exception queues</a:t>
-            </a:r>
-          </a:p>
-        </p:txBody>
-      </p:sp>
-      <p:sp>
-        <p:nvSpPr>
-          <p:cNvPr id="8" name="TextBox 7"/>
-          <p:cNvSpPr txBox="1"/>
-          <p:nvPr/>
-        </p:nvSpPr>
-        <p:spPr>
-          <a:xfrm>
-            <a:off x="457200" y="1645920"/>
-            <a:ext cx="11247120" cy="4206240"/>
-          </a:xfrm>
-          <a:prstGeom prst="rect">
-            <a:avLst/>
-          </a:prstGeom>
-          <a:noFill/>
-        </p:spPr>
-        <p:txBody>
-          <a:bodyPr wrap="square">
-            <a:spAutoFit/>
-          </a:bodyPr>
-          <a:lstStyle/>
-          <a:p>
-            <a:r>
-              <a:rPr sz="1900"/>
-              <a:t>Do: Review June invoices first (45.8% of the 15 July open balance), then resolve the late-capture and unmatched-capture lists.</a:t>
-            </a:r>
-          </a:p>
-          <a:p/>
-          <a:p>
-            <a:r>
-              <a:rPr sz="1900"/>
-              <a:t>It costs: Finance review time; hours are not estimated from the supplied files.</a:t>
-            </a:r>
-          </a:p>
-          <a:p/>
-          <a:p>
-            <a:r>
-              <a:rPr sz="1900"/>
-              <a:t>If we are wrong, it costs: Misstating collections or treating a timing/reference issue as a permanent loss.</a:t>
-            </a:r>
-          </a:p>
-          <a:p/>
-          <a:p>
-            <a:r>
-              <a:rPr sz="1900"/>
-              <a:t>With two more days: Confirm due dates, source coverage, reversals, and bank/cash evidence, then rerun the bridge.</a:t>
-            </a:r>
-          </a:p>
-        </p:txBody>
-      </p:sp>
-    </p:spTree>
-  </p:cSld>
-  <p:clrMapOvr>
-    <a:masterClrMapping/>
-  </p:clrMapOvr>
-</p:sld>
-</file>
-
-<file path=ppt/slides/slide8.xml><?xml version="1.0" encoding="utf-8"?>
-<p:sld xmlns:a="http://schemas.openxmlformats.org/drawingml/2006/main" xmlns:p="http://schemas.openxmlformats.org/presentationml/2006/main" xmlns:r="http://schemas.openxmlformats.org/officeDocument/2006/relationships">
-  <p:cSld>
-    <p:spTree>
-      <p:nvGrpSpPr>
-        <p:cNvPr id="1" name=""/>
-        <p:cNvGrpSpPr/>
-        <p:nvPr/>
-      </p:nvGrpSpPr>
-      <p:grpSpPr/>
-      <p:sp>
-        <p:nvSpPr>
-          <p:cNvPr id="2" name="Rounded Rectangle 1"/>
+            <a:pPr algn="l">
+              <a:spcAft>
+                <a:spcPts val="0"/>
+              </a:spcAft>
+            </a:pPr>
+            <a:r>
+              <a:rPr sz="2800" b="1">
+                <a:solidFill>
+                  <a:srgbClr val="11263A"/>
+                </a:solidFill>
+                <a:latin typeface="Aptos"/>
+              </a:rPr>
+              <a:t>One board-ready sentence</a:t>
+            </a:r>
+          </a:p>
+        </p:txBody>
+      </p:sp>
+      <p:sp>
+        <p:nvSpPr>
+          <p:cNvPr id="8" name="Rounded Rectangle 7"/>
           <p:cNvSpPr/>
           <p:nvPr/>
         </p:nvSpPr>
         <p:spPr>
           <a:xfrm>
-            <a:off x="0" y="0"/>
-            <a:ext cx="12191695" cy="6858000"/>
+            <a:off x="457200" y="2011680"/>
+            <a:ext cx="11247120" cy="2377440"/>
           </a:xfrm>
           <a:prstGeom prst="roundRect">
             <a:avLst>
@@ -6476,7 +6358,7 @@
             </a:avLst>
           </a:prstGeom>
           <a:solidFill>
-            <a:srgbClr val="1A0F5C"/>
+            <a:srgbClr val="EEEAFB"/>
           </a:solidFill>
           <a:ln>
             <a:noFill/>
@@ -6501,19 +6383,20 @@
           <a:lstStyle/>
           <a:p>
             <a:pPr algn="ctr"/>
-          </a:p>
-        </p:txBody>
-      </p:sp>
-      <p:sp>
-        <p:nvSpPr>
-          <p:cNvPr id="3" name="TextBox 2"/>
+            <a:endParaRPr/>
+          </a:p>
+        </p:txBody>
+      </p:sp>
+      <p:sp>
+        <p:nvSpPr>
+          <p:cNvPr id="9" name="TextBox 8"/>
           <p:cNvSpPr txBox="1"/>
           <p:nvPr/>
         </p:nvSpPr>
         <p:spPr>
           <a:xfrm>
-            <a:off x="548640" y="2560320"/>
-            <a:ext cx="10972800" cy="1097280"/>
+            <a:off x="822960" y="2286000"/>
+            <a:ext cx="10515600" cy="1828800"/>
           </a:xfrm>
           <a:prstGeom prst="rect">
             <a:avLst/>
@@ -6521,49 +6404,24 @@
           <a:noFill/>
         </p:spPr>
         <p:txBody>
-          <a:bodyPr wrap="square">
+          <a:bodyPr wrap="square" lIns="36576" rIns="36576">
             <a:spAutoFit/>
           </a:bodyPr>
           <a:lstStyle/>
           <a:p>
-            <a:pPr algn="l"/>
-            <a:r>
-              <a:rPr sz="4000" b="1">
-                <a:solidFill>
-                  <a:srgbClr val="FFFFFF"/>
-                </a:solidFill>
-                <a:latin typeface="Georgia"/>
-              </a:rPr>
-              <a:t>Questions</a:t>
-            </a:r>
-          </a:p>
-        </p:txBody>
-      </p:sp>
-      <p:sp>
-        <p:nvSpPr>
-          <p:cNvPr id="4" name="TextBox 3"/>
-          <p:cNvSpPr txBox="1"/>
-          <p:nvPr/>
-        </p:nvSpPr>
-        <p:spPr>
-          <a:xfrm>
-            <a:off x="548640" y="3657600"/>
-            <a:ext cx="10058400" cy="914400"/>
-          </a:xfrm>
-          <a:prstGeom prst="rect">
-            <a:avLst/>
-          </a:prstGeom>
-          <a:noFill/>
-        </p:spPr>
-        <p:txBody>
-          <a:bodyPr wrap="square">
-            <a:spAutoFit/>
-          </a:bodyPr>
-          <a:lstStyle/>
-          <a:p>
-            <a:r>
-              <a:rPr sz="1900"/>
-              <a:t>Approach, cleaning and caveats: github.com/RishabhInTech/c2-build1-brief-C-group-10</a:t>
+            <a:pPr algn="ctr">
+              <a:spcAft>
+                <a:spcPts val="0"/>
+              </a:spcAft>
+            </a:pPr>
+            <a:r>
+              <a:rPr sz="2500" b="1">
+                <a:solidFill>
+                  <a:srgbClr val="11263A"/>
+                </a:solidFill>
+                <a:latin typeface="Aptos"/>
+              </a:rPr>
+              <a:t>Of ₹26.828 crore billed in H1 2026, ₹1.648 crore (6.14%) remained open across 9,824 invoices by 15 July; 1,541 H1 captured attempts worth ₹0.267 crore also lacked a safe invoice match.</a:t>
             </a:r>
           </a:p>
         </p:txBody>
@@ -6576,8 +6434,8 @@
 </p:sld>
 </file>
 
-<file path=ppt/slides/slide9.xml><?xml version="1.0" encoding="utf-8"?>
-<p:sld xmlns:a="http://schemas.openxmlformats.org/drawingml/2006/main" xmlns:p="http://schemas.openxmlformats.org/presentationml/2006/main" xmlns:r="http://schemas.openxmlformats.org/officeDocument/2006/relationships">
+<file path=ppt/slides/slide5.xml><?xml version="1.0" encoding="utf-8"?>
+<p:sld xmlns:a="http://schemas.openxmlformats.org/drawingml/2006/main" xmlns:r="http://schemas.openxmlformats.org/officeDocument/2006/relationships" xmlns:p="http://schemas.openxmlformats.org/presentationml/2006/main">
   <p:cSld>
     <p:spTree>
       <p:nvGrpSpPr>
@@ -6585,7 +6443,14 @@
         <p:cNvGrpSpPr/>
         <p:nvPr/>
       </p:nvGrpSpPr>
-      <p:grpSpPr/>
+      <p:grpSpPr>
+        <a:xfrm>
+          <a:off x="0" y="0"/>
+          <a:ext cx="0" cy="0"/>
+          <a:chOff x="0" y="0"/>
+          <a:chExt cx="0" cy="0"/>
+        </a:xfrm>
+      </p:grpSpPr>
       <p:sp>
         <p:nvSpPr>
           <p:cNvPr id="2" name="Rounded Rectangle 1"/>
@@ -6628,6 +6493,7 @@
           <a:lstStyle/>
           <a:p>
             <a:pPr algn="ctr"/>
+            <a:endParaRPr/>
           </a:p>
         </p:txBody>
       </p:sp>
@@ -6661,7 +6527,7 @@
                 </a:solidFill>
                 <a:latin typeface="Arial"/>
               </a:rPr>
-              <a:t>APPENDIX A</a:t>
+              <a:t>4 · THE EVIDENCE</a:t>
             </a:r>
           </a:p>
         </p:txBody>
@@ -6696,7 +6562,7 @@
                 </a:solidFill>
                 <a:latin typeface="Arial"/>
               </a:rPr>
-              <a:t>7 / 8</a:t>
+              <a:t>4 / 6</a:t>
             </a:r>
           </a:p>
         </p:txBody>
@@ -6710,7 +6576,7 @@
           <p:nvPr/>
         </p:nvPicPr>
         <p:blipFill>
-          <a:blip r:embed="rId2"/>
+          <a:blip r:embed="rId3"/>
           <a:stretch>
             <a:fillRect/>
           </a:stretch>
@@ -6777,6 +6643,896 @@
           <a:noFill/>
         </p:spPr>
         <p:txBody>
+          <a:bodyPr wrap="square" lIns="36576" rIns="36576">
+            <a:spAutoFit/>
+          </a:bodyPr>
+          <a:lstStyle/>
+          <a:p>
+            <a:pPr algn="l">
+              <a:spcAft>
+                <a:spcPts val="0"/>
+              </a:spcAft>
+            </a:pPr>
+            <a:r>
+              <a:rPr sz="2500" b="1">
+                <a:solidFill>
+                  <a:srgbClr val="11263A"/>
+                </a:solidFill>
+                <a:latin typeface="Aptos"/>
+              </a:rPr>
+              <a:t>Three checks identify the work Finance should prioritize</a:t>
+            </a:r>
+          </a:p>
+        </p:txBody>
+      </p:sp>
+      <p:sp>
+        <p:nvSpPr>
+          <p:cNvPr id="8" name="TextBox 7"/>
+          <p:cNvSpPr txBox="1"/>
+          <p:nvPr/>
+        </p:nvSpPr>
+        <p:spPr>
+          <a:xfrm>
+            <a:off x="457200" y="1645920"/>
+            <a:ext cx="4754880" cy="4339650"/>
+          </a:xfrm>
+          <a:prstGeom prst="rect">
+            <a:avLst/>
+          </a:prstGeom>
+          <a:noFill/>
+        </p:spPr>
+        <p:txBody>
+          <a:bodyPr wrap="square" lIns="36576" rIns="36576">
+            <a:spAutoFit/>
+          </a:bodyPr>
+          <a:lstStyle/>
+          <a:p>
+            <a:pPr algn="l">
+              <a:spcAft>
+                <a:spcPts val="1200"/>
+              </a:spcAft>
+            </a:pPr>
+            <a:r>
+              <a:rPr sz="1600" b="0" dirty="0">
+                <a:solidFill>
+                  <a:srgbClr val="11263A"/>
+                </a:solidFill>
+                <a:latin typeface="+mj-lt"/>
+              </a:rPr>
+              <a:t>₹1.947 </a:t>
+            </a:r>
+            <a:r>
+              <a:rPr sz="1600" b="0" dirty="0" err="1">
+                <a:solidFill>
+                  <a:srgbClr val="11263A"/>
+                </a:solidFill>
+                <a:latin typeface="+mj-lt"/>
+              </a:rPr>
+              <a:t>cr</a:t>
+            </a:r>
+            <a:endParaRPr sz="1600" b="0" dirty="0">
+              <a:solidFill>
+                <a:srgbClr val="11263A"/>
+              </a:solidFill>
+              <a:latin typeface="+mj-lt"/>
+            </a:endParaRPr>
+          </a:p>
+          <a:p>
+            <a:pPr>
+              <a:spcAft>
+                <a:spcPts val="1200"/>
+              </a:spcAft>
+            </a:pPr>
+            <a:r>
+              <a:rPr sz="1600" b="0" dirty="0">
+                <a:solidFill>
+                  <a:srgbClr val="11263A"/>
+                </a:solidFill>
+                <a:latin typeface="+mj-lt"/>
+              </a:rPr>
+              <a:t>Positive balances at 30 Jun</a:t>
+            </a:r>
+          </a:p>
+          <a:p>
+            <a:pPr>
+              <a:spcAft>
+                <a:spcPts val="1200"/>
+              </a:spcAft>
+            </a:pPr>
+            <a:r>
+              <a:rPr sz="1600" b="0" dirty="0">
+                <a:solidFill>
+                  <a:srgbClr val="11263A"/>
+                </a:solidFill>
+                <a:latin typeface="+mj-lt"/>
+              </a:rPr>
+              <a:t>11,586 of 162,876 invoices</a:t>
+            </a:r>
+          </a:p>
+          <a:p>
+            <a:pPr>
+              <a:spcAft>
+                <a:spcPts val="1200"/>
+              </a:spcAft>
+            </a:pPr>
+            <a:endParaRPr sz="1600" b="0" dirty="0">
+              <a:solidFill>
+                <a:srgbClr val="11263A"/>
+              </a:solidFill>
+              <a:latin typeface="+mj-lt"/>
+            </a:endParaRPr>
+          </a:p>
+          <a:p>
+            <a:pPr>
+              <a:spcAft>
+                <a:spcPts val="1200"/>
+              </a:spcAft>
+            </a:pPr>
+            <a:r>
+              <a:rPr sz="1600" b="0" dirty="0">
+                <a:solidFill>
+                  <a:srgbClr val="11263A"/>
+                </a:solidFill>
+                <a:latin typeface="+mj-lt"/>
+              </a:rPr>
+              <a:t>₹1.648 </a:t>
+            </a:r>
+            <a:r>
+              <a:rPr sz="1600" b="0" dirty="0" err="1">
+                <a:solidFill>
+                  <a:srgbClr val="11263A"/>
+                </a:solidFill>
+                <a:latin typeface="+mj-lt"/>
+              </a:rPr>
+              <a:t>cr</a:t>
+            </a:r>
+            <a:endParaRPr sz="1600" b="0" dirty="0">
+              <a:solidFill>
+                <a:srgbClr val="11263A"/>
+              </a:solidFill>
+              <a:latin typeface="+mj-lt"/>
+            </a:endParaRPr>
+          </a:p>
+          <a:p>
+            <a:pPr>
+              <a:spcAft>
+                <a:spcPts val="1200"/>
+              </a:spcAft>
+            </a:pPr>
+            <a:r>
+              <a:rPr sz="1600" b="0" dirty="0">
+                <a:solidFill>
+                  <a:srgbClr val="11263A"/>
+                </a:solidFill>
+                <a:latin typeface="+mj-lt"/>
+              </a:rPr>
+              <a:t>Still open by 15 Jul</a:t>
+            </a:r>
+          </a:p>
+          <a:p>
+            <a:pPr>
+              <a:spcAft>
+                <a:spcPts val="1200"/>
+              </a:spcAft>
+            </a:pPr>
+            <a:r>
+              <a:rPr sz="1600" b="0" dirty="0">
+                <a:solidFill>
+                  <a:srgbClr val="11263A"/>
+                </a:solidFill>
+                <a:latin typeface="+mj-lt"/>
+              </a:rPr>
+              <a:t>9,824 H1 invoices</a:t>
+            </a:r>
+          </a:p>
+          <a:p>
+            <a:pPr>
+              <a:spcAft>
+                <a:spcPts val="1200"/>
+              </a:spcAft>
+            </a:pPr>
+            <a:endParaRPr sz="1600" b="0" dirty="0">
+              <a:solidFill>
+                <a:srgbClr val="11263A"/>
+              </a:solidFill>
+              <a:latin typeface="+mj-lt"/>
+            </a:endParaRPr>
+          </a:p>
+          <a:p>
+            <a:pPr>
+              <a:spcAft>
+                <a:spcPts val="1200"/>
+              </a:spcAft>
+            </a:pPr>
+            <a:r>
+              <a:rPr sz="1600" b="0" dirty="0">
+                <a:solidFill>
+                  <a:srgbClr val="11263A"/>
+                </a:solidFill>
+                <a:latin typeface="+mj-lt"/>
+              </a:rPr>
+              <a:t>₹0.267 </a:t>
+            </a:r>
+            <a:r>
+              <a:rPr sz="1600" b="0" dirty="0" err="1">
+                <a:solidFill>
+                  <a:srgbClr val="11263A"/>
+                </a:solidFill>
+                <a:latin typeface="+mj-lt"/>
+              </a:rPr>
+              <a:t>cr</a:t>
+            </a:r>
+            <a:endParaRPr sz="1600" b="0" dirty="0">
+              <a:solidFill>
+                <a:srgbClr val="11263A"/>
+              </a:solidFill>
+              <a:latin typeface="+mj-lt"/>
+            </a:endParaRPr>
+          </a:p>
+          <a:p>
+            <a:pPr>
+              <a:spcAft>
+                <a:spcPts val="1200"/>
+              </a:spcAft>
+            </a:pPr>
+            <a:r>
+              <a:rPr sz="1600" b="0" dirty="0">
+                <a:solidFill>
+                  <a:srgbClr val="11263A"/>
+                </a:solidFill>
+                <a:latin typeface="+mj-lt"/>
+              </a:rPr>
+              <a:t>H1 captured but unmatched</a:t>
+            </a:r>
+            <a:endParaRPr lang="en-US" sz="1600" b="0" dirty="0">
+              <a:solidFill>
+                <a:srgbClr val="11263A"/>
+              </a:solidFill>
+              <a:latin typeface="+mj-lt"/>
+            </a:endParaRPr>
+          </a:p>
+          <a:p>
+            <a:pPr>
+              <a:spcAft>
+                <a:spcPts val="1200"/>
+              </a:spcAft>
+            </a:pPr>
+            <a:r>
+              <a:rPr lang="en-US" sz="1600" b="0" dirty="0">
+                <a:solidFill>
+                  <a:srgbClr val="11263A"/>
+                </a:solidFill>
+                <a:latin typeface="+mj-lt"/>
+              </a:rPr>
+              <a:t>1,541 of 156,458 captured attempts</a:t>
+            </a:r>
+          </a:p>
+        </p:txBody>
+      </p:sp>
+      <p:sp>
+        <p:nvSpPr>
+          <p:cNvPr id="9" name="Rounded Rectangle 8"/>
+          <p:cNvSpPr/>
+          <p:nvPr/>
+        </p:nvSpPr>
+        <p:spPr>
+          <a:xfrm>
+            <a:off x="5486400" y="1645920"/>
+            <a:ext cx="6217920" cy="4206240"/>
+          </a:xfrm>
+          <a:prstGeom prst="roundRect">
+            <a:avLst>
+              <a:gd name="adj" fmla="val 8000"/>
+            </a:avLst>
+          </a:prstGeom>
+          <a:solidFill>
+            <a:srgbClr val="FFFFFF"/>
+          </a:solidFill>
+          <a:ln>
+            <a:solidFill>
+              <a:srgbClr val="D9D2F4"/>
+            </a:solidFill>
+          </a:ln>
+        </p:spPr>
+        <p:style>
+          <a:lnRef idx="1">
+            <a:schemeClr val="accent1"/>
+          </a:lnRef>
+          <a:fillRef idx="3">
+            <a:schemeClr val="accent1"/>
+          </a:fillRef>
+          <a:effectRef idx="2">
+            <a:schemeClr val="accent1"/>
+          </a:effectRef>
+          <a:fontRef idx="minor">
+            <a:schemeClr val="lt1"/>
+          </a:fontRef>
+        </p:style>
+        <p:txBody>
+          <a:bodyPr rtlCol="0" anchor="ctr"/>
+          <a:lstStyle/>
+          <a:p>
+            <a:pPr algn="ctr"/>
+            <a:endParaRPr/>
+          </a:p>
+        </p:txBody>
+      </p:sp>
+      <p:sp>
+        <p:nvSpPr>
+          <p:cNvPr id="10" name="Rounded Rectangle 9"/>
+          <p:cNvSpPr/>
+          <p:nvPr/>
+        </p:nvSpPr>
+        <p:spPr>
+          <a:xfrm>
+            <a:off x="5724144" y="1929384"/>
+            <a:ext cx="5669280" cy="3538728"/>
+          </a:xfrm>
+          <a:prstGeom prst="roundRect">
+            <a:avLst/>
+          </a:prstGeom>
+          <a:solidFill>
+            <a:srgbClr val="F6F9FB"/>
+          </a:solidFill>
+          <a:ln>
+            <a:noFill/>
+          </a:ln>
+        </p:spPr>
+        <p:style>
+          <a:lnRef idx="1">
+            <a:schemeClr val="accent1"/>
+          </a:lnRef>
+          <a:fillRef idx="3">
+            <a:schemeClr val="accent1"/>
+          </a:fillRef>
+          <a:effectRef idx="2">
+            <a:schemeClr val="accent1"/>
+          </a:effectRef>
+          <a:fontRef idx="minor">
+            <a:schemeClr val="lt1"/>
+          </a:fontRef>
+        </p:style>
+        <p:txBody>
+          <a:bodyPr rtlCol="0" anchor="ctr"/>
+          <a:lstStyle/>
+          <a:p>
+            <a:pPr algn="ctr"/>
+            <a:endParaRPr/>
+          </a:p>
+        </p:txBody>
+      </p:sp>
+      <p:sp>
+        <p:nvSpPr>
+          <p:cNvPr id="11" name="TextBox 10"/>
+          <p:cNvSpPr txBox="1"/>
+          <p:nvPr/>
+        </p:nvSpPr>
+        <p:spPr>
+          <a:xfrm>
+            <a:off x="5989320" y="2139696"/>
+            <a:ext cx="5029200" cy="329184"/>
+          </a:xfrm>
+          <a:prstGeom prst="rect">
+            <a:avLst/>
+          </a:prstGeom>
+          <a:noFill/>
+        </p:spPr>
+        <p:txBody>
+          <a:bodyPr wrap="square" lIns="36576" rIns="36576">
+            <a:spAutoFit/>
+          </a:bodyPr>
+          <a:lstStyle/>
+          <a:p>
+            <a:pPr>
+              <a:spcAft>
+                <a:spcPts val="0"/>
+              </a:spcAft>
+            </a:pPr>
+            <a:r>
+              <a:rPr sz="1500" b="1">
+                <a:solidFill>
+                  <a:srgbClr val="556572"/>
+                </a:solidFill>
+                <a:latin typeface="Aptos"/>
+              </a:rPr>
+              <a:t>FINANCE EXCEPTION AMOUNTS  ·  ₹ CRORE</a:t>
+            </a:r>
+          </a:p>
+        </p:txBody>
+      </p:sp>
+      <p:sp>
+        <p:nvSpPr>
+          <p:cNvPr id="12" name="TextBox 11"/>
+          <p:cNvSpPr txBox="1"/>
+          <p:nvPr/>
+        </p:nvSpPr>
+        <p:spPr>
+          <a:xfrm>
+            <a:off x="5989320" y="2743200"/>
+            <a:ext cx="2560320" cy="292608"/>
+          </a:xfrm>
+          <a:prstGeom prst="rect">
+            <a:avLst/>
+          </a:prstGeom>
+          <a:noFill/>
+        </p:spPr>
+        <p:txBody>
+          <a:bodyPr wrap="square" lIns="36576" rIns="36576">
+            <a:spAutoFit/>
+          </a:bodyPr>
+          <a:lstStyle/>
+          <a:p>
+            <a:pPr>
+              <a:spcAft>
+                <a:spcPts val="0"/>
+              </a:spcAft>
+            </a:pPr>
+            <a:r>
+              <a:rPr sz="1500" b="0">
+                <a:solidFill>
+                  <a:srgbClr val="11263A"/>
+                </a:solidFill>
+                <a:latin typeface="Aptos"/>
+              </a:rPr>
+              <a:t>At H1 close</a:t>
+            </a:r>
+          </a:p>
+        </p:txBody>
+      </p:sp>
+      <p:sp>
+        <p:nvSpPr>
+          <p:cNvPr id="13" name="Rounded Rectangle 12"/>
+          <p:cNvSpPr/>
+          <p:nvPr/>
+        </p:nvSpPr>
+        <p:spPr>
+          <a:xfrm>
+            <a:off x="8439912" y="2761488"/>
+            <a:ext cx="1780336" cy="301752"/>
+          </a:xfrm>
+          <a:prstGeom prst="roundRect">
+            <a:avLst/>
+          </a:prstGeom>
+          <a:solidFill>
+            <a:srgbClr val="1A3E5C"/>
+          </a:solidFill>
+          <a:ln>
+            <a:noFill/>
+          </a:ln>
+        </p:spPr>
+        <p:style>
+          <a:lnRef idx="1">
+            <a:schemeClr val="accent1"/>
+          </a:lnRef>
+          <a:fillRef idx="3">
+            <a:schemeClr val="accent1"/>
+          </a:fillRef>
+          <a:effectRef idx="2">
+            <a:schemeClr val="accent1"/>
+          </a:effectRef>
+          <a:fontRef idx="minor">
+            <a:schemeClr val="lt1"/>
+          </a:fontRef>
+        </p:style>
+        <p:txBody>
+          <a:bodyPr rtlCol="0" anchor="ctr"/>
+          <a:lstStyle/>
+          <a:p>
+            <a:pPr algn="ctr"/>
+            <a:endParaRPr/>
+          </a:p>
+        </p:txBody>
+      </p:sp>
+      <p:sp>
+        <p:nvSpPr>
+          <p:cNvPr id="14" name="TextBox 13"/>
+          <p:cNvSpPr txBox="1"/>
+          <p:nvPr/>
+        </p:nvSpPr>
+        <p:spPr>
+          <a:xfrm>
+            <a:off x="10415016" y="2724912"/>
+            <a:ext cx="731520" cy="347472"/>
+          </a:xfrm>
+          <a:prstGeom prst="rect">
+            <a:avLst/>
+          </a:prstGeom>
+          <a:noFill/>
+        </p:spPr>
+        <p:txBody>
+          <a:bodyPr wrap="square" lIns="36576" rIns="36576">
+            <a:spAutoFit/>
+          </a:bodyPr>
+          <a:lstStyle/>
+          <a:p>
+            <a:pPr>
+              <a:spcAft>
+                <a:spcPts val="0"/>
+              </a:spcAft>
+            </a:pPr>
+            <a:r>
+              <a:rPr sz="1500" b="1">
+                <a:solidFill>
+                  <a:srgbClr val="11263A"/>
+                </a:solidFill>
+                <a:latin typeface="Aptos"/>
+              </a:rPr>
+              <a:t>1.947</a:t>
+            </a:r>
+          </a:p>
+        </p:txBody>
+      </p:sp>
+      <p:sp>
+        <p:nvSpPr>
+          <p:cNvPr id="15" name="TextBox 14"/>
+          <p:cNvSpPr txBox="1"/>
+          <p:nvPr/>
+        </p:nvSpPr>
+        <p:spPr>
+          <a:xfrm>
+            <a:off x="5989320" y="3593592"/>
+            <a:ext cx="2560320" cy="292608"/>
+          </a:xfrm>
+          <a:prstGeom prst="rect">
+            <a:avLst/>
+          </a:prstGeom>
+          <a:noFill/>
+        </p:spPr>
+        <p:txBody>
+          <a:bodyPr wrap="square" lIns="36576" rIns="36576">
+            <a:spAutoFit/>
+          </a:bodyPr>
+          <a:lstStyle/>
+          <a:p>
+            <a:pPr>
+              <a:spcAft>
+                <a:spcPts val="0"/>
+              </a:spcAft>
+            </a:pPr>
+            <a:r>
+              <a:rPr sz="1500" b="0">
+                <a:solidFill>
+                  <a:srgbClr val="11263A"/>
+                </a:solidFill>
+                <a:latin typeface="Aptos"/>
+              </a:rPr>
+              <a:t>Open at 15 Jul</a:t>
+            </a:r>
+          </a:p>
+        </p:txBody>
+      </p:sp>
+      <p:sp>
+        <p:nvSpPr>
+          <p:cNvPr id="16" name="Rounded Rectangle 15"/>
+          <p:cNvSpPr/>
+          <p:nvPr/>
+        </p:nvSpPr>
+        <p:spPr>
+          <a:xfrm>
+            <a:off x="8439912" y="3611880"/>
+            <a:ext cx="1506931" cy="301752"/>
+          </a:xfrm>
+          <a:prstGeom prst="roundRect">
+            <a:avLst/>
+          </a:prstGeom>
+          <a:solidFill>
+            <a:srgbClr val="0085CC"/>
+          </a:solidFill>
+          <a:ln>
+            <a:noFill/>
+          </a:ln>
+        </p:spPr>
+        <p:style>
+          <a:lnRef idx="1">
+            <a:schemeClr val="accent1"/>
+          </a:lnRef>
+          <a:fillRef idx="3">
+            <a:schemeClr val="accent1"/>
+          </a:fillRef>
+          <a:effectRef idx="2">
+            <a:schemeClr val="accent1"/>
+          </a:effectRef>
+          <a:fontRef idx="minor">
+            <a:schemeClr val="lt1"/>
+          </a:fontRef>
+        </p:style>
+        <p:txBody>
+          <a:bodyPr rtlCol="0" anchor="ctr"/>
+          <a:lstStyle/>
+          <a:p>
+            <a:pPr algn="ctr"/>
+            <a:endParaRPr/>
+          </a:p>
+        </p:txBody>
+      </p:sp>
+      <p:sp>
+        <p:nvSpPr>
+          <p:cNvPr id="17" name="TextBox 16"/>
+          <p:cNvSpPr txBox="1"/>
+          <p:nvPr/>
+        </p:nvSpPr>
+        <p:spPr>
+          <a:xfrm>
+            <a:off x="10415016" y="3575304"/>
+            <a:ext cx="731520" cy="347472"/>
+          </a:xfrm>
+          <a:prstGeom prst="rect">
+            <a:avLst/>
+          </a:prstGeom>
+          <a:noFill/>
+        </p:spPr>
+        <p:txBody>
+          <a:bodyPr wrap="square" lIns="36576" rIns="36576">
+            <a:spAutoFit/>
+          </a:bodyPr>
+          <a:lstStyle/>
+          <a:p>
+            <a:pPr>
+              <a:spcAft>
+                <a:spcPts val="0"/>
+              </a:spcAft>
+            </a:pPr>
+            <a:r>
+              <a:rPr sz="1500" b="1">
+                <a:solidFill>
+                  <a:srgbClr val="11263A"/>
+                </a:solidFill>
+                <a:latin typeface="Aptos"/>
+              </a:rPr>
+              <a:t>1.648</a:t>
+            </a:r>
+          </a:p>
+        </p:txBody>
+      </p:sp>
+      <p:sp>
+        <p:nvSpPr>
+          <p:cNvPr id="18" name="TextBox 17"/>
+          <p:cNvSpPr txBox="1"/>
+          <p:nvPr/>
+        </p:nvSpPr>
+        <p:spPr>
+          <a:xfrm>
+            <a:off x="5989320" y="4443984"/>
+            <a:ext cx="2560320" cy="292608"/>
+          </a:xfrm>
+          <a:prstGeom prst="rect">
+            <a:avLst/>
+          </a:prstGeom>
+          <a:noFill/>
+        </p:spPr>
+        <p:txBody>
+          <a:bodyPr wrap="square" lIns="36576" rIns="36576">
+            <a:spAutoFit/>
+          </a:bodyPr>
+          <a:lstStyle/>
+          <a:p>
+            <a:pPr>
+              <a:spcAft>
+                <a:spcPts val="0"/>
+              </a:spcAft>
+            </a:pPr>
+            <a:r>
+              <a:rPr sz="1500" b="0">
+                <a:solidFill>
+                  <a:srgbClr val="11263A"/>
+                </a:solidFill>
+                <a:latin typeface="Aptos"/>
+              </a:rPr>
+              <a:t>Unmatched H1 captures</a:t>
+            </a:r>
+          </a:p>
+        </p:txBody>
+      </p:sp>
+      <p:sp>
+        <p:nvSpPr>
+          <p:cNvPr id="19" name="Rounded Rectangle 18"/>
+          <p:cNvSpPr/>
+          <p:nvPr/>
+        </p:nvSpPr>
+        <p:spPr>
+          <a:xfrm>
+            <a:off x="8439912" y="4462272"/>
+            <a:ext cx="244144" cy="301752"/>
+          </a:xfrm>
+          <a:prstGeom prst="roundRect">
+            <a:avLst/>
+          </a:prstGeom>
+          <a:solidFill>
+            <a:srgbClr val="CC3044"/>
+          </a:solidFill>
+          <a:ln>
+            <a:noFill/>
+          </a:ln>
+        </p:spPr>
+        <p:style>
+          <a:lnRef idx="1">
+            <a:schemeClr val="accent1"/>
+          </a:lnRef>
+          <a:fillRef idx="3">
+            <a:schemeClr val="accent1"/>
+          </a:fillRef>
+          <a:effectRef idx="2">
+            <a:schemeClr val="accent1"/>
+          </a:effectRef>
+          <a:fontRef idx="minor">
+            <a:schemeClr val="lt1"/>
+          </a:fontRef>
+        </p:style>
+        <p:txBody>
+          <a:bodyPr rtlCol="0" anchor="ctr"/>
+          <a:lstStyle/>
+          <a:p>
+            <a:pPr algn="ctr"/>
+            <a:endParaRPr/>
+          </a:p>
+        </p:txBody>
+      </p:sp>
+      <p:sp>
+        <p:nvSpPr>
+          <p:cNvPr id="20" name="TextBox 19"/>
+          <p:cNvSpPr txBox="1"/>
+          <p:nvPr/>
+        </p:nvSpPr>
+        <p:spPr>
+          <a:xfrm>
+            <a:off x="10415016" y="4425696"/>
+            <a:ext cx="731520" cy="347472"/>
+          </a:xfrm>
+          <a:prstGeom prst="rect">
+            <a:avLst/>
+          </a:prstGeom>
+          <a:noFill/>
+        </p:spPr>
+        <p:txBody>
+          <a:bodyPr wrap="square" lIns="36576" rIns="36576">
+            <a:spAutoFit/>
+          </a:bodyPr>
+          <a:lstStyle/>
+          <a:p>
+            <a:pPr>
+              <a:spcAft>
+                <a:spcPts val="0"/>
+              </a:spcAft>
+            </a:pPr>
+            <a:r>
+              <a:rPr sz="1500" b="1">
+                <a:solidFill>
+                  <a:srgbClr val="11263A"/>
+                </a:solidFill>
+                <a:latin typeface="Aptos"/>
+              </a:rPr>
+              <a:t>0.267</a:t>
+            </a:r>
+          </a:p>
+        </p:txBody>
+      </p:sp>
+      <p:sp>
+        <p:nvSpPr>
+          <p:cNvPr id="21" name="TextBox 20"/>
+          <p:cNvSpPr txBox="1"/>
+          <p:nvPr/>
+        </p:nvSpPr>
+        <p:spPr>
+          <a:xfrm>
+            <a:off x="5980176" y="5010912"/>
+            <a:ext cx="5257800" cy="393192"/>
+          </a:xfrm>
+          <a:prstGeom prst="rect">
+            <a:avLst/>
+          </a:prstGeom>
+          <a:noFill/>
+        </p:spPr>
+        <p:txBody>
+          <a:bodyPr wrap="square" lIns="36576" rIns="36576">
+            <a:spAutoFit/>
+          </a:bodyPr>
+          <a:lstStyle/>
+          <a:p>
+            <a:pPr>
+              <a:spcAft>
+                <a:spcPts val="0"/>
+              </a:spcAft>
+            </a:pPr>
+            <a:r>
+              <a:rPr sz="1100" b="0">
+                <a:solidFill>
+                  <a:srgbClr val="556572"/>
+                </a:solidFill>
+                <a:latin typeface="Aptos"/>
+              </a:rPr>
+              <a:t>Different populations; bars are amounts, not components to add.</a:t>
+            </a:r>
+          </a:p>
+        </p:txBody>
+      </p:sp>
+    </p:spTree>
+  </p:cSld>
+  <p:clrMapOvr>
+    <a:masterClrMapping/>
+  </p:clrMapOvr>
+</p:sld>
+</file>
+
+<file path=ppt/slides/slide6.xml><?xml version="1.0" encoding="utf-8"?>
+<p:sld xmlns:a="http://schemas.openxmlformats.org/drawingml/2006/main" xmlns:r="http://schemas.openxmlformats.org/officeDocument/2006/relationships" xmlns:p="http://schemas.openxmlformats.org/presentationml/2006/main">
+  <p:cSld>
+    <p:spTree>
+      <p:nvGrpSpPr>
+        <p:cNvPr id="1" name=""/>
+        <p:cNvGrpSpPr/>
+        <p:nvPr/>
+      </p:nvGrpSpPr>
+      <p:grpSpPr>
+        <a:xfrm>
+          <a:off x="0" y="0"/>
+          <a:ext cx="0" cy="0"/>
+          <a:chOff x="0" y="0"/>
+          <a:chExt cx="0" cy="0"/>
+        </a:xfrm>
+      </p:grpSpPr>
+      <p:sp>
+        <p:nvSpPr>
+          <p:cNvPr id="2" name="Rounded Rectangle 1"/>
+          <p:cNvSpPr/>
+          <p:nvPr/>
+        </p:nvSpPr>
+        <p:spPr>
+          <a:xfrm>
+            <a:off x="0" y="0"/>
+            <a:ext cx="12191695" cy="73152"/>
+          </a:xfrm>
+          <a:prstGeom prst="roundRect">
+            <a:avLst>
+              <a:gd name="adj" fmla="val 8000"/>
+            </a:avLst>
+          </a:prstGeom>
+          <a:solidFill>
+            <a:srgbClr val="4E38AB"/>
+          </a:solidFill>
+          <a:ln>
+            <a:noFill/>
+          </a:ln>
+        </p:spPr>
+        <p:style>
+          <a:lnRef idx="1">
+            <a:schemeClr val="accent1"/>
+          </a:lnRef>
+          <a:fillRef idx="3">
+            <a:schemeClr val="accent1"/>
+          </a:fillRef>
+          <a:effectRef idx="2">
+            <a:schemeClr val="accent1"/>
+          </a:effectRef>
+          <a:fontRef idx="minor">
+            <a:schemeClr val="lt1"/>
+          </a:fontRef>
+        </p:style>
+        <p:txBody>
+          <a:bodyPr rtlCol="0" anchor="ctr"/>
+          <a:lstStyle/>
+          <a:p>
+            <a:pPr algn="ctr"/>
+            <a:endParaRPr/>
+          </a:p>
+        </p:txBody>
+      </p:sp>
+      <p:sp>
+        <p:nvSpPr>
+          <p:cNvPr id="3" name="TextBox 2"/>
+          <p:cNvSpPr txBox="1"/>
+          <p:nvPr/>
+        </p:nvSpPr>
+        <p:spPr>
+          <a:xfrm>
+            <a:off x="457200" y="228600"/>
+            <a:ext cx="7315200" cy="365760"/>
+          </a:xfrm>
+          <a:prstGeom prst="rect">
+            <a:avLst/>
+          </a:prstGeom>
+          <a:noFill/>
+        </p:spPr>
+        <p:txBody>
           <a:bodyPr wrap="square">
             <a:spAutoFit/>
           </a:bodyPr>
@@ -6784,27 +7540,27 @@
           <a:p>
             <a:pPr algn="l"/>
             <a:r>
-              <a:rPr sz="2400" b="1">
-                <a:solidFill>
-                  <a:srgbClr val="1A1440"/>
-                </a:solidFill>
-                <a:latin typeface="Georgia"/>
-              </a:rPr>
-              <a:t>Appendix A · The decisions that moved the headline</a:t>
-            </a:r>
-          </a:p>
-        </p:txBody>
-      </p:sp>
-      <p:sp>
-        <p:nvSpPr>
-          <p:cNvPr id="8" name="TextBox 7"/>
+              <a:rPr sz="1000" b="1">
+                <a:solidFill>
+                  <a:srgbClr val="4E38AB"/>
+                </a:solidFill>
+                <a:latin typeface="Arial"/>
+              </a:rPr>
+              <a:t>5 · THE CAVEAT AND THE ALTERNATIVE</a:t>
+            </a:r>
+          </a:p>
+        </p:txBody>
+      </p:sp>
+      <p:sp>
+        <p:nvSpPr>
+          <p:cNvPr id="4" name="TextBox 3"/>
           <p:cNvSpPr txBox="1"/>
           <p:nvPr/>
         </p:nvSpPr>
         <p:spPr>
           <a:xfrm>
-            <a:off x="457200" y="1645920"/>
-            <a:ext cx="11247120" cy="4206240"/>
+            <a:off x="10332720" y="228600"/>
+            <a:ext cx="1463040" cy="365760"/>
           </a:xfrm>
           <a:prstGeom prst="rect">
             <a:avLst/>
@@ -6817,30 +7573,1280 @@
           </a:bodyPr>
           <a:lstStyle/>
           <a:p>
-            <a:r>
-              <a:rPr sz="1900"/>
-              <a:t>Rule 1 · Volume: count active nonblank booking-test lines by scheduled date; 4.97% growth reproduces the handbook’s rounded 5%.</a:t>
-            </a:r>
-          </a:p>
-          <a:p/>
-          <a:p>
-            <a:r>
-              <a:rPr sz="1900"/>
-              <a:t>Rule 2 · Matching: exact invoice ID, then hyphen removal only when the canonical invoice key is unique; no amount/date fuzzy matches.</a:t>
-            </a:r>
-          </a:p>
-          <a:p/>
-          <a:p>
-            <a:r>
-              <a:rPr sz="1900"/>
-              <a:t>Rule 3 · Balance: calculate positive balances invoice by invoice; keep ₹0.117 crore overcaptures separate.</a:t>
-            </a:r>
-          </a:p>
-          <a:p/>
-          <a:p>
-            <a:r>
-              <a:rPr sz="1900"/>
-              <a:t>The full cleaning and timing choices are in docs/decisions-log.md.</a:t>
+            <a:pPr algn="r"/>
+            <a:r>
+              <a:rPr sz="1000" b="0">
+                <a:solidFill>
+                  <a:srgbClr val="6B6690"/>
+                </a:solidFill>
+                <a:latin typeface="Arial"/>
+              </a:rPr>
+              <a:t>5 / 6</a:t>
+            </a:r>
+          </a:p>
+        </p:txBody>
+      </p:sp>
+      <p:pic>
+        <p:nvPicPr>
+          <p:cNvPr id="5" name="Picture 4" descr="iitgn_seal.png"/>
+          <p:cNvPicPr>
+            <a:picLocks noChangeAspect="1"/>
+          </p:cNvPicPr>
+          <p:nvPr/>
+        </p:nvPicPr>
+        <p:blipFill>
+          <a:blip r:embed="rId3"/>
+          <a:stretch>
+            <a:fillRect/>
+          </a:stretch>
+        </p:blipFill>
+        <p:spPr>
+          <a:xfrm>
+            <a:off x="457200" y="6263640"/>
+            <a:ext cx="411480" cy="411480"/>
+          </a:xfrm>
+          <a:prstGeom prst="rect">
+            <a:avLst/>
+          </a:prstGeom>
+        </p:spPr>
+      </p:pic>
+      <p:sp>
+        <p:nvSpPr>
+          <p:cNvPr id="6" name="TextBox 5"/>
+          <p:cNvSpPr txBox="1"/>
+          <p:nvPr/>
+        </p:nvSpPr>
+        <p:spPr>
+          <a:xfrm>
+            <a:off x="960120" y="6309360"/>
+            <a:ext cx="9144000" cy="365760"/>
+          </a:xfrm>
+          <a:prstGeom prst="rect">
+            <a:avLst/>
+          </a:prstGeom>
+          <a:noFill/>
+        </p:spPr>
+        <p:txBody>
+          <a:bodyPr wrap="square">
+            <a:spAutoFit/>
+          </a:bodyPr>
+          <a:lstStyle/>
+          <a:p>
+            <a:pPr algn="l"/>
+            <a:r>
+              <a:rPr sz="800" b="0">
+                <a:solidFill>
+                  <a:srgbClr val="6B6690"/>
+                </a:solidFill>
+                <a:latin typeface="Arial"/>
+              </a:rPr>
+              <a:t>Indian Institute of Technology Gandhinagar · PG Diploma in AI-ML and Agentic AI Engineering · Cohort 2 · Build 1</a:t>
+            </a:r>
+          </a:p>
+        </p:txBody>
+      </p:sp>
+      <p:sp>
+        <p:nvSpPr>
+          <p:cNvPr id="7" name="TextBox 6"/>
+          <p:cNvSpPr txBox="1"/>
+          <p:nvPr/>
+        </p:nvSpPr>
+        <p:spPr>
+          <a:xfrm>
+            <a:off x="457200" y="640080"/>
+            <a:ext cx="11247120" cy="914400"/>
+          </a:xfrm>
+          <a:prstGeom prst="rect">
+            <a:avLst/>
+          </a:prstGeom>
+          <a:noFill/>
+        </p:spPr>
+        <p:txBody>
+          <a:bodyPr wrap="square" lIns="36576" rIns="36576">
+            <a:spAutoFit/>
+          </a:bodyPr>
+          <a:lstStyle/>
+          <a:p>
+            <a:pPr algn="l">
+              <a:spcAft>
+                <a:spcPts val="0"/>
+              </a:spcAft>
+            </a:pPr>
+            <a:r>
+              <a:rPr sz="2500" b="1">
+                <a:solidFill>
+                  <a:srgbClr val="11263A"/>
+                </a:solidFill>
+                <a:latin typeface="Aptos"/>
+              </a:rPr>
+              <a:t>What could change the answer—and why we refused fuzzy matches</a:t>
+            </a:r>
+          </a:p>
+        </p:txBody>
+      </p:sp>
+      <p:sp>
+        <p:nvSpPr>
+          <p:cNvPr id="8" name="TextBox 7"/>
+          <p:cNvSpPr txBox="1"/>
+          <p:nvPr/>
+        </p:nvSpPr>
+        <p:spPr>
+          <a:xfrm>
+            <a:off x="457200" y="1645920"/>
+            <a:ext cx="11247120" cy="4206240"/>
+          </a:xfrm>
+          <a:prstGeom prst="rect">
+            <a:avLst/>
+          </a:prstGeom>
+          <a:noFill/>
+        </p:spPr>
+        <p:txBody>
+          <a:bodyPr wrap="square" lIns="36576" rIns="36576">
+            <a:spAutoFit/>
+          </a:bodyPr>
+          <a:lstStyle/>
+          <a:p>
+            <a:pPr algn="l">
+              <a:spcAft>
+                <a:spcPts val="1200"/>
+              </a:spcAft>
+            </a:pPr>
+            <a:r>
+              <a:rPr sz="1900" b="0">
+                <a:solidFill>
+                  <a:srgbClr val="11263A"/>
+                </a:solidFill>
+                <a:latin typeface="Aptos"/>
+              </a:rPr>
+              <a:t>Primary caveat</a:t>
+            </a:r>
+          </a:p>
+          <a:p>
+            <a:pPr>
+              <a:spcAft>
+                <a:spcPts val="1200"/>
+              </a:spcAft>
+            </a:pPr>
+            <a:r>
+              <a:rPr sz="1900" b="0">
+                <a:solidFill>
+                  <a:srgbClr val="11263A"/>
+                </a:solidFill>
+                <a:latin typeface="Aptos"/>
+              </a:rPr>
+              <a:t>Finance must confirm complete source coverage, due dates, refunds/reversals, clinic cash and settlement-to-bank receipts. An open balance is not necessarily a loss.</a:t>
+            </a:r>
+          </a:p>
+          <a:p>
+            <a:pPr>
+              <a:spcAft>
+                <a:spcPts val="1200"/>
+              </a:spcAft>
+            </a:pPr>
+            <a:endParaRPr sz="1900" b="0">
+              <a:solidFill>
+                <a:srgbClr val="11263A"/>
+              </a:solidFill>
+              <a:latin typeface="Aptos"/>
+            </a:endParaRPr>
+          </a:p>
+          <a:p>
+            <a:pPr>
+              <a:spcAft>
+                <a:spcPts val="1200"/>
+              </a:spcAft>
+            </a:pPr>
+            <a:r>
+              <a:rPr sz="1900" b="0">
+                <a:solidFill>
+                  <a:srgbClr val="11263A"/>
+                </a:solidFill>
+                <a:latin typeface="Aptos"/>
+              </a:rPr>
+              <a:t>Rejected approach</a:t>
+            </a:r>
+          </a:p>
+          <a:p>
+            <a:pPr>
+              <a:spcAft>
+                <a:spcPts val="1200"/>
+              </a:spcAft>
+            </a:pPr>
+            <a:r>
+              <a:rPr sz="1900" b="0">
+                <a:solidFill>
+                  <a:srgbClr val="11263A"/>
+                </a:solidFill>
+                <a:latin typeface="Aptos"/>
+              </a:rPr>
+              <a:t>Match payments to invoices on similar amount or date. It risks pairing unrelated visits. We used exact invoice IDs, then separator-normalized IDs only when unique; unresolved records stayed unmatched.</a:t>
+            </a:r>
+          </a:p>
+          <a:p>
+            <a:pPr>
+              <a:spcAft>
+                <a:spcPts val="1200"/>
+              </a:spcAft>
+            </a:pPr>
+            <a:endParaRPr sz="1900" b="0">
+              <a:solidFill>
+                <a:srgbClr val="11263A"/>
+              </a:solidFill>
+              <a:latin typeface="Aptos"/>
+            </a:endParaRPr>
+          </a:p>
+          <a:p>
+            <a:pPr>
+              <a:spcAft>
+                <a:spcPts val="1200"/>
+              </a:spcAft>
+            </a:pPr>
+            <a:r>
+              <a:rPr sz="1900" b="0">
+                <a:solidFill>
+                  <a:srgbClr val="11263A"/>
+                </a:solidFill>
+                <a:latin typeface="Aptos"/>
+              </a:rPr>
+              <a:t>Independent check</a:t>
+            </a:r>
+          </a:p>
+          <a:p>
+            <a:pPr>
+              <a:spcAft>
+                <a:spcPts val="1200"/>
+              </a:spcAft>
+            </a:pPr>
+            <a:r>
+              <a:rPr sz="1900" b="0">
+                <a:solidFill>
+                  <a:srgbClr val="11263A"/>
+                </a:solidFill>
+                <a:latin typeface="Aptos"/>
+              </a:rPr>
+              <a:t>H1 settlement-linked captures exceeded settlement gross by ₹0.608 crore—unresolved, not a proven bank shortage.</a:t>
+            </a:r>
+          </a:p>
+        </p:txBody>
+      </p:sp>
+    </p:spTree>
+  </p:cSld>
+  <p:clrMapOvr>
+    <a:masterClrMapping/>
+  </p:clrMapOvr>
+</p:sld>
+</file>
+
+<file path=ppt/slides/slide7.xml><?xml version="1.0" encoding="utf-8"?>
+<p:sld xmlns:a="http://schemas.openxmlformats.org/drawingml/2006/main" xmlns:r="http://schemas.openxmlformats.org/officeDocument/2006/relationships" xmlns:p="http://schemas.openxmlformats.org/presentationml/2006/main">
+  <p:cSld>
+    <p:spTree>
+      <p:nvGrpSpPr>
+        <p:cNvPr id="1" name=""/>
+        <p:cNvGrpSpPr/>
+        <p:nvPr/>
+      </p:nvGrpSpPr>
+      <p:grpSpPr>
+        <a:xfrm>
+          <a:off x="0" y="0"/>
+          <a:ext cx="0" cy="0"/>
+          <a:chOff x="0" y="0"/>
+          <a:chExt cx="0" cy="0"/>
+        </a:xfrm>
+      </p:grpSpPr>
+      <p:sp>
+        <p:nvSpPr>
+          <p:cNvPr id="2" name="Rounded Rectangle 1"/>
+          <p:cNvSpPr/>
+          <p:nvPr/>
+        </p:nvSpPr>
+        <p:spPr>
+          <a:xfrm>
+            <a:off x="0" y="0"/>
+            <a:ext cx="12191695" cy="73152"/>
+          </a:xfrm>
+          <a:prstGeom prst="roundRect">
+            <a:avLst>
+              <a:gd name="adj" fmla="val 8000"/>
+            </a:avLst>
+          </a:prstGeom>
+          <a:solidFill>
+            <a:srgbClr val="4E38AB"/>
+          </a:solidFill>
+          <a:ln>
+            <a:noFill/>
+          </a:ln>
+        </p:spPr>
+        <p:style>
+          <a:lnRef idx="1">
+            <a:schemeClr val="accent1"/>
+          </a:lnRef>
+          <a:fillRef idx="3">
+            <a:schemeClr val="accent1"/>
+          </a:fillRef>
+          <a:effectRef idx="2">
+            <a:schemeClr val="accent1"/>
+          </a:effectRef>
+          <a:fontRef idx="minor">
+            <a:schemeClr val="lt1"/>
+          </a:fontRef>
+        </p:style>
+        <p:txBody>
+          <a:bodyPr rtlCol="0" anchor="ctr"/>
+          <a:lstStyle/>
+          <a:p>
+            <a:pPr algn="ctr"/>
+            <a:endParaRPr/>
+          </a:p>
+        </p:txBody>
+      </p:sp>
+      <p:sp>
+        <p:nvSpPr>
+          <p:cNvPr id="3" name="TextBox 2"/>
+          <p:cNvSpPr txBox="1"/>
+          <p:nvPr/>
+        </p:nvSpPr>
+        <p:spPr>
+          <a:xfrm>
+            <a:off x="457200" y="228600"/>
+            <a:ext cx="7315200" cy="365760"/>
+          </a:xfrm>
+          <a:prstGeom prst="rect">
+            <a:avLst/>
+          </a:prstGeom>
+          <a:noFill/>
+        </p:spPr>
+        <p:txBody>
+          <a:bodyPr wrap="square">
+            <a:spAutoFit/>
+          </a:bodyPr>
+          <a:lstStyle/>
+          <a:p>
+            <a:pPr algn="l"/>
+            <a:r>
+              <a:rPr sz="1000" b="1">
+                <a:solidFill>
+                  <a:srgbClr val="4E38AB"/>
+                </a:solidFill>
+                <a:latin typeface="Arial"/>
+              </a:rPr>
+              <a:t>6 · THE ACTION</a:t>
+            </a:r>
+          </a:p>
+        </p:txBody>
+      </p:sp>
+      <p:sp>
+        <p:nvSpPr>
+          <p:cNvPr id="4" name="TextBox 3"/>
+          <p:cNvSpPr txBox="1"/>
+          <p:nvPr/>
+        </p:nvSpPr>
+        <p:spPr>
+          <a:xfrm>
+            <a:off x="10332720" y="228600"/>
+            <a:ext cx="1463040" cy="365760"/>
+          </a:xfrm>
+          <a:prstGeom prst="rect">
+            <a:avLst/>
+          </a:prstGeom>
+          <a:noFill/>
+        </p:spPr>
+        <p:txBody>
+          <a:bodyPr wrap="square">
+            <a:spAutoFit/>
+          </a:bodyPr>
+          <a:lstStyle/>
+          <a:p>
+            <a:pPr algn="r"/>
+            <a:r>
+              <a:rPr sz="1000" b="0">
+                <a:solidFill>
+                  <a:srgbClr val="6B6690"/>
+                </a:solidFill>
+                <a:latin typeface="Arial"/>
+              </a:rPr>
+              <a:t>6 / 6</a:t>
+            </a:r>
+          </a:p>
+        </p:txBody>
+      </p:sp>
+      <p:pic>
+        <p:nvPicPr>
+          <p:cNvPr id="5" name="Picture 4" descr="iitgn_seal.png"/>
+          <p:cNvPicPr>
+            <a:picLocks noChangeAspect="1"/>
+          </p:cNvPicPr>
+          <p:nvPr/>
+        </p:nvPicPr>
+        <p:blipFill>
+          <a:blip r:embed="rId3"/>
+          <a:stretch>
+            <a:fillRect/>
+          </a:stretch>
+        </p:blipFill>
+        <p:spPr>
+          <a:xfrm>
+            <a:off x="457200" y="6263640"/>
+            <a:ext cx="411480" cy="411480"/>
+          </a:xfrm>
+          <a:prstGeom prst="rect">
+            <a:avLst/>
+          </a:prstGeom>
+        </p:spPr>
+      </p:pic>
+      <p:sp>
+        <p:nvSpPr>
+          <p:cNvPr id="6" name="TextBox 5"/>
+          <p:cNvSpPr txBox="1"/>
+          <p:nvPr/>
+        </p:nvSpPr>
+        <p:spPr>
+          <a:xfrm>
+            <a:off x="960120" y="6309360"/>
+            <a:ext cx="9144000" cy="365760"/>
+          </a:xfrm>
+          <a:prstGeom prst="rect">
+            <a:avLst/>
+          </a:prstGeom>
+          <a:noFill/>
+        </p:spPr>
+        <p:txBody>
+          <a:bodyPr wrap="square">
+            <a:spAutoFit/>
+          </a:bodyPr>
+          <a:lstStyle/>
+          <a:p>
+            <a:pPr algn="l"/>
+            <a:r>
+              <a:rPr sz="800" b="0">
+                <a:solidFill>
+                  <a:srgbClr val="6B6690"/>
+                </a:solidFill>
+                <a:latin typeface="Arial"/>
+              </a:rPr>
+              <a:t>Indian Institute of Technology Gandhinagar · PG Diploma in AI-ML and Agentic AI Engineering · Cohort 2 · Build 1</a:t>
+            </a:r>
+          </a:p>
+        </p:txBody>
+      </p:sp>
+      <p:sp>
+        <p:nvSpPr>
+          <p:cNvPr id="7" name="TextBox 6"/>
+          <p:cNvSpPr txBox="1"/>
+          <p:nvPr/>
+        </p:nvSpPr>
+        <p:spPr>
+          <a:xfrm>
+            <a:off x="457200" y="640080"/>
+            <a:ext cx="11247120" cy="914400"/>
+          </a:xfrm>
+          <a:prstGeom prst="rect">
+            <a:avLst/>
+          </a:prstGeom>
+          <a:noFill/>
+        </p:spPr>
+        <p:txBody>
+          <a:bodyPr wrap="square" lIns="36576" rIns="36576">
+            <a:spAutoFit/>
+          </a:bodyPr>
+          <a:lstStyle/>
+          <a:p>
+            <a:pPr algn="l">
+              <a:spcAft>
+                <a:spcPts val="0"/>
+              </a:spcAft>
+            </a:pPr>
+            <a:r>
+              <a:rPr sz="2600" b="1">
+                <a:solidFill>
+                  <a:srgbClr val="11263A"/>
+                </a:solidFill>
+                <a:latin typeface="Aptos"/>
+              </a:rPr>
+              <a:t>A Finance exception queue—not an unsupported loss estimate</a:t>
+            </a:r>
+          </a:p>
+        </p:txBody>
+      </p:sp>
+      <p:sp>
+        <p:nvSpPr>
+          <p:cNvPr id="8" name="TextBox 7"/>
+          <p:cNvSpPr txBox="1"/>
+          <p:nvPr/>
+        </p:nvSpPr>
+        <p:spPr>
+          <a:xfrm>
+            <a:off x="457200" y="1645920"/>
+            <a:ext cx="11247120" cy="4206240"/>
+          </a:xfrm>
+          <a:prstGeom prst="rect">
+            <a:avLst/>
+          </a:prstGeom>
+          <a:noFill/>
+        </p:spPr>
+        <p:txBody>
+          <a:bodyPr wrap="square" lIns="36576" rIns="36576">
+            <a:spAutoFit/>
+          </a:bodyPr>
+          <a:lstStyle/>
+          <a:p>
+            <a:pPr algn="l">
+              <a:spcAft>
+                <a:spcPts val="1200"/>
+              </a:spcAft>
+            </a:pPr>
+            <a:r>
+              <a:rPr sz="1800" b="0">
+                <a:solidFill>
+                  <a:srgbClr val="11263A"/>
+                </a:solidFill>
+                <a:latin typeface="Aptos"/>
+              </a:rPr>
+              <a:t>DO FIRST  ·  Review June invoices: ₹0.755 crore remained open by 15 July, 45.8% of the total open balance.</a:t>
+            </a:r>
+          </a:p>
+          <a:p>
+            <a:pPr>
+              <a:spcAft>
+                <a:spcPts val="1200"/>
+              </a:spcAft>
+            </a:pPr>
+            <a:endParaRPr sz="1800" b="0">
+              <a:solidFill>
+                <a:srgbClr val="11263A"/>
+              </a:solidFill>
+              <a:latin typeface="Aptos"/>
+            </a:endParaRPr>
+          </a:p>
+          <a:p>
+            <a:pPr>
+              <a:spcAft>
+                <a:spcPts val="1200"/>
+              </a:spcAft>
+            </a:pPr>
+            <a:r>
+              <a:rPr sz="1800" b="0">
+                <a:solidFill>
+                  <a:srgbClr val="11263A"/>
+                </a:solidFill>
+                <a:latin typeface="Aptos"/>
+              </a:rPr>
+              <a:t>THEN  ·  Investigate 1,541 unmatched H1 captured attempts (₹0.267 crore), preserving raw references and source rows.</a:t>
+            </a:r>
+          </a:p>
+          <a:p>
+            <a:pPr>
+              <a:spcAft>
+                <a:spcPts val="1200"/>
+              </a:spcAft>
+            </a:pPr>
+            <a:endParaRPr sz="1800" b="0">
+              <a:solidFill>
+                <a:srgbClr val="11263A"/>
+              </a:solidFill>
+              <a:latin typeface="Aptos"/>
+            </a:endParaRPr>
+          </a:p>
+          <a:p>
+            <a:pPr>
+              <a:spcAft>
+                <a:spcPts val="1200"/>
+              </a:spcAft>
+            </a:pPr>
+            <a:r>
+              <a:rPr sz="1800" b="0">
+                <a:solidFill>
+                  <a:srgbClr val="11263A"/>
+                </a:solidFill>
+                <a:latin typeface="Aptos"/>
+              </a:rPr>
+              <a:t>EFFORT  ·  Finance + billing + gateway owners: validate IDs, capture cutoffs, refunds, cash and settlement batches. Cost and staffing not estimated in source.</a:t>
+            </a:r>
+          </a:p>
+          <a:p>
+            <a:pPr>
+              <a:spcAft>
+                <a:spcPts val="1200"/>
+              </a:spcAft>
+            </a:pPr>
+            <a:endParaRPr sz="1800" b="0">
+              <a:solidFill>
+                <a:srgbClr val="11263A"/>
+              </a:solidFill>
+              <a:latin typeface="Aptos"/>
+            </a:endParaRPr>
+          </a:p>
+          <a:p>
+            <a:pPr>
+              <a:spcAft>
+                <a:spcPts val="1200"/>
+              </a:spcAft>
+            </a:pPr>
+            <a:r>
+              <a:rPr sz="1800" b="0">
+                <a:solidFill>
+                  <a:srgbClr val="11263A"/>
+                </a:solidFill>
+                <a:latin typeface="Aptos"/>
+              </a:rPr>
+              <a:t>IF WRONG  ·  False matches may hide genuine exceptions; treating late receipts as losses may drive incorrect collection action.</a:t>
+            </a:r>
+          </a:p>
+          <a:p>
+            <a:pPr>
+              <a:spcAft>
+                <a:spcPts val="1200"/>
+              </a:spcAft>
+            </a:pPr>
+            <a:endParaRPr sz="1800" b="0">
+              <a:solidFill>
+                <a:srgbClr val="11263A"/>
+              </a:solidFill>
+              <a:latin typeface="Aptos"/>
+            </a:endParaRPr>
+          </a:p>
+          <a:p>
+            <a:pPr>
+              <a:spcAft>
+                <a:spcPts val="1200"/>
+              </a:spcAft>
+            </a:pPr>
+            <a:r>
+              <a:rPr sz="1800" b="0">
+                <a:solidFill>
+                  <a:srgbClr val="11263A"/>
+                </a:solidFill>
+                <a:latin typeface="Aptos"/>
+              </a:rPr>
+              <a:t>TWO MORE DAYS  ·  Complete an independent full-pack cold run and close settlement-to-bank coverage.</a:t>
+            </a:r>
+          </a:p>
+        </p:txBody>
+      </p:sp>
+    </p:spTree>
+  </p:cSld>
+  <p:clrMapOvr>
+    <a:masterClrMapping/>
+  </p:clrMapOvr>
+</p:sld>
+</file>
+
+<file path=ppt/slides/slide8.xml><?xml version="1.0" encoding="utf-8"?>
+<p:sld xmlns:a="http://schemas.openxmlformats.org/drawingml/2006/main" xmlns:r="http://schemas.openxmlformats.org/officeDocument/2006/relationships" xmlns:p="http://schemas.openxmlformats.org/presentationml/2006/main">
+  <p:cSld>
+    <p:spTree>
+      <p:nvGrpSpPr>
+        <p:cNvPr id="1" name=""/>
+        <p:cNvGrpSpPr/>
+        <p:nvPr/>
+      </p:nvGrpSpPr>
+      <p:grpSpPr>
+        <a:xfrm>
+          <a:off x="0" y="0"/>
+          <a:ext cx="0" cy="0"/>
+          <a:chOff x="0" y="0"/>
+          <a:chExt cx="0" cy="0"/>
+        </a:xfrm>
+      </p:grpSpPr>
+      <p:sp>
+        <p:nvSpPr>
+          <p:cNvPr id="2" name="Rounded Rectangle 1"/>
+          <p:cNvSpPr/>
+          <p:nvPr/>
+        </p:nvSpPr>
+        <p:spPr>
+          <a:xfrm>
+            <a:off x="0" y="0"/>
+            <a:ext cx="12191695" cy="6858000"/>
+          </a:xfrm>
+          <a:prstGeom prst="roundRect">
+            <a:avLst>
+              <a:gd name="adj" fmla="val 8000"/>
+            </a:avLst>
+          </a:prstGeom>
+          <a:solidFill>
+            <a:srgbClr val="1A0F5C"/>
+          </a:solidFill>
+          <a:ln>
+            <a:noFill/>
+          </a:ln>
+        </p:spPr>
+        <p:style>
+          <a:lnRef idx="1">
+            <a:schemeClr val="accent1"/>
+          </a:lnRef>
+          <a:fillRef idx="3">
+            <a:schemeClr val="accent1"/>
+          </a:fillRef>
+          <a:effectRef idx="2">
+            <a:schemeClr val="accent1"/>
+          </a:effectRef>
+          <a:fontRef idx="minor">
+            <a:schemeClr val="lt1"/>
+          </a:fontRef>
+        </p:style>
+        <p:txBody>
+          <a:bodyPr rtlCol="0" anchor="ctr"/>
+          <a:lstStyle/>
+          <a:p>
+            <a:pPr algn="ctr"/>
+            <a:endParaRPr/>
+          </a:p>
+        </p:txBody>
+      </p:sp>
+      <p:sp>
+        <p:nvSpPr>
+          <p:cNvPr id="3" name="TextBox 2"/>
+          <p:cNvSpPr txBox="1"/>
+          <p:nvPr/>
+        </p:nvSpPr>
+        <p:spPr>
+          <a:xfrm>
+            <a:off x="548640" y="2560320"/>
+            <a:ext cx="10972800" cy="1097280"/>
+          </a:xfrm>
+          <a:prstGeom prst="rect">
+            <a:avLst/>
+          </a:prstGeom>
+          <a:noFill/>
+        </p:spPr>
+        <p:txBody>
+          <a:bodyPr wrap="square" lIns="36576" rIns="36576">
+            <a:spAutoFit/>
+          </a:bodyPr>
+          <a:lstStyle/>
+          <a:p>
+            <a:pPr algn="l">
+              <a:spcAft>
+                <a:spcPts val="0"/>
+              </a:spcAft>
+            </a:pPr>
+            <a:r>
+              <a:rPr sz="4200" b="1">
+                <a:solidFill>
+                  <a:srgbClr val="FFFFFF"/>
+                </a:solidFill>
+                <a:latin typeface="Aptos"/>
+              </a:rPr>
+              <a:t>Questions</a:t>
+            </a:r>
+          </a:p>
+        </p:txBody>
+      </p:sp>
+      <p:sp>
+        <p:nvSpPr>
+          <p:cNvPr id="4" name="TextBox 3"/>
+          <p:cNvSpPr txBox="1"/>
+          <p:nvPr/>
+        </p:nvSpPr>
+        <p:spPr>
+          <a:xfrm>
+            <a:off x="548640" y="3657600"/>
+            <a:ext cx="10058400" cy="914400"/>
+          </a:xfrm>
+          <a:prstGeom prst="rect">
+            <a:avLst/>
+          </a:prstGeom>
+          <a:noFill/>
+        </p:spPr>
+        <p:txBody>
+          <a:bodyPr wrap="square" lIns="36576" rIns="36576">
+            <a:spAutoFit/>
+          </a:bodyPr>
+          <a:lstStyle/>
+          <a:p>
+            <a:pPr algn="l">
+              <a:spcAft>
+                <a:spcPts val="1200"/>
+              </a:spcAft>
+            </a:pPr>
+            <a:r>
+              <a:rPr sz="1700" b="0">
+                <a:solidFill>
+                  <a:srgbClr val="FFFFFF"/>
+                </a:solidFill>
+                <a:latin typeface="Aptos"/>
+              </a:rPr>
+              <a:t>Audit trail: github.com/RishabhInTech/c2-build1-brief-C-group-10</a:t>
+            </a:r>
+          </a:p>
+          <a:p>
+            <a:pPr>
+              <a:spcAft>
+                <a:spcPts val="1200"/>
+              </a:spcAft>
+            </a:pPr>
+            <a:r>
+              <a:rPr sz="1700" b="0">
+                <a:solidFill>
+                  <a:srgbClr val="FFFFFF"/>
+                </a:solidFill>
+                <a:latin typeface="Aptos"/>
+              </a:rPr>
+              <a:t>Rishabh branch: docs/brief-c-analysis.md · docs/decisions-log.md</a:t>
+            </a:r>
+          </a:p>
+          <a:p>
+            <a:pPr>
+              <a:spcAft>
+                <a:spcPts val="1200"/>
+              </a:spcAft>
+            </a:pPr>
+            <a:r>
+              <a:rPr sz="1700" b="0">
+                <a:solidFill>
+                  <a:srgbClr val="FFFFFF"/>
+                </a:solidFill>
+                <a:latin typeface="Aptos"/>
+              </a:rPr>
+              <a:t>feature/brief-c-vysag: docs/approach-log.md · docs/challenges-log.md</a:t>
+            </a:r>
+          </a:p>
+        </p:txBody>
+      </p:sp>
+    </p:spTree>
+  </p:cSld>
+  <p:clrMapOvr>
+    <a:masterClrMapping/>
+  </p:clrMapOvr>
+</p:sld>
+</file>
+
+<file path=ppt/slides/slide9.xml><?xml version="1.0" encoding="utf-8"?>
+<p:sld xmlns:a="http://schemas.openxmlformats.org/drawingml/2006/main" xmlns:r="http://schemas.openxmlformats.org/officeDocument/2006/relationships" xmlns:p="http://schemas.openxmlformats.org/presentationml/2006/main">
+  <p:cSld>
+    <p:spTree>
+      <p:nvGrpSpPr>
+        <p:cNvPr id="1" name=""/>
+        <p:cNvGrpSpPr/>
+        <p:nvPr/>
+      </p:nvGrpSpPr>
+      <p:grpSpPr>
+        <a:xfrm>
+          <a:off x="0" y="0"/>
+          <a:ext cx="0" cy="0"/>
+          <a:chOff x="0" y="0"/>
+          <a:chExt cx="0" cy="0"/>
+        </a:xfrm>
+      </p:grpSpPr>
+      <p:sp>
+        <p:nvSpPr>
+          <p:cNvPr id="2" name="Rounded Rectangle 1"/>
+          <p:cNvSpPr/>
+          <p:nvPr/>
+        </p:nvSpPr>
+        <p:spPr>
+          <a:xfrm>
+            <a:off x="0" y="0"/>
+            <a:ext cx="12191695" cy="73152"/>
+          </a:xfrm>
+          <a:prstGeom prst="roundRect">
+            <a:avLst>
+              <a:gd name="adj" fmla="val 8000"/>
+            </a:avLst>
+          </a:prstGeom>
+          <a:solidFill>
+            <a:srgbClr val="4E38AB"/>
+          </a:solidFill>
+          <a:ln>
+            <a:noFill/>
+          </a:ln>
+        </p:spPr>
+        <p:style>
+          <a:lnRef idx="1">
+            <a:schemeClr val="accent1"/>
+          </a:lnRef>
+          <a:fillRef idx="3">
+            <a:schemeClr val="accent1"/>
+          </a:fillRef>
+          <a:effectRef idx="2">
+            <a:schemeClr val="accent1"/>
+          </a:effectRef>
+          <a:fontRef idx="minor">
+            <a:schemeClr val="lt1"/>
+          </a:fontRef>
+        </p:style>
+        <p:txBody>
+          <a:bodyPr rtlCol="0" anchor="ctr"/>
+          <a:lstStyle/>
+          <a:p>
+            <a:pPr algn="ctr"/>
+            <a:endParaRPr/>
+          </a:p>
+        </p:txBody>
+      </p:sp>
+      <p:sp>
+        <p:nvSpPr>
+          <p:cNvPr id="3" name="TextBox 2"/>
+          <p:cNvSpPr txBox="1"/>
+          <p:nvPr/>
+        </p:nvSpPr>
+        <p:spPr>
+          <a:xfrm>
+            <a:off x="457200" y="228600"/>
+            <a:ext cx="7315200" cy="365760"/>
+          </a:xfrm>
+          <a:prstGeom prst="rect">
+            <a:avLst/>
+          </a:prstGeom>
+          <a:noFill/>
+        </p:spPr>
+        <p:txBody>
+          <a:bodyPr wrap="square">
+            <a:spAutoFit/>
+          </a:bodyPr>
+          <a:lstStyle/>
+          <a:p>
+            <a:pPr algn="l"/>
+            <a:r>
+              <a:rPr sz="1000" b="1">
+                <a:solidFill>
+                  <a:srgbClr val="4E38AB"/>
+                </a:solidFill>
+                <a:latin typeface="Arial"/>
+              </a:rPr>
+              <a:t>APPENDIX A</a:t>
+            </a:r>
+          </a:p>
+        </p:txBody>
+      </p:sp>
+      <p:sp>
+        <p:nvSpPr>
+          <p:cNvPr id="4" name="TextBox 3"/>
+          <p:cNvSpPr txBox="1"/>
+          <p:nvPr/>
+        </p:nvSpPr>
+        <p:spPr>
+          <a:xfrm>
+            <a:off x="10332720" y="228600"/>
+            <a:ext cx="1463040" cy="365760"/>
+          </a:xfrm>
+          <a:prstGeom prst="rect">
+            <a:avLst/>
+          </a:prstGeom>
+          <a:noFill/>
+        </p:spPr>
+        <p:txBody>
+          <a:bodyPr wrap="square">
+            <a:spAutoFit/>
+          </a:bodyPr>
+          <a:lstStyle/>
+          <a:p>
+            <a:pPr algn="r"/>
+            <a:r>
+              <a:rPr sz="1000" b="0">
+                <a:solidFill>
+                  <a:srgbClr val="6B6690"/>
+                </a:solidFill>
+                <a:latin typeface="Arial"/>
+              </a:rPr>
+              <a:t>7 / 8</a:t>
+            </a:r>
+          </a:p>
+        </p:txBody>
+      </p:sp>
+      <p:pic>
+        <p:nvPicPr>
+          <p:cNvPr id="5" name="Picture 4" descr="iitgn_seal.png"/>
+          <p:cNvPicPr>
+            <a:picLocks noChangeAspect="1"/>
+          </p:cNvPicPr>
+          <p:nvPr/>
+        </p:nvPicPr>
+        <p:blipFill>
+          <a:blip r:embed="rId3"/>
+          <a:stretch>
+            <a:fillRect/>
+          </a:stretch>
+        </p:blipFill>
+        <p:spPr>
+          <a:xfrm>
+            <a:off x="457200" y="6263640"/>
+            <a:ext cx="411480" cy="411480"/>
+          </a:xfrm>
+          <a:prstGeom prst="rect">
+            <a:avLst/>
+          </a:prstGeom>
+        </p:spPr>
+      </p:pic>
+      <p:sp>
+        <p:nvSpPr>
+          <p:cNvPr id="6" name="TextBox 5"/>
+          <p:cNvSpPr txBox="1"/>
+          <p:nvPr/>
+        </p:nvSpPr>
+        <p:spPr>
+          <a:xfrm>
+            <a:off x="960120" y="6309360"/>
+            <a:ext cx="9144000" cy="365760"/>
+          </a:xfrm>
+          <a:prstGeom prst="rect">
+            <a:avLst/>
+          </a:prstGeom>
+          <a:noFill/>
+        </p:spPr>
+        <p:txBody>
+          <a:bodyPr wrap="square">
+            <a:spAutoFit/>
+          </a:bodyPr>
+          <a:lstStyle/>
+          <a:p>
+            <a:pPr algn="l"/>
+            <a:r>
+              <a:rPr sz="800" b="0">
+                <a:solidFill>
+                  <a:srgbClr val="6B6690"/>
+                </a:solidFill>
+                <a:latin typeface="Arial"/>
+              </a:rPr>
+              <a:t>Indian Institute of Technology Gandhinagar · PG Diploma in AI-ML and Agentic AI Engineering · Cohort 2 · Build 1</a:t>
+            </a:r>
+          </a:p>
+        </p:txBody>
+      </p:sp>
+      <p:sp>
+        <p:nvSpPr>
+          <p:cNvPr id="7" name="TextBox 6"/>
+          <p:cNvSpPr txBox="1"/>
+          <p:nvPr/>
+        </p:nvSpPr>
+        <p:spPr>
+          <a:xfrm>
+            <a:off x="457200" y="640080"/>
+            <a:ext cx="11247120" cy="914400"/>
+          </a:xfrm>
+          <a:prstGeom prst="rect">
+            <a:avLst/>
+          </a:prstGeom>
+          <a:noFill/>
+        </p:spPr>
+        <p:txBody>
+          <a:bodyPr wrap="square" lIns="36576" rIns="36576">
+            <a:spAutoFit/>
+          </a:bodyPr>
+          <a:lstStyle/>
+          <a:p>
+            <a:pPr algn="l">
+              <a:spcAft>
+                <a:spcPts val="0"/>
+              </a:spcAft>
+            </a:pPr>
+            <a:r>
+              <a:rPr sz="2500" b="1">
+                <a:solidFill>
+                  <a:srgbClr val="11263A"/>
+                </a:solidFill>
+                <a:latin typeface="Aptos"/>
+              </a:rPr>
+              <a:t>Appendix A · Rules that protect the claim</a:t>
+            </a:r>
+          </a:p>
+        </p:txBody>
+      </p:sp>
+      <p:sp>
+        <p:nvSpPr>
+          <p:cNvPr id="8" name="TextBox 7"/>
+          <p:cNvSpPr txBox="1"/>
+          <p:nvPr/>
+        </p:nvSpPr>
+        <p:spPr>
+          <a:xfrm>
+            <a:off x="457200" y="1321456"/>
+            <a:ext cx="11247120" cy="4585871"/>
+          </a:xfrm>
+          <a:prstGeom prst="rect">
+            <a:avLst/>
+          </a:prstGeom>
+          <a:noFill/>
+        </p:spPr>
+        <p:txBody>
+          <a:bodyPr wrap="square" lIns="36576" rIns="36576">
+            <a:spAutoFit/>
+          </a:bodyPr>
+          <a:lstStyle/>
+          <a:p>
+            <a:pPr algn="l">
+              <a:spcAft>
+                <a:spcPts val="1200"/>
+              </a:spcAft>
+            </a:pPr>
+            <a:r>
+              <a:rPr sz="1600" b="0" dirty="0">
+                <a:solidFill>
+                  <a:srgbClr val="11263A"/>
+                </a:solidFill>
+                <a:latin typeface="+mj-lt"/>
+              </a:rPr>
+              <a:t>1  Reporting population</a:t>
+            </a:r>
+          </a:p>
+          <a:p>
+            <a:pPr>
+              <a:spcAft>
+                <a:spcPts val="1200"/>
+              </a:spcAft>
+            </a:pPr>
+            <a:r>
+              <a:rPr sz="1600" b="0" dirty="0">
+                <a:solidFill>
+                  <a:srgbClr val="11263A"/>
+                </a:solidFill>
+                <a:latin typeface="+mj-lt"/>
+              </a:rPr>
+              <a:t>H1 invoices dated Jan–Jun; captured payment events evaluated at 30 June and again at 15 July.</a:t>
+            </a:r>
+          </a:p>
+          <a:p>
+            <a:pPr>
+              <a:spcAft>
+                <a:spcPts val="1200"/>
+              </a:spcAft>
+            </a:pPr>
+            <a:endParaRPr sz="1600" b="0" dirty="0">
+              <a:solidFill>
+                <a:srgbClr val="11263A"/>
+              </a:solidFill>
+              <a:latin typeface="+mj-lt"/>
+            </a:endParaRPr>
+          </a:p>
+          <a:p>
+            <a:pPr>
+              <a:spcAft>
+                <a:spcPts val="1200"/>
+              </a:spcAft>
+            </a:pPr>
+            <a:r>
+              <a:rPr sz="1600" b="0" dirty="0">
+                <a:solidFill>
+                  <a:srgbClr val="11263A"/>
+                </a:solidFill>
+                <a:latin typeface="+mj-lt"/>
+              </a:rPr>
+              <a:t>2  Safe matching</a:t>
+            </a:r>
+          </a:p>
+          <a:p>
+            <a:pPr>
+              <a:spcAft>
+                <a:spcPts val="1200"/>
+              </a:spcAft>
+            </a:pPr>
+            <a:r>
+              <a:rPr sz="1600" b="0" dirty="0">
+                <a:solidFill>
+                  <a:srgbClr val="11263A"/>
+                </a:solidFill>
+                <a:latin typeface="+mj-lt"/>
+              </a:rPr>
+              <a:t>Exact invoice ID, then hyphen-stripped canonical key only when unique; no amount/date fuzzy pairing.</a:t>
+            </a:r>
+          </a:p>
+          <a:p>
+            <a:pPr>
+              <a:spcAft>
+                <a:spcPts val="1200"/>
+              </a:spcAft>
+            </a:pPr>
+            <a:endParaRPr sz="1600" b="0" dirty="0">
+              <a:solidFill>
+                <a:srgbClr val="11263A"/>
+              </a:solidFill>
+              <a:latin typeface="+mj-lt"/>
+            </a:endParaRPr>
+          </a:p>
+          <a:p>
+            <a:pPr>
+              <a:spcAft>
+                <a:spcPts val="1200"/>
+              </a:spcAft>
+            </a:pPr>
+            <a:r>
+              <a:rPr sz="1600" b="0" dirty="0">
+                <a:solidFill>
+                  <a:srgbClr val="11263A"/>
+                </a:solidFill>
+                <a:latin typeface="+mj-lt"/>
+              </a:rPr>
+              <a:t>3  Invoice-level balances</a:t>
+            </a:r>
+          </a:p>
+          <a:p>
+            <a:pPr>
+              <a:spcAft>
+                <a:spcPts val="1200"/>
+              </a:spcAft>
+            </a:pPr>
+            <a:r>
+              <a:rPr sz="1600" b="0" dirty="0">
+                <a:solidFill>
+                  <a:srgbClr val="11263A"/>
+                </a:solidFill>
+                <a:latin typeface="+mj-lt"/>
+              </a:rPr>
+              <a:t>Aggregate captured payments per invoice. Do not double-count invoices with repeated payment attempts; do not offset unrelated </a:t>
+            </a:r>
+            <a:r>
+              <a:rPr sz="1600" b="0" dirty="0" err="1">
+                <a:solidFill>
+                  <a:srgbClr val="11263A"/>
+                </a:solidFill>
+                <a:latin typeface="+mj-lt"/>
+              </a:rPr>
+              <a:t>overcaptures</a:t>
+            </a:r>
+            <a:r>
+              <a:rPr sz="1600" b="0" dirty="0">
+                <a:solidFill>
+                  <a:srgbClr val="11263A"/>
+                </a:solidFill>
+                <a:latin typeface="+mj-lt"/>
+              </a:rPr>
+              <a:t>.</a:t>
+            </a:r>
+          </a:p>
+          <a:p>
+            <a:pPr>
+              <a:spcAft>
+                <a:spcPts val="1200"/>
+              </a:spcAft>
+            </a:pPr>
+            <a:endParaRPr sz="1600" b="0" dirty="0">
+              <a:solidFill>
+                <a:srgbClr val="11263A"/>
+              </a:solidFill>
+              <a:latin typeface="+mj-lt"/>
+            </a:endParaRPr>
+          </a:p>
+          <a:p>
+            <a:pPr>
+              <a:spcAft>
+                <a:spcPts val="1200"/>
+              </a:spcAft>
+            </a:pPr>
+            <a:r>
+              <a:rPr sz="1600" b="0" dirty="0">
+                <a:solidFill>
+                  <a:srgbClr val="11263A"/>
+                </a:solidFill>
+                <a:latin typeface="+mj-lt"/>
+              </a:rPr>
+              <a:t>4  Preserve exceptions</a:t>
+            </a:r>
+          </a:p>
+          <a:p>
+            <a:pPr>
+              <a:spcAft>
+                <a:spcPts val="1200"/>
+              </a:spcAft>
+            </a:pPr>
+            <a:r>
+              <a:rPr sz="1600" b="0" dirty="0">
+                <a:solidFill>
+                  <a:srgbClr val="11263A"/>
+                </a:solidFill>
+                <a:latin typeface="+mj-lt"/>
+              </a:rPr>
+              <a:t>Failed attempts are not cash. Unmatched and irregular references remain visible for Finance.</a:t>
             </a:r>
           </a:p>
         </p:txBody>
@@ -7184,44 +9190,44 @@
         <a:sysClr val="window" lastClr="FFFFFF"/>
       </a:lt1>
       <a:dk2>
-        <a:srgbClr val="1F497D"/>
+        <a:srgbClr val="0E2841"/>
       </a:dk2>
       <a:lt2>
-        <a:srgbClr val="EEECE1"/>
+        <a:srgbClr val="E8E8E8"/>
       </a:lt2>
       <a:accent1>
-        <a:srgbClr val="4F81BD"/>
+        <a:srgbClr val="156082"/>
       </a:accent1>
       <a:accent2>
-        <a:srgbClr val="C0504D"/>
+        <a:srgbClr val="E97132"/>
       </a:accent2>
       <a:accent3>
-        <a:srgbClr val="9BBB59"/>
+        <a:srgbClr val="196B24"/>
       </a:accent3>
       <a:accent4>
-        <a:srgbClr val="8064A2"/>
+        <a:srgbClr val="0F9ED5"/>
       </a:accent4>
       <a:accent5>
-        <a:srgbClr val="4BACC6"/>
+        <a:srgbClr val="A02B93"/>
       </a:accent5>
       <a:accent6>
-        <a:srgbClr val="F79646"/>
+        <a:srgbClr val="4EA72E"/>
       </a:accent6>
       <a:hlink>
-        <a:srgbClr val="0000FF"/>
+        <a:srgbClr val="467886"/>
       </a:hlink>
       <a:folHlink>
-        <a:srgbClr val="800080"/>
+        <a:srgbClr val="96607D"/>
       </a:folHlink>
     </a:clrScheme>
     <a:fontScheme name="Office">
       <a:majorFont>
-        <a:latin typeface="Calibri"/>
+        <a:latin typeface="Aptos Display" panose="02110004020202020204"/>
         <a:ea typeface=""/>
         <a:cs typeface=""/>
-        <a:font script="Jpan" typeface="ＭＳ Ｐゴシック"/>
+        <a:font script="Jpan" typeface="游ゴシック Light"/>
         <a:font script="Hang" typeface="맑은 고딕"/>
-        <a:font script="Hans" typeface="宋体"/>
+        <a:font script="Hans" typeface="等线 Light"/>
         <a:font script="Hant" typeface="新細明體"/>
         <a:font script="Arab" typeface="Times New Roman"/>
         <a:font script="Hebr" typeface="Times New Roman"/>
@@ -7249,14 +9255,31 @@
         <a:font script="Viet" typeface="Times New Roman"/>
         <a:font script="Uigh" typeface="Microsoft Uighur"/>
         <a:font script="Geor" typeface="Sylfaen"/>
+        <a:font script="Armn" typeface="Arial"/>
+        <a:font script="Bugi" typeface="Leelawadee UI"/>
+        <a:font script="Bopo" typeface="Microsoft JhengHei"/>
+        <a:font script="Java" typeface="Javanese Text"/>
+        <a:font script="Lisu" typeface="Segoe UI"/>
+        <a:font script="Mymr" typeface="Myanmar Text"/>
+        <a:font script="Nkoo" typeface="Ebrima"/>
+        <a:font script="Olck" typeface="Nirmala UI"/>
+        <a:font script="Osma" typeface="Ebrima"/>
+        <a:font script="Phag" typeface="Phagspa"/>
+        <a:font script="Syrn" typeface="Estrangelo Edessa"/>
+        <a:font script="Syrj" typeface="Estrangelo Edessa"/>
+        <a:font script="Syre" typeface="Estrangelo Edessa"/>
+        <a:font script="Sora" typeface="Nirmala UI"/>
+        <a:font script="Tale" typeface="Microsoft Tai Le"/>
+        <a:font script="Talu" typeface="Microsoft New Tai Lue"/>
+        <a:font script="Tfng" typeface="Ebrima"/>
       </a:majorFont>
       <a:minorFont>
-        <a:latin typeface="Calibri"/>
+        <a:latin typeface="Aptos" panose="02110004020202020204"/>
         <a:ea typeface=""/>
         <a:cs typeface=""/>
-        <a:font script="Jpan" typeface="ＭＳ Ｐゴシック"/>
+        <a:font script="Jpan" typeface="游ゴシック"/>
         <a:font script="Hang" typeface="맑은 고딕"/>
-        <a:font script="Hans" typeface="宋体"/>
+        <a:font script="Hans" typeface="等线"/>
         <a:font script="Hant" typeface="新細明體"/>
         <a:font script="Arab" typeface="Arial"/>
         <a:font script="Hebr" typeface="Arial"/>
@@ -7284,6 +9307,23 @@
         <a:font script="Viet" typeface="Arial"/>
         <a:font script="Uigh" typeface="Microsoft Uighur"/>
         <a:font script="Geor" typeface="Sylfaen"/>
+        <a:font script="Armn" typeface="Arial"/>
+        <a:font script="Bugi" typeface="Leelawadee UI"/>
+        <a:font script="Bopo" typeface="Microsoft JhengHei"/>
+        <a:font script="Java" typeface="Javanese Text"/>
+        <a:font script="Lisu" typeface="Segoe UI"/>
+        <a:font script="Mymr" typeface="Myanmar Text"/>
+        <a:font script="Nkoo" typeface="Ebrima"/>
+        <a:font script="Olck" typeface="Nirmala UI"/>
+        <a:font script="Osma" typeface="Ebrima"/>
+        <a:font script="Phag" typeface="Phagspa"/>
+        <a:font script="Syrn" typeface="Estrangelo Edessa"/>
+        <a:font script="Syrj" typeface="Estrangelo Edessa"/>
+        <a:font script="Syre" typeface="Estrangelo Edessa"/>
+        <a:font script="Sora" typeface="Nirmala UI"/>
+        <a:font script="Tale" typeface="Microsoft Tai Le"/>
+        <a:font script="Talu" typeface="Microsoft New Tai Lue"/>
+        <a:font script="Tfng" typeface="Ebrima"/>
       </a:minorFont>
     </a:fontScheme>
     <a:fmtScheme name="Office">
@@ -7295,180 +9335,136 @@
           <a:gsLst>
             <a:gs pos="0">
               <a:schemeClr val="phClr">
-                <a:tint val="50000"/>
-                <a:satMod val="300000"/>
+                <a:lumMod val="110000"/>
+                <a:satMod val="105000"/>
+                <a:tint val="67000"/>
               </a:schemeClr>
             </a:gs>
-            <a:gs pos="35000">
+            <a:gs pos="50000">
               <a:schemeClr val="phClr">
-                <a:tint val="37000"/>
-                <a:satMod val="300000"/>
+                <a:lumMod val="105000"/>
+                <a:satMod val="103000"/>
+                <a:tint val="73000"/>
               </a:schemeClr>
             </a:gs>
             <a:gs pos="100000">
               <a:schemeClr val="phClr">
-                <a:tint val="15000"/>
-                <a:satMod val="350000"/>
+                <a:lumMod val="105000"/>
+                <a:satMod val="109000"/>
+                <a:tint val="81000"/>
               </a:schemeClr>
             </a:gs>
           </a:gsLst>
-          <a:lin ang="16200000" scaled="1"/>
+          <a:lin ang="5400000" scaled="0"/>
         </a:gradFill>
         <a:gradFill rotWithShape="1">
           <a:gsLst>
             <a:gs pos="0">
               <a:schemeClr val="phClr">
-                <a:tint val="100000"/>
+                <a:satMod val="103000"/>
+                <a:lumMod val="102000"/>
+                <a:tint val="94000"/>
+              </a:schemeClr>
+            </a:gs>
+            <a:gs pos="50000">
+              <a:schemeClr val="phClr">
+                <a:satMod val="110000"/>
+                <a:lumMod val="100000"/>
                 <a:shade val="100000"/>
-                <a:satMod val="130000"/>
               </a:schemeClr>
             </a:gs>
             <a:gs pos="100000">
               <a:schemeClr val="phClr">
-                <a:tint val="50000"/>
-                <a:shade val="100000"/>
-                <a:satMod val="350000"/>
+                <a:lumMod val="99000"/>
+                <a:satMod val="120000"/>
+                <a:shade val="78000"/>
               </a:schemeClr>
             </a:gs>
           </a:gsLst>
-          <a:lin ang="16200000" scaled="0"/>
+          <a:lin ang="5400000" scaled="0"/>
         </a:gradFill>
       </a:fillStyleLst>
       <a:lnStyleLst>
-        <a:ln w="9525" cap="flat" cmpd="sng" algn="ctr">
+        <a:ln w="12700" cap="flat" cmpd="sng" algn="ctr">
           <a:solidFill>
-            <a:schemeClr val="phClr">
-              <a:shade val="95000"/>
-              <a:satMod val="105000"/>
-            </a:schemeClr>
+            <a:schemeClr val="phClr"/>
           </a:solidFill>
           <a:prstDash val="solid"/>
+          <a:miter lim="800000"/>
+        </a:ln>
+        <a:ln w="19050" cap="flat" cmpd="sng" algn="ctr">
+          <a:solidFill>
+            <a:schemeClr val="phClr"/>
+          </a:solidFill>
+          <a:prstDash val="solid"/>
+          <a:miter lim="800000"/>
         </a:ln>
         <a:ln w="25400" cap="flat" cmpd="sng" algn="ctr">
           <a:solidFill>
             <a:schemeClr val="phClr"/>
           </a:solidFill>
           <a:prstDash val="solid"/>
-        </a:ln>
-        <a:ln w="38100" cap="flat" cmpd="sng" algn="ctr">
-          <a:solidFill>
-            <a:schemeClr val="phClr"/>
-          </a:solidFill>
-          <a:prstDash val="solid"/>
+          <a:miter lim="800000"/>
         </a:ln>
       </a:lnStyleLst>
       <a:effectStyleLst>
         <a:effectStyle>
+          <a:effectLst/>
+        </a:effectStyle>
+        <a:effectStyle>
+          <a:effectLst/>
+        </a:effectStyle>
+        <a:effectStyle>
           <a:effectLst>
-            <a:outerShdw blurRad="40000" dist="20000" dir="5400000" rotWithShape="0">
+            <a:outerShdw blurRad="57150" dist="19050" dir="5400000" algn="ctr" rotWithShape="0">
               <a:srgbClr val="000000">
-                <a:alpha val="38000"/>
+                <a:alpha val="63000"/>
               </a:srgbClr>
             </a:outerShdw>
           </a:effectLst>
-        </a:effectStyle>
-        <a:effectStyle>
-          <a:effectLst>
-            <a:outerShdw blurRad="40000" dist="23000" dir="5400000" rotWithShape="0">
-              <a:srgbClr val="000000">
-                <a:alpha val="35000"/>
-              </a:srgbClr>
-            </a:outerShdw>
-          </a:effectLst>
-        </a:effectStyle>
-        <a:effectStyle>
-          <a:effectLst>
-            <a:outerShdw blurRad="40000" dist="23000" dir="5400000" rotWithShape="0">
-              <a:srgbClr val="000000">
-                <a:alpha val="35000"/>
-              </a:srgbClr>
-            </a:outerShdw>
-          </a:effectLst>
-          <a:scene3d>
-            <a:camera prst="orthographicFront">
-              <a:rot lat="0" lon="0" rev="0"/>
-            </a:camera>
-            <a:lightRig rig="threePt" dir="t">
-              <a:rot lat="0" lon="0" rev="1200000"/>
-            </a:lightRig>
-          </a:scene3d>
-          <a:sp3d>
-            <a:bevelT w="63500" h="25400"/>
-          </a:sp3d>
         </a:effectStyle>
       </a:effectStyleLst>
       <a:bgFillStyleLst>
         <a:solidFill>
           <a:schemeClr val="phClr"/>
         </a:solidFill>
+        <a:solidFill>
+          <a:schemeClr val="phClr">
+            <a:tint val="95000"/>
+            <a:satMod val="170000"/>
+          </a:schemeClr>
+        </a:solidFill>
         <a:gradFill rotWithShape="1">
           <a:gsLst>
             <a:gs pos="0">
               <a:schemeClr val="phClr">
-                <a:tint val="40000"/>
-                <a:satMod val="350000"/>
+                <a:tint val="93000"/>
+                <a:satMod val="150000"/>
+                <a:shade val="98000"/>
+                <a:lumMod val="102000"/>
               </a:schemeClr>
             </a:gs>
-            <a:gs pos="40000">
+            <a:gs pos="50000">
               <a:schemeClr val="phClr">
-                <a:tint val="45000"/>
-                <a:shade val="99000"/>
-                <a:satMod val="350000"/>
+                <a:tint val="98000"/>
+                <a:satMod val="130000"/>
+                <a:shade val="90000"/>
+                <a:lumMod val="103000"/>
               </a:schemeClr>
             </a:gs>
             <a:gs pos="100000">
               <a:schemeClr val="phClr">
-                <a:shade val="20000"/>
-                <a:satMod val="255000"/>
+                <a:shade val="63000"/>
+                <a:satMod val="120000"/>
               </a:schemeClr>
             </a:gs>
           </a:gsLst>
-          <a:path path="circle">
-            <a:fillToRect l="50000" t="-80000" r="50000" b="180000"/>
-          </a:path>
-        </a:gradFill>
-        <a:gradFill rotWithShape="1">
-          <a:gsLst>
-            <a:gs pos="0">
-              <a:schemeClr val="phClr">
-                <a:tint val="80000"/>
-                <a:satMod val="300000"/>
-              </a:schemeClr>
-            </a:gs>
-            <a:gs pos="100000">
-              <a:schemeClr val="phClr">
-                <a:shade val="30000"/>
-                <a:satMod val="200000"/>
-              </a:schemeClr>
-            </a:gs>
-          </a:gsLst>
-          <a:path path="circle">
-            <a:fillToRect l="50000" t="50000" r="50000" b="50000"/>
-          </a:path>
+          <a:lin ang="5400000" scaled="0"/>
         </a:gradFill>
       </a:bgFillStyleLst>
     </a:fmtScheme>
   </a:themeElements>
   <a:objectDefaults>
-    <a:spDef>
-      <a:spPr/>
-      <a:bodyPr/>
-      <a:lstStyle/>
-      <a:style>
-        <a:lnRef idx="1">
-          <a:schemeClr val="accent1"/>
-        </a:lnRef>
-        <a:fillRef idx="3">
-          <a:schemeClr val="accent1"/>
-        </a:fillRef>
-        <a:effectRef idx="2">
-          <a:schemeClr val="accent1"/>
-        </a:effectRef>
-        <a:fontRef idx="minor">
-          <a:schemeClr val="lt1"/>
-        </a:fontRef>
-      </a:style>
-    </a:spDef>
     <a:lnDef>
       <a:spPr/>
       <a:bodyPr/>
@@ -7490,5 +9486,10 @@
     </a:lnDef>
   </a:objectDefaults>
   <a:extraClrSchemeLst/>
+  <a:extLst>
+    <a:ext uri="{05A4C25C-085E-4340-85A3-A5531E510DB2}">
+      <thm15:themeFamily xmlns:thm15="http://schemas.microsoft.com/office/thememl/2012/main" name="Office Theme" id="{2E142A2C-CD16-42D6-873A-C26D2A0506FA}" vid="{1BDDFF52-6CD6-40A5-AB3C-68EB2F1E4D0A}"/>
+    </a:ext>
+  </a:extLst>
 </a:theme>
 </file>
--- a/slides/Group10_Brief_C.pptx
+++ b/slides/Group10_Brief_C.pptx
@@ -4196,7 +4196,7 @@
                 </a:solidFill>
                 <a:latin typeface="Aptos"/>
               </a:rPr>
-              <a:t>At 15 July: ₹1.648 crore remains open across 9,824 H1 invoices (6.14% of H1 billings).</a:t>
+              <a:t>Volume growth: 5% actual; 18% plan-estimated. At 15 July, ₹1.648 crore remained open across 9,824 H1 invoices.</a:t>
             </a:r>
           </a:p>
         </p:txBody>
@@ -8102,7 +8102,7 @@
                 </a:solidFill>
                 <a:latin typeface="Aptos"/>
               </a:rPr>
-              <a:t>DO FIRST  ·  Review June invoices: ₹0.755 crore remained open by 15 July, 45.8% of the total open balance.</a:t>
+              <a:t>DO FIRST  ·  June at H1 close: ₹1.053 crore across 6,256 invoices (54.1% of close balance); ₹0.755 crore remained at 15 July.</a:t>
             </a:r>
           </a:p>
           <a:p>
@@ -8131,7 +8131,7 @@
                 </a:solidFill>
                 <a:latin typeface="Aptos"/>
               </a:rPr>
-              <a:t>THEN  ·  Investigate 1,541 unmatched H1 captured attempts (₹0.267 crore), preserving raw references and source rows.</a:t>
+              <a:t>THEN  ·  Reconcile 1,541 unmatched captures (₹26.68 lakh), led by UPI (792 / ₹13.76 lakh); review reference variants.</a:t>
             </a:r>
           </a:p>
           <a:p>
@@ -8160,7 +8160,7 @@
                 </a:solidFill>
                 <a:latin typeface="Aptos"/>
               </a:rPr>
-              <a:t>EFFORT  ·  Finance + billing + gateway owners: validate IDs, capture cutoffs, refunds, cash and settlement batches. Cost and staffing not estimated in source.</a:t>
+              <a:t>EFFORT  ·  H1-close city balances (₹ lakh): Bengaluru 46.32; Ahmedabad 36.55; Chennai 33.39; Hyderabad 33.07; Pune 28.28; Jaipur 17.04. Compare with billed value before ranking.</a:t>
             </a:r>
           </a:p>
           <a:p>
